--- a/RSNA_Knee_MRI_MidSem_Deck.pptx
+++ b/RSNA_Knee_MRI_MidSem_Deck.pptx
@@ -28,9 +28,11 @@
     <p:sldId id="276" r:id="rId22"/>
     <p:sldId id="277" r:id="rId23"/>
     <p:sldId id="278" r:id="rId24"/>
+    <p:sldId id="279" r:id="rId25"/>
+    <p:sldId id="280" r:id="rId26"/>
   </p:sldIdLst>
   <p:notesMasterIdLst>
-    <p:notesMasterId r:id="rId25"/>
+    <p:notesMasterId r:id="rId27"/>
   </p:notesMasterIdLst>
   <p:sldSz cx="12192000" cy="6858000"/>
   <p:notesSz cx="6858000" cy="12192000"/>
@@ -129,24 +131,24 @@
   <p:extLst>
     <p:ext uri="{521415D9-36F7-43E2-AB2F-B90AF26B5E84}">
       <p14:sectionLst xmlns:p14="http://schemas.microsoft.com/office/powerpoint/2010/main">
-        <p14:section name="Opening" id="{84342c14-5bd3-dd8b-3614-470fe722edc1}">
+        <p14:section name="Opening" id="{8858853b-7852-f728-286b-443635f367fc}">
           <p14:sldIdLst>
             <p14:sldId id="256"/>
           </p14:sldIdLst>
         </p14:section>
-        <p14:section name="Introduction" id="{63f39b3c-03c9-fab2-ae29-6a0564deda34}">
+        <p14:section name="Introduction" id="{bbd3b750-15ab-1101-2158-369ddc8c922a}">
           <p14:sldIdLst>
             <p14:sldId id="257"/>
             <p14:sldId id="258"/>
             <p14:sldId id="259"/>
           </p14:sldIdLst>
         </p14:section>
-        <p14:section name="Problem &amp; data" id="{f35688f3-89d2-1545-e541-6a99bd7fb148}">
+        <p14:section name="Problem &amp; data" id="{fab49e61-84f5-1a56-550a-b09b6c40a518}">
           <p14:sldIdLst>
             <p14:sldId id="260"/>
           </p14:sldIdLst>
         </p14:section>
-        <p14:section name="Method" id="{0cbcf569-65b5-dc15-e099-2c5947be2f93}">
+        <p14:section name="Method" id="{ec247a62-da8f-3e7c-8d75-8293bdaabf00}">
           <p14:sldIdLst>
             <p14:sldId id="261"/>
             <p14:sldId id="262"/>
@@ -157,27 +159,29 @@
             <p14:sldId id="267"/>
           </p14:sldIdLst>
         </p14:section>
-        <p14:section name="Experiments" id="{b6de9441-bf47-a2d9-1307-c642ac02b1b1}">
+        <p14:section name="Experiments" id="{3bb06493-e7b7-efb0-8ff5-029317b9e672}">
           <p14:sldIdLst>
             <p14:sldId id="268"/>
             <p14:sldId id="269"/>
             <p14:sldId id="270"/>
             <p14:sldId id="271"/>
+            <p14:sldId id="272"/>
+            <p14:sldId id="273"/>
           </p14:sldIdLst>
         </p14:section>
-        <p14:section name="Results" id="{842d7104-6662-a9f5-9cb1-530a146e0fe0}">
+        <p14:section name="Results" id="{1db4edc3-5414-9af0-900e-2a727a3f3b85}">
           <p14:sldIdLst>
-            <p14:sldId id="272"/>
-            <p14:sldId id="273"/>
             <p14:sldId id="274"/>
+            <p14:sldId id="275"/>
+            <p14:sldId id="276"/>
           </p14:sldIdLst>
         </p14:section>
-        <p14:section name="Conclusion" id="{1f6e8427-61a2-6e5a-f914-6f0e44b663b2}">
+        <p14:section name="Conclusion" id="{c31e6d89-48d5-bcee-4032-ec43b29e52d6}">
           <p14:sldIdLst>
-            <p14:sldId id="275"/>
-            <p14:sldId id="276"/>
             <p14:sldId id="277"/>
             <p14:sldId id="278"/>
+            <p14:sldId id="279"/>
+            <p14:sldId id="280"/>
           </p14:sldIdLst>
         </p14:section>
       </p14:sectionLst>
@@ -918,6 +922,1496 @@
                 </a:solidFill>
                 <a:latin typeface="+mn-lt"/>
               </a:rPr>
+              <a:t>Macro AUC vs ensemble size (one family)</a:t>
+            </a:r>
+          </a:p>
+        </c:rich>
+      </c:tx>
+      <c:layout/>
+      <c:overlay val="0"/>
+    </c:title>
+    <c:autoTitleDeleted val="0"/>
+    <c:plotArea>
+      <c:layout/>
+      <c:barChart>
+        <c:barDir val="col"/>
+        <c:grouping val="clustered"/>
+        <c:varyColors val="0"/>
+        <c:ser>
+          <c:idx val="0"/>
+          <c:order val="0"/>
+          <c:tx>
+            <c:strRef>
+              <c:f>Sheet1!$B$1</c:f>
+              <c:strCache>
+                <c:ptCount val="1"/>
+                <c:pt idx="0">
+                  <c:v>Macro AUC</c:v>
+                </c:pt>
+              </c:strCache>
+            </c:strRef>
+          </c:tx>
+          <c:spPr>
+            <a:solidFill>
+              <a:srgbClr val="15857B"/>
+            </a:solidFill>
+            <a:effectLst/>
+          </c:spPr>
+          <c:invertIfNegative val="0"/>
+          <c:dLbls>
+            <c:numFmt formatCode="0.000" sourceLinked="0"/>
+            <c:txPr>
+              <a:bodyPr/>
+              <a:lstStyle/>
+              <a:p>
+                <a:pPr>
+                  <a:defRPr b="1" i="0" strike="noStrike" sz="1200" u="none">
+                    <a:solidFill>
+                      <a:srgbClr val="111A24"/>
+                    </a:solidFill>
+                    <a:latin typeface="+mn-lt"/>
+                  </a:defRPr>
+                </a:pPr>
+              </a:p>
+            </c:txPr>
+            <c:showLegendKey val="0"/>
+            <c:showVal val="1"/>
+            <c:showCatName val="0"/>
+            <c:showSerName val="0"/>
+            <c:showPercent val="0"/>
+            <c:showBubbleSize val="0"/>
+            <c:showLeaderLines val="0"/>
+          </c:dLbls>
+          <c:cat>
+            <c:multiLvlStrRef>
+              <c:f>Sheet1!$A$2:$A$6</c:f>
+              <c:multiLvlStrCache>
+                <c:ptCount val="5"/>
+                <c:lvl>
+                  <c:pt idx="0">
+                    <c:v>1 member</c:v>
+                  </c:pt>
+                  <c:pt idx="1">
+                    <c:v>2 members</c:v>
+                  </c:pt>
+                  <c:pt idx="2">
+                    <c:v>5 members</c:v>
+                  </c:pt>
+                  <c:pt idx="3">
+                    <c:v>10 members</c:v>
+                  </c:pt>
+                  <c:pt idx="4">
+                    <c:v>20 members</c:v>
+                  </c:pt>
+                </c:lvl>
+              </c:multiLvlStrCache>
+            </c:multiLvlStrRef>
+          </c:cat>
+          <c:val>
+            <c:numRef>
+              <c:f>Sheet1!$B$2:$B$6</c:f>
+              <c:numCache>
+                <c:formatCode>General</c:formatCode>
+                <c:ptCount val="5"/>
+                <c:pt idx="0">
+                  <c:v>0.898906579801736</c:v>
+                </c:pt>
+                <c:pt idx="1">
+                  <c:v>0.9165644265830523</c:v>
+                </c:pt>
+                <c:pt idx="2">
+                  <c:v>0.927812463857216</c:v>
+                </c:pt>
+                <c:pt idx="3">
+                  <c:v>0.9316650089682336</c:v>
+                </c:pt>
+                <c:pt idx="4">
+                  <c:v>0.9336904389205836</c:v>
+                </c:pt>
+              </c:numCache>
+            </c:numRef>
+          </c:val>
+        </c:ser>
+        <c:dLbls>
+          <c:numFmt formatCode="0.000" sourceLinked="0"/>
+          <c:txPr>
+            <a:bodyPr/>
+            <a:lstStyle/>
+            <a:p>
+              <a:pPr>
+                <a:defRPr b="1" i="0" strike="noStrike" sz="1200" u="none">
+                  <a:solidFill>
+                    <a:srgbClr val="111A24"/>
+                  </a:solidFill>
+                  <a:latin typeface="+mn-lt"/>
+                </a:defRPr>
+              </a:pPr>
+            </a:p>
+          </c:txPr>
+          <c:showLegendKey val="0"/>
+          <c:showVal val="1"/>
+          <c:showCatName val="0"/>
+          <c:showSerName val="0"/>
+          <c:showPercent val="0"/>
+          <c:showBubbleSize val="0"/>
+          <c:showLeaderLines val="0"/>
+        </c:dLbls>
+        <c:gapWidth val="55"/>
+        <c:overlap val="0"/>
+        <c:axId val="2094734554"/>
+        <c:axId val="2094734552"/>
+        <c:axId val="2094734556"/>
+      </c:barChart>
+      <c:catAx>
+        <c:axId val="2094734554"/>
+        <c:scaling>
+          <c:orientation val="minMax"/>
+        </c:scaling>
+        <c:delete val="0"/>
+        <c:axPos val="b"/>
+        <c:numFmt formatCode="General" sourceLinked="1"/>
+        <c:majorTickMark val="out"/>
+        <c:minorTickMark val="none"/>
+        <c:tickLblPos val="low"/>
+        <c:spPr>
+          <a:ln w="12700" cap="flat">
+            <a:solidFill>
+              <a:srgbClr val="888888"/>
+            </a:solidFill>
+            <a:prstDash val="solid"/>
+            <a:round/>
+          </a:ln>
+        </c:spPr>
+        <c:txPr>
+          <a:bodyPr/>
+          <a:lstStyle/>
+          <a:p>
+            <a:pPr>
+              <a:defRPr sz="1200" b="0" i="0" u="none" strike="noStrike">
+                <a:solidFill>
+                  <a:srgbClr val="33424F"/>
+                </a:solidFill>
+                <a:latin typeface="+mn-lt"/>
+              </a:defRPr>
+            </a:pPr>
+            <a:endParaRPr lang="en-US"/>
+          </a:p>
+        </c:txPr>
+        <c:crossAx val="2094734552"/>
+        <c:crosses val="autoZero"/>
+        <c:auto val="1"/>
+        <c:lblAlgn val="ctr"/>
+        <c:noMultiLvlLbl val="1"/>
+      </c:catAx>
+      <c:valAx>
+        <c:axId val="2094734552"/>
+        <c:scaling>
+          <c:orientation val="minMax"/>
+          <c:max val="0.95"/>
+          <c:min val="0.88"/>
+        </c:scaling>
+        <c:delete val="0"/>
+        <c:axPos val="l"/>
+        <c:majorGridlines>
+          <c:spPr>
+            <a:ln w="9525" cap="flat">
+              <a:solidFill>
+                <a:srgbClr val="D5DDE3"/>
+              </a:solidFill>
+              <a:prstDash val="solid"/>
+              <a:round/>
+            </a:ln>
+          </c:spPr>
+        </c:majorGridlines>
+        <c:numFmt formatCode="0.00" sourceLinked="0"/>
+        <c:majorTickMark val="out"/>
+        <c:minorTickMark val="none"/>
+        <c:tickLblPos val="nextTo"/>
+        <c:spPr>
+          <a:ln w="12700" cap="flat">
+            <a:solidFill>
+              <a:srgbClr val="888888"/>
+            </a:solidFill>
+            <a:prstDash val="solid"/>
+            <a:round/>
+          </a:ln>
+        </c:spPr>
+        <c:txPr>
+          <a:bodyPr/>
+          <a:lstStyle/>
+          <a:p>
+            <a:pPr>
+              <a:defRPr sz="1100" b="0" i="0" u="none" strike="noStrike">
+                <a:solidFill>
+                  <a:srgbClr val="5B6B7A"/>
+                </a:solidFill>
+                <a:latin typeface="+mn-lt"/>
+              </a:defRPr>
+            </a:pPr>
+            <a:endParaRPr lang="en-US"/>
+          </a:p>
+        </c:txPr>
+        <c:crossAx val="2094734554"/>
+        <c:crosses val="autoZero"/>
+        <c:crossBetween val="between"/>
+      </c:valAx>
+      <c:spPr>
+        <a:noFill/>
+        <a:ln>
+          <a:noFill/>
+        </a:ln>
+        <a:effectLst/>
+      </c:spPr>
+    </c:plotArea>
+    <c:plotVisOnly val="1"/>
+    <c:dispBlanksAs val="span"/>
+  </c:chart>
+  <c:spPr>
+    <a:noFill/>
+    <a:ln>
+      <a:noFill/>
+    </a:ln>
+    <a:effectLst/>
+  </c:spPr>
+  <c:externalData r:id="rId1">
+    <c:autoUpdate val="0"/>
+  </c:externalData>
+</c:chartSpace>
+</file>
+
+<file path=ppt/charts/chart4.xml><?xml version="1.0" encoding="utf-8"?>
+<c:chartSpace xmlns:c="http://schemas.openxmlformats.org/drawingml/2006/chart" xmlns:a="http://schemas.openxmlformats.org/drawingml/2006/main" xmlns:r="http://schemas.openxmlformats.org/officeDocument/2006/relationships">
+  <c:date1904 val="0"/>
+  <c:roundedCorners val="1"/>
+  <c:chart>
+    <c:title>
+      <c:tx>
+        <c:rich>
+          <a:bodyPr/>
+          <a:lstStyle/>
+          <a:p>
+            <a:pPr>
+              <a:defRPr sz="1400" b="1" i="0" u="none" strike="noStrike">
+                <a:solidFill>
+                  <a:srgbClr val="24384A"/>
+                </a:solidFill>
+                <a:latin typeface="+mn-lt"/>
+              </a:defRPr>
+            </a:pPr>
+            <a:r>
+              <a:rPr sz="1400" b="1" i="0" u="none" strike="noStrike">
+                <a:solidFill>
+                  <a:srgbClr val="24384A"/>
+                </a:solidFill>
+                <a:latin typeface="+mn-lt"/>
+              </a:rPr>
+              <a:t>Macro AUC vs error correlation ρ between families</a:t>
+            </a:r>
+          </a:p>
+        </c:rich>
+      </c:tx>
+      <c:layout/>
+      <c:overlay val="0"/>
+    </c:title>
+    <c:autoTitleDeleted val="0"/>
+    <c:plotArea>
+      <c:layout/>
+      <c:barChart>
+        <c:barDir val="col"/>
+        <c:grouping val="clustered"/>
+        <c:varyColors val="0"/>
+        <c:ser>
+          <c:idx val="0"/>
+          <c:order val="0"/>
+          <c:tx>
+            <c:strRef>
+              <c:f>Sheet1!$B$1</c:f>
+              <c:strCache>
+                <c:ptCount val="1"/>
+                <c:pt idx="0">
+                  <c:v>DINO ensemble ×20 alone</c:v>
+                </c:pt>
+              </c:strCache>
+            </c:strRef>
+          </c:tx>
+          <c:spPr>
+            <a:solidFill>
+              <a:srgbClr val="15857B"/>
+            </a:solidFill>
+            <a:effectLst/>
+          </c:spPr>
+          <c:invertIfNegative val="0"/>
+          <c:dLbls>
+            <c:numFmt formatCode="0.000" sourceLinked="0"/>
+            <c:txPr>
+              <a:bodyPr/>
+              <a:lstStyle/>
+              <a:p>
+                <a:pPr>
+                  <a:defRPr b="1" i="0" strike="noStrike" sz="1100" u="none">
+                    <a:solidFill>
+                      <a:srgbClr val="111A24"/>
+                    </a:solidFill>
+                    <a:latin typeface="+mn-lt"/>
+                  </a:defRPr>
+                </a:pPr>
+              </a:p>
+            </c:txPr>
+            <c:showLegendKey val="0"/>
+            <c:showVal val="1"/>
+            <c:showCatName val="0"/>
+            <c:showSerName val="0"/>
+            <c:showPercent val="0"/>
+            <c:showBubbleSize val="0"/>
+            <c:showLeaderLines val="0"/>
+          </c:dLbls>
+          <c:cat>
+            <c:multiLvlStrRef>
+              <c:f>Sheet1!$A$2:$A$5</c:f>
+              <c:multiLvlStrCache>
+                <c:ptCount val="4"/>
+                <c:lvl>
+                  <c:pt idx="0">
+                    <c:v>ρ = 0.2</c:v>
+                  </c:pt>
+                  <c:pt idx="1">
+                    <c:v>ρ = 0.4</c:v>
+                  </c:pt>
+                  <c:pt idx="2">
+                    <c:v>ρ = 0.6</c:v>
+                  </c:pt>
+                  <c:pt idx="3">
+                    <c:v>ρ = 0.8</c:v>
+                  </c:pt>
+                </c:lvl>
+              </c:multiLvlStrCache>
+            </c:multiLvlStrRef>
+          </c:cat>
+          <c:val>
+            <c:numRef>
+              <c:f>Sheet1!$B$2:$B$5</c:f>
+              <c:numCache>
+                <c:formatCode>General</c:formatCode>
+                <c:ptCount val="4"/>
+                <c:pt idx="0">
+                  <c:v>0.9342150100036417</c:v>
+                </c:pt>
+                <c:pt idx="1">
+                  <c:v>0.9348756984893857</c:v>
+                </c:pt>
+                <c:pt idx="2">
+                  <c:v>0.9347662478469576</c:v>
+                </c:pt>
+                <c:pt idx="3">
+                  <c:v>0.9220373494613048</c:v>
+                </c:pt>
+              </c:numCache>
+            </c:numRef>
+          </c:val>
+        </c:ser>
+        <c:ser>
+          <c:idx val="1"/>
+          <c:order val="1"/>
+          <c:tx>
+            <c:strRef>
+              <c:f>Sheet1!$C$1</c:f>
+              <c:strCache>
+                <c:ptCount val="1"/>
+                <c:pt idx="0">
+                  <c:v>Three-family blend</c:v>
+                </c:pt>
+              </c:strCache>
+            </c:strRef>
+          </c:tx>
+          <c:spPr>
+            <a:solidFill>
+              <a:srgbClr val="6D5BD0"/>
+            </a:solidFill>
+            <a:effectLst/>
+          </c:spPr>
+          <c:invertIfNegative val="0"/>
+          <c:dLbls>
+            <c:numFmt formatCode="0.000" sourceLinked="0"/>
+            <c:txPr>
+              <a:bodyPr/>
+              <a:lstStyle/>
+              <a:p>
+                <a:pPr>
+                  <a:defRPr b="1" i="0" strike="noStrike" sz="1100" u="none">
+                    <a:solidFill>
+                      <a:srgbClr val="111A24"/>
+                    </a:solidFill>
+                    <a:latin typeface="+mn-lt"/>
+                  </a:defRPr>
+                </a:pPr>
+              </a:p>
+            </c:txPr>
+            <c:showLegendKey val="0"/>
+            <c:showVal val="1"/>
+            <c:showCatName val="0"/>
+            <c:showSerName val="0"/>
+            <c:showPercent val="0"/>
+            <c:showBubbleSize val="0"/>
+            <c:showLeaderLines val="0"/>
+          </c:dLbls>
+          <c:cat>
+            <c:multiLvlStrRef>
+              <c:f>Sheet1!$A$2:$A$5</c:f>
+              <c:multiLvlStrCache>
+                <c:ptCount val="4"/>
+                <c:lvl>
+                  <c:pt idx="0">
+                    <c:v>ρ = 0.2</c:v>
+                  </c:pt>
+                  <c:pt idx="1">
+                    <c:v>ρ = 0.4</c:v>
+                  </c:pt>
+                  <c:pt idx="2">
+                    <c:v>ρ = 0.6</c:v>
+                  </c:pt>
+                  <c:pt idx="3">
+                    <c:v>ρ = 0.8</c:v>
+                  </c:pt>
+                </c:lvl>
+              </c:multiLvlStrCache>
+            </c:multiLvlStrRef>
+          </c:cat>
+          <c:val>
+            <c:numRef>
+              <c:f>Sheet1!$C$2:$C$5</c:f>
+              <c:numCache>
+                <c:formatCode>General</c:formatCode>
+                <c:ptCount val="4"/>
+                <c:pt idx="0">
+                  <c:v>0.9626407338065768</c:v>
+                </c:pt>
+                <c:pt idx="1">
+                  <c:v>0.9488053154786075</c:v>
+                </c:pt>
+                <c:pt idx="2">
+                  <c:v>0.93352624831622</c:v>
+                </c:pt>
+                <c:pt idx="3">
+                  <c:v>0.9187281890790688</c:v>
+                </c:pt>
+              </c:numCache>
+            </c:numRef>
+          </c:val>
+        </c:ser>
+        <c:dLbls>
+          <c:numFmt formatCode="0.000" sourceLinked="0"/>
+          <c:txPr>
+            <a:bodyPr/>
+            <a:lstStyle/>
+            <a:p>
+              <a:pPr>
+                <a:defRPr b="1" i="0" strike="noStrike" sz="1100" u="none">
+                  <a:solidFill>
+                    <a:srgbClr val="111A24"/>
+                  </a:solidFill>
+                  <a:latin typeface="+mn-lt"/>
+                </a:defRPr>
+              </a:pPr>
+            </a:p>
+          </c:txPr>
+          <c:showLegendKey val="0"/>
+          <c:showVal val="1"/>
+          <c:showCatName val="0"/>
+          <c:showSerName val="0"/>
+          <c:showPercent val="0"/>
+          <c:showBubbleSize val="0"/>
+          <c:showLeaderLines val="0"/>
+        </c:dLbls>
+        <c:gapWidth val="45"/>
+        <c:overlap val="0"/>
+        <c:axId val="2094734554"/>
+        <c:axId val="2094734552"/>
+        <c:axId val="2094734556"/>
+      </c:barChart>
+      <c:catAx>
+        <c:axId val="2094734554"/>
+        <c:scaling>
+          <c:orientation val="minMax"/>
+        </c:scaling>
+        <c:delete val="0"/>
+        <c:axPos val="b"/>
+        <c:numFmt formatCode="General" sourceLinked="1"/>
+        <c:majorTickMark val="out"/>
+        <c:minorTickMark val="none"/>
+        <c:tickLblPos val="low"/>
+        <c:spPr>
+          <a:ln w="12700" cap="flat">
+            <a:solidFill>
+              <a:srgbClr val="888888"/>
+            </a:solidFill>
+            <a:prstDash val="solid"/>
+            <a:round/>
+          </a:ln>
+        </c:spPr>
+        <c:txPr>
+          <a:bodyPr/>
+          <a:lstStyle/>
+          <a:p>
+            <a:pPr>
+              <a:defRPr sz="1200" b="0" i="0" u="none" strike="noStrike">
+                <a:solidFill>
+                  <a:srgbClr val="33424F"/>
+                </a:solidFill>
+                <a:latin typeface="+mn-lt"/>
+              </a:defRPr>
+            </a:pPr>
+            <a:endParaRPr lang="en-US"/>
+          </a:p>
+        </c:txPr>
+        <c:crossAx val="2094734552"/>
+        <c:crosses val="autoZero"/>
+        <c:auto val="1"/>
+        <c:lblAlgn val="ctr"/>
+        <c:noMultiLvlLbl val="1"/>
+      </c:catAx>
+      <c:valAx>
+        <c:axId val="2094734552"/>
+        <c:scaling>
+          <c:orientation val="minMax"/>
+          <c:max val="0.98"/>
+          <c:min val="0.88"/>
+        </c:scaling>
+        <c:delete val="0"/>
+        <c:axPos val="l"/>
+        <c:majorGridlines>
+          <c:spPr>
+            <a:ln w="9525" cap="flat">
+              <a:solidFill>
+                <a:srgbClr val="D5DDE3"/>
+              </a:solidFill>
+              <a:prstDash val="solid"/>
+              <a:round/>
+            </a:ln>
+          </c:spPr>
+        </c:majorGridlines>
+        <c:numFmt formatCode="0.00" sourceLinked="0"/>
+        <c:majorTickMark val="out"/>
+        <c:minorTickMark val="none"/>
+        <c:tickLblPos val="nextTo"/>
+        <c:spPr>
+          <a:ln w="12700" cap="flat">
+            <a:solidFill>
+              <a:srgbClr val="888888"/>
+            </a:solidFill>
+            <a:prstDash val="solid"/>
+            <a:round/>
+          </a:ln>
+        </c:spPr>
+        <c:txPr>
+          <a:bodyPr/>
+          <a:lstStyle/>
+          <a:p>
+            <a:pPr>
+              <a:defRPr sz="1100" b="0" i="0" u="none" strike="noStrike">
+                <a:solidFill>
+                  <a:srgbClr val="5B6B7A"/>
+                </a:solidFill>
+                <a:latin typeface="+mn-lt"/>
+              </a:defRPr>
+            </a:pPr>
+            <a:endParaRPr lang="en-US"/>
+          </a:p>
+        </c:txPr>
+        <c:crossAx val="2094734554"/>
+        <c:crosses val="autoZero"/>
+        <c:crossBetween val="between"/>
+      </c:valAx>
+      <c:spPr>
+        <a:noFill/>
+        <a:ln>
+          <a:noFill/>
+        </a:ln>
+        <a:effectLst/>
+      </c:spPr>
+    </c:plotArea>
+    <c:legend>
+      <c:legendPos val="b"/>
+      <c:overlay val="0"/>
+      <c:txPr>
+        <a:bodyPr/>
+        <a:lstStyle/>
+        <a:p>
+          <a:pPr>
+            <a:defRPr sz="1200">
+              <a:solidFill>
+                <a:srgbClr val="33424F"/>
+              </a:solidFill>
+              <a:latin typeface="+mn-lt"/>
+              <a:cs typeface="+mn-lt"/>
+            </a:defRPr>
+          </a:pPr>
+          <a:endParaRPr lang="en-US"/>
+        </a:p>
+      </c:txPr>
+    </c:legend>
+    <c:plotVisOnly val="1"/>
+    <c:dispBlanksAs val="span"/>
+  </c:chart>
+  <c:spPr>
+    <a:noFill/>
+    <a:ln>
+      <a:noFill/>
+    </a:ln>
+    <a:effectLst/>
+  </c:spPr>
+  <c:externalData r:id="rId1">
+    <c:autoUpdate val="0"/>
+  </c:externalData>
+</c:chartSpace>
+</file>
+
+<file path=ppt/charts/chart5.xml><?xml version="1.0" encoding="utf-8"?>
+<c:chartSpace xmlns:c="http://schemas.openxmlformats.org/drawingml/2006/chart" xmlns:a="http://schemas.openxmlformats.org/drawingml/2006/main" xmlns:r="http://schemas.openxmlformats.org/officeDocument/2006/relationships">
+  <c:date1904 val="0"/>
+  <c:roundedCorners val="1"/>
+  <c:chart>
+    <c:title>
+      <c:tx>
+        <c:rich>
+          <a:bodyPr/>
+          <a:lstStyle/>
+          <a:p>
+            <a:pPr>
+              <a:defRPr sz="1400" b="1" i="0" u="none" strike="noStrike">
+                <a:solidFill>
+                  <a:srgbClr val="24384A"/>
+                </a:solidFill>
+                <a:latin typeface="+mn-lt"/>
+              </a:defRPr>
+            </a:pPr>
+            <a:r>
+              <a:rPr sz="1400" b="1" i="0" u="none" strike="noStrike">
+                <a:solidFill>
+                  <a:srgbClr val="24384A"/>
+                </a:solidFill>
+                <a:latin typeface="+mn-lt"/>
+              </a:rPr>
+              <a:t>Change in macro AUC from a post-calibration residual</a:t>
+            </a:r>
+          </a:p>
+        </c:rich>
+      </c:tx>
+      <c:layout/>
+      <c:overlay val="0"/>
+    </c:title>
+    <c:autoTitleDeleted val="0"/>
+    <c:plotArea>
+      <c:layout/>
+      <c:barChart>
+        <c:barDir val="col"/>
+        <c:grouping val="clustered"/>
+        <c:varyColors val="0"/>
+        <c:ser>
+          <c:idx val="0"/>
+          <c:order val="0"/>
+          <c:tx>
+            <c:strRef>
+              <c:f>Sheet1!$B$1</c:f>
+              <c:strCache>
+                <c:ptCount val="1"/>
+                <c:pt idx="0">
+                  <c:v>Head 0.05 AUC worse</c:v>
+                </c:pt>
+              </c:strCache>
+            </c:strRef>
+          </c:tx>
+          <c:spPr>
+            <a:solidFill>
+              <a:srgbClr val="C8403F"/>
+            </a:solidFill>
+            <a:effectLst/>
+          </c:spPr>
+          <c:invertIfNegative val="0"/>
+          <c:dLbls>
+            <c:numFmt formatCode="+0.0000;-0.0000" sourceLinked="0"/>
+            <c:txPr>
+              <a:bodyPr/>
+              <a:lstStyle/>
+              <a:p>
+                <a:pPr>
+                  <a:defRPr b="1" i="0" strike="noStrike" sz="1000" u="none">
+                    <a:solidFill>
+                      <a:srgbClr val="111A24"/>
+                    </a:solidFill>
+                    <a:latin typeface="+mn-lt"/>
+                  </a:defRPr>
+                </a:pPr>
+              </a:p>
+            </c:txPr>
+            <c:showLegendKey val="0"/>
+            <c:showVal val="1"/>
+            <c:showCatName val="0"/>
+            <c:showSerName val="0"/>
+            <c:showPercent val="0"/>
+            <c:showBubbleSize val="0"/>
+            <c:showLeaderLines val="0"/>
+          </c:dLbls>
+          <c:cat>
+            <c:multiLvlStrRef>
+              <c:f>Sheet1!$A$2:$A$4</c:f>
+              <c:multiLvlStrCache>
+                <c:ptCount val="3"/>
+                <c:lvl>
+                  <c:pt idx="0">
+                    <c:v>scale 0.05</c:v>
+                  </c:pt>
+                  <c:pt idx="1">
+                    <c:v>scale 0.15 (inherited)</c:v>
+                  </c:pt>
+                  <c:pt idx="2">
+                    <c:v>scale 0.30</c:v>
+                  </c:pt>
+                </c:lvl>
+              </c:multiLvlStrCache>
+            </c:multiLvlStrRef>
+          </c:cat>
+          <c:val>
+            <c:numRef>
+              <c:f>Sheet1!$B$2:$B$4</c:f>
+              <c:numCache>
+                <c:formatCode>General</c:formatCode>
+                <c:ptCount val="3"/>
+                <c:pt idx="0">
+                  <c:v>-0.001693714327818313</c:v>
+                </c:pt>
+                <c:pt idx="1">
+                  <c:v>-0.005626844960292937</c:v>
+                </c:pt>
+                <c:pt idx="2">
+                  <c:v>-0.012549841782808971</c:v>
+                </c:pt>
+              </c:numCache>
+            </c:numRef>
+          </c:val>
+        </c:ser>
+        <c:ser>
+          <c:idx val="1"/>
+          <c:order val="1"/>
+          <c:tx>
+            <c:strRef>
+              <c:f>Sheet1!$C$1</c:f>
+              <c:strCache>
+                <c:ptCount val="1"/>
+                <c:pt idx="0">
+                  <c:v>Same quality</c:v>
+                </c:pt>
+              </c:strCache>
+            </c:strRef>
+          </c:tx>
+          <c:spPr>
+            <a:solidFill>
+              <a:srgbClr val="5B6B7A"/>
+            </a:solidFill>
+            <a:effectLst/>
+          </c:spPr>
+          <c:invertIfNegative val="0"/>
+          <c:dLbls>
+            <c:numFmt formatCode="+0.0000;-0.0000" sourceLinked="0"/>
+            <c:txPr>
+              <a:bodyPr/>
+              <a:lstStyle/>
+              <a:p>
+                <a:pPr>
+                  <a:defRPr b="1" i="0" strike="noStrike" sz="1000" u="none">
+                    <a:solidFill>
+                      <a:srgbClr val="111A24"/>
+                    </a:solidFill>
+                    <a:latin typeface="+mn-lt"/>
+                  </a:defRPr>
+                </a:pPr>
+              </a:p>
+            </c:txPr>
+            <c:showLegendKey val="0"/>
+            <c:showVal val="1"/>
+            <c:showCatName val="0"/>
+            <c:showSerName val="0"/>
+            <c:showPercent val="0"/>
+            <c:showBubbleSize val="0"/>
+            <c:showLeaderLines val="0"/>
+          </c:dLbls>
+          <c:cat>
+            <c:multiLvlStrRef>
+              <c:f>Sheet1!$A$2:$A$4</c:f>
+              <c:multiLvlStrCache>
+                <c:ptCount val="3"/>
+                <c:lvl>
+                  <c:pt idx="0">
+                    <c:v>scale 0.05</c:v>
+                  </c:pt>
+                  <c:pt idx="1">
+                    <c:v>scale 0.15 (inherited)</c:v>
+                  </c:pt>
+                  <c:pt idx="2">
+                    <c:v>scale 0.30</c:v>
+                  </c:pt>
+                </c:lvl>
+              </c:multiLvlStrCache>
+            </c:multiLvlStrRef>
+          </c:cat>
+          <c:val>
+            <c:numRef>
+              <c:f>Sheet1!$C$2:$C$4</c:f>
+              <c:numCache>
+                <c:formatCode>General</c:formatCode>
+                <c:ptCount val="3"/>
+                <c:pt idx="0">
+                  <c:v>-0.00004719820411150655</c:v>
+                </c:pt>
+                <c:pt idx="1">
+                  <c:v>-0.00046739530953021635</c:v>
+                </c:pt>
+                <c:pt idx="2">
+                  <c:v>-0.0018314795703031268</c:v>
+                </c:pt>
+              </c:numCache>
+            </c:numRef>
+          </c:val>
+        </c:ser>
+        <c:ser>
+          <c:idx val="2"/>
+          <c:order val="2"/>
+          <c:tx>
+            <c:strRef>
+              <c:f>Sheet1!$D$1</c:f>
+              <c:strCache>
+                <c:ptCount val="1"/>
+                <c:pt idx="0">
+                  <c:v>Head 0.02 AUC better</c:v>
+                </c:pt>
+              </c:strCache>
+            </c:strRef>
+          </c:tx>
+          <c:spPr>
+            <a:solidFill>
+              <a:srgbClr val="15857B"/>
+            </a:solidFill>
+            <a:effectLst/>
+          </c:spPr>
+          <c:invertIfNegative val="0"/>
+          <c:dLbls>
+            <c:numFmt formatCode="+0.0000;-0.0000" sourceLinked="0"/>
+            <c:txPr>
+              <a:bodyPr/>
+              <a:lstStyle/>
+              <a:p>
+                <a:pPr>
+                  <a:defRPr b="1" i="0" strike="noStrike" sz="1000" u="none">
+                    <a:solidFill>
+                      <a:srgbClr val="111A24"/>
+                    </a:solidFill>
+                    <a:latin typeface="+mn-lt"/>
+                  </a:defRPr>
+                </a:pPr>
+              </a:p>
+            </c:txPr>
+            <c:showLegendKey val="0"/>
+            <c:showVal val="1"/>
+            <c:showCatName val="0"/>
+            <c:showSerName val="0"/>
+            <c:showPercent val="0"/>
+            <c:showBubbleSize val="0"/>
+            <c:showLeaderLines val="0"/>
+          </c:dLbls>
+          <c:cat>
+            <c:multiLvlStrRef>
+              <c:f>Sheet1!$A$2:$A$4</c:f>
+              <c:multiLvlStrCache>
+                <c:ptCount val="3"/>
+                <c:lvl>
+                  <c:pt idx="0">
+                    <c:v>scale 0.05</c:v>
+                  </c:pt>
+                  <c:pt idx="1">
+                    <c:v>scale 0.15 (inherited)</c:v>
+                  </c:pt>
+                  <c:pt idx="2">
+                    <c:v>scale 0.30</c:v>
+                  </c:pt>
+                </c:lvl>
+              </c:multiLvlStrCache>
+            </c:multiLvlStrRef>
+          </c:cat>
+          <c:val>
+            <c:numRef>
+              <c:f>Sheet1!$D$2:$D$4</c:f>
+              <c:numCache>
+                <c:formatCode>General</c:formatCode>
+                <c:ptCount val="3"/>
+                <c:pt idx="0">
+                  <c:v>0.0006291256761388447</c:v>
+                </c:pt>
+                <c:pt idx="1">
+                  <c:v>0.0016256623282187577</c:v>
+                </c:pt>
+                <c:pt idx="2">
+                  <c:v>0.0023872991135916984</c:v>
+                </c:pt>
+              </c:numCache>
+            </c:numRef>
+          </c:val>
+        </c:ser>
+        <c:dLbls>
+          <c:numFmt formatCode="+0.0000;-0.0000" sourceLinked="0"/>
+          <c:txPr>
+            <a:bodyPr/>
+            <a:lstStyle/>
+            <a:p>
+              <a:pPr>
+                <a:defRPr b="1" i="0" strike="noStrike" sz="1000" u="none">
+                  <a:solidFill>
+                    <a:srgbClr val="111A24"/>
+                  </a:solidFill>
+                  <a:latin typeface="+mn-lt"/>
+                </a:defRPr>
+              </a:pPr>
+            </a:p>
+          </c:txPr>
+          <c:showLegendKey val="0"/>
+          <c:showVal val="1"/>
+          <c:showCatName val="0"/>
+          <c:showSerName val="0"/>
+          <c:showPercent val="0"/>
+          <c:showBubbleSize val="0"/>
+          <c:showLeaderLines val="0"/>
+        </c:dLbls>
+        <c:gapWidth val="45"/>
+        <c:overlap val="0"/>
+        <c:axId val="2094734554"/>
+        <c:axId val="2094734552"/>
+        <c:axId val="2094734556"/>
+      </c:barChart>
+      <c:catAx>
+        <c:axId val="2094734554"/>
+        <c:scaling>
+          <c:orientation val="minMax"/>
+        </c:scaling>
+        <c:delete val="0"/>
+        <c:axPos val="b"/>
+        <c:numFmt formatCode="General" sourceLinked="1"/>
+        <c:majorTickMark val="out"/>
+        <c:minorTickMark val="none"/>
+        <c:tickLblPos val="low"/>
+        <c:spPr>
+          <a:ln w="12700" cap="flat">
+            <a:solidFill>
+              <a:srgbClr val="888888"/>
+            </a:solidFill>
+            <a:prstDash val="solid"/>
+            <a:round/>
+          </a:ln>
+        </c:spPr>
+        <c:txPr>
+          <a:bodyPr/>
+          <a:lstStyle/>
+          <a:p>
+            <a:pPr>
+              <a:defRPr sz="1100" b="0" i="0" u="none" strike="noStrike">
+                <a:solidFill>
+                  <a:srgbClr val="33424F"/>
+                </a:solidFill>
+                <a:latin typeface="+mn-lt"/>
+              </a:defRPr>
+            </a:pPr>
+            <a:endParaRPr lang="en-US"/>
+          </a:p>
+        </c:txPr>
+        <c:crossAx val="2094734552"/>
+        <c:crosses val="autoZero"/>
+        <c:auto val="1"/>
+        <c:lblAlgn val="ctr"/>
+        <c:noMultiLvlLbl val="1"/>
+      </c:catAx>
+      <c:valAx>
+        <c:axId val="2094734552"/>
+        <c:scaling>
+          <c:orientation val="minMax"/>
+          <c:max val="0.005"/>
+          <c:min val="-0.015"/>
+        </c:scaling>
+        <c:delete val="0"/>
+        <c:axPos val="l"/>
+        <c:majorGridlines>
+          <c:spPr>
+            <a:ln w="9525" cap="flat">
+              <a:solidFill>
+                <a:srgbClr val="D5DDE3"/>
+              </a:solidFill>
+              <a:prstDash val="solid"/>
+              <a:round/>
+            </a:ln>
+          </c:spPr>
+        </c:majorGridlines>
+        <c:numFmt formatCode="0.000" sourceLinked="0"/>
+        <c:majorTickMark val="out"/>
+        <c:minorTickMark val="none"/>
+        <c:tickLblPos val="nextTo"/>
+        <c:spPr>
+          <a:ln w="12700" cap="flat">
+            <a:solidFill>
+              <a:srgbClr val="888888"/>
+            </a:solidFill>
+            <a:prstDash val="solid"/>
+            <a:round/>
+          </a:ln>
+        </c:spPr>
+        <c:txPr>
+          <a:bodyPr/>
+          <a:lstStyle/>
+          <a:p>
+            <a:pPr>
+              <a:defRPr sz="1100" b="0" i="0" u="none" strike="noStrike">
+                <a:solidFill>
+                  <a:srgbClr val="5B6B7A"/>
+                </a:solidFill>
+                <a:latin typeface="+mn-lt"/>
+              </a:defRPr>
+            </a:pPr>
+            <a:endParaRPr lang="en-US"/>
+          </a:p>
+        </c:txPr>
+        <c:crossAx val="2094734554"/>
+        <c:crosses val="autoZero"/>
+        <c:crossBetween val="between"/>
+        <c:majorUnit val="0.005"/>
+      </c:valAx>
+      <c:spPr>
+        <a:noFill/>
+        <a:ln>
+          <a:noFill/>
+        </a:ln>
+        <a:effectLst/>
+      </c:spPr>
+    </c:plotArea>
+    <c:legend>
+      <c:legendPos val="b"/>
+      <c:overlay val="0"/>
+      <c:txPr>
+        <a:bodyPr/>
+        <a:lstStyle/>
+        <a:p>
+          <a:pPr>
+            <a:defRPr sz="1200">
+              <a:solidFill>
+                <a:srgbClr val="33424F"/>
+              </a:solidFill>
+              <a:latin typeface="+mn-lt"/>
+              <a:cs typeface="+mn-lt"/>
+            </a:defRPr>
+          </a:pPr>
+          <a:endParaRPr lang="en-US"/>
+        </a:p>
+      </c:txPr>
+    </c:legend>
+    <c:plotVisOnly val="1"/>
+    <c:dispBlanksAs val="span"/>
+  </c:chart>
+  <c:spPr>
+    <a:noFill/>
+    <a:ln>
+      <a:noFill/>
+    </a:ln>
+    <a:effectLst/>
+  </c:spPr>
+  <c:externalData r:id="rId1">
+    <c:autoUpdate val="0"/>
+  </c:externalData>
+</c:chartSpace>
+</file>
+
+<file path=ppt/charts/chart6.xml><?xml version="1.0" encoding="utf-8"?>
+<c:chartSpace xmlns:c="http://schemas.openxmlformats.org/drawingml/2006/chart" xmlns:a="http://schemas.openxmlformats.org/drawingml/2006/main" xmlns:r="http://schemas.openxmlformats.org/officeDocument/2006/relationships">
+  <c:date1904 val="0"/>
+  <c:roundedCorners val="1"/>
+  <c:chart>
+    <c:title>
+      <c:tx>
+        <c:rich>
+          <a:bodyPr/>
+          <a:lstStyle/>
+          <a:p>
+            <a:pPr>
+              <a:defRPr sz="1400" b="1" i="0" u="none" strike="noStrike">
+                <a:solidFill>
+                  <a:srgbClr val="24384A"/>
+                </a:solidFill>
+                <a:latin typeface="+mn-lt"/>
+              </a:defRPr>
+            </a:pPr>
+            <a:r>
+              <a:rPr sz="1400" b="1" i="0" u="none" strike="noStrike">
+                <a:solidFill>
+                  <a:srgbClr val="24384A"/>
+                </a:solidFill>
+                <a:latin typeface="+mn-lt"/>
+              </a:rPr>
+              <a:t>Change in macro AUC vs centre view only</a:t>
+            </a:r>
+          </a:p>
+        </c:rich>
+      </c:tx>
+      <c:layout/>
+      <c:overlay val="0"/>
+    </c:title>
+    <c:autoTitleDeleted val="0"/>
+    <c:plotArea>
+      <c:layout/>
+      <c:barChart>
+        <c:barDir val="col"/>
+        <c:grouping val="clustered"/>
+        <c:varyColors val="0"/>
+        <c:ser>
+          <c:idx val="0"/>
+          <c:order val="0"/>
+          <c:tx>
+            <c:strRef>
+              <c:f>Sheet1!$B$1</c:f>
+              <c:strCache>
+                <c:ptCount val="1"/>
+                <c:pt idx="0">
+                  <c:v>Weights 1:4:1 (G)</c:v>
+                </c:pt>
+              </c:strCache>
+            </c:strRef>
+          </c:tx>
+          <c:spPr>
+            <a:solidFill>
+              <a:srgbClr val="6D5BD0"/>
+            </a:solidFill>
+            <a:effectLst/>
+          </c:spPr>
+          <c:invertIfNegative val="0"/>
+          <c:dLbls>
+            <c:numFmt formatCode="+0.0000;-0.0000" sourceLinked="0"/>
+            <c:txPr>
+              <a:bodyPr/>
+              <a:lstStyle/>
+              <a:p>
+                <a:pPr>
+                  <a:defRPr b="1" i="0" strike="noStrike" sz="1100" u="none">
+                    <a:solidFill>
+                      <a:srgbClr val="111A24"/>
+                    </a:solidFill>
+                    <a:latin typeface="+mn-lt"/>
+                  </a:defRPr>
+                </a:pPr>
+              </a:p>
+            </c:txPr>
+            <c:showLegendKey val="0"/>
+            <c:showVal val="1"/>
+            <c:showCatName val="0"/>
+            <c:showSerName val="0"/>
+            <c:showPercent val="0"/>
+            <c:showBubbleSize val="0"/>
+            <c:showLeaderLines val="0"/>
+          </c:dLbls>
+          <c:cat>
+            <c:multiLvlStrRef>
+              <c:f>Sheet1!$A$2:$A$3</c:f>
+              <c:multiLvlStrCache>
+                <c:ptCount val="2"/>
+                <c:lvl>
+                  <c:pt idx="0">
+                    <c:v>Views equally informative</c:v>
+                  </c:pt>
+                  <c:pt idx="1">
+                    <c:v>Off-centre views 5% weaker</c:v>
+                  </c:pt>
+                </c:lvl>
+              </c:multiLvlStrCache>
+            </c:multiLvlStrRef>
+          </c:cat>
+          <c:val>
+            <c:numRef>
+              <c:f>Sheet1!$B$2:$B$3</c:f>
+              <c:numCache>
+                <c:formatCode>General</c:formatCode>
+                <c:ptCount val="2"/>
+                <c:pt idx="0">
+                  <c:v>0.0052888256623874665</c:v>
+                </c:pt>
+                <c:pt idx="1">
+                  <c:v>0.0018424696643521837</c:v>
+                </c:pt>
+              </c:numCache>
+            </c:numRef>
+          </c:val>
+        </c:ser>
+        <c:ser>
+          <c:idx val="1"/>
+          <c:order val="1"/>
+          <c:tx>
+            <c:strRef>
+              <c:f>Sheet1!$C$1</c:f>
+              <c:strCache>
+                <c:ptCount val="1"/>
+                <c:pt idx="0">
+                  <c:v>Equal thirds</c:v>
+                </c:pt>
+              </c:strCache>
+            </c:strRef>
+          </c:tx>
+          <c:spPr>
+            <a:solidFill>
+              <a:srgbClr val="5B6B7A"/>
+            </a:solidFill>
+            <a:effectLst/>
+          </c:spPr>
+          <c:invertIfNegative val="0"/>
+          <c:dLbls>
+            <c:numFmt formatCode="+0.0000;-0.0000" sourceLinked="0"/>
+            <c:txPr>
+              <a:bodyPr/>
+              <a:lstStyle/>
+              <a:p>
+                <a:pPr>
+                  <a:defRPr b="1" i="0" strike="noStrike" sz="1100" u="none">
+                    <a:solidFill>
+                      <a:srgbClr val="111A24"/>
+                    </a:solidFill>
+                    <a:latin typeface="+mn-lt"/>
+                  </a:defRPr>
+                </a:pPr>
+              </a:p>
+            </c:txPr>
+            <c:showLegendKey val="0"/>
+            <c:showVal val="1"/>
+            <c:showCatName val="0"/>
+            <c:showSerName val="0"/>
+            <c:showPercent val="0"/>
+            <c:showBubbleSize val="0"/>
+            <c:showLeaderLines val="0"/>
+          </c:dLbls>
+          <c:cat>
+            <c:multiLvlStrRef>
+              <c:f>Sheet1!$A$2:$A$3</c:f>
+              <c:multiLvlStrCache>
+                <c:ptCount val="2"/>
+                <c:lvl>
+                  <c:pt idx="0">
+                    <c:v>Views equally informative</c:v>
+                  </c:pt>
+                  <c:pt idx="1">
+                    <c:v>Off-centre views 5% weaker</c:v>
+                  </c:pt>
+                </c:lvl>
+              </c:multiLvlStrCache>
+            </c:multiLvlStrRef>
+          </c:cat>
+          <c:val>
+            <c:numRef>
+              <c:f>Sheet1!$C$2:$C$3</c:f>
+              <c:numCache>
+                <c:formatCode>General</c:formatCode>
+                <c:ptCount val="2"/>
+                <c:pt idx="0">
+                  <c:v>0.007043144015432823</c:v>
+                </c:pt>
+                <c:pt idx="1">
+                  <c:v>0.00002793340155719526</c:v>
+                </c:pt>
+              </c:numCache>
+            </c:numRef>
+          </c:val>
+        </c:ser>
+        <c:dLbls>
+          <c:numFmt formatCode="+0.0000;-0.0000" sourceLinked="0"/>
+          <c:txPr>
+            <a:bodyPr/>
+            <a:lstStyle/>
+            <a:p>
+              <a:pPr>
+                <a:defRPr b="1" i="0" strike="noStrike" sz="1100" u="none">
+                  <a:solidFill>
+                    <a:srgbClr val="111A24"/>
+                  </a:solidFill>
+                  <a:latin typeface="+mn-lt"/>
+                </a:defRPr>
+              </a:pPr>
+            </a:p>
+          </c:txPr>
+          <c:showLegendKey val="0"/>
+          <c:showVal val="1"/>
+          <c:showCatName val="0"/>
+          <c:showSerName val="0"/>
+          <c:showPercent val="0"/>
+          <c:showBubbleSize val="0"/>
+          <c:showLeaderLines val="0"/>
+        </c:dLbls>
+        <c:gapWidth val="45"/>
+        <c:overlap val="0"/>
+        <c:axId val="2094734554"/>
+        <c:axId val="2094734552"/>
+        <c:axId val="2094734556"/>
+      </c:barChart>
+      <c:catAx>
+        <c:axId val="2094734554"/>
+        <c:scaling>
+          <c:orientation val="minMax"/>
+        </c:scaling>
+        <c:delete val="0"/>
+        <c:axPos val="b"/>
+        <c:numFmt formatCode="General" sourceLinked="1"/>
+        <c:majorTickMark val="out"/>
+        <c:minorTickMark val="none"/>
+        <c:tickLblPos val="low"/>
+        <c:spPr>
+          <a:ln w="12700" cap="flat">
+            <a:solidFill>
+              <a:srgbClr val="888888"/>
+            </a:solidFill>
+            <a:prstDash val="solid"/>
+            <a:round/>
+          </a:ln>
+        </c:spPr>
+        <c:txPr>
+          <a:bodyPr/>
+          <a:lstStyle/>
+          <a:p>
+            <a:pPr>
+              <a:defRPr sz="1100" b="0" i="0" u="none" strike="noStrike">
+                <a:solidFill>
+                  <a:srgbClr val="33424F"/>
+                </a:solidFill>
+                <a:latin typeface="+mn-lt"/>
+              </a:defRPr>
+            </a:pPr>
+            <a:endParaRPr lang="en-US"/>
+          </a:p>
+        </c:txPr>
+        <c:crossAx val="2094734552"/>
+        <c:crosses val="autoZero"/>
+        <c:auto val="1"/>
+        <c:lblAlgn val="ctr"/>
+        <c:noMultiLvlLbl val="1"/>
+      </c:catAx>
+      <c:valAx>
+        <c:axId val="2094734552"/>
+        <c:scaling>
+          <c:orientation val="minMax"/>
+          <c:max val="0.009"/>
+          <c:min val="-0.002"/>
+        </c:scaling>
+        <c:delete val="0"/>
+        <c:axPos val="l"/>
+        <c:majorGridlines>
+          <c:spPr>
+            <a:ln w="9525" cap="flat">
+              <a:solidFill>
+                <a:srgbClr val="D5DDE3"/>
+              </a:solidFill>
+              <a:prstDash val="solid"/>
+              <a:round/>
+            </a:ln>
+          </c:spPr>
+        </c:majorGridlines>
+        <c:numFmt formatCode="0.000" sourceLinked="0"/>
+        <c:majorTickMark val="out"/>
+        <c:minorTickMark val="none"/>
+        <c:tickLblPos val="nextTo"/>
+        <c:spPr>
+          <a:ln w="12700" cap="flat">
+            <a:solidFill>
+              <a:srgbClr val="888888"/>
+            </a:solidFill>
+            <a:prstDash val="solid"/>
+            <a:round/>
+          </a:ln>
+        </c:spPr>
+        <c:txPr>
+          <a:bodyPr/>
+          <a:lstStyle/>
+          <a:p>
+            <a:pPr>
+              <a:defRPr sz="1100" b="0" i="0" u="none" strike="noStrike">
+                <a:solidFill>
+                  <a:srgbClr val="5B6B7A"/>
+                </a:solidFill>
+                <a:latin typeface="+mn-lt"/>
+              </a:defRPr>
+            </a:pPr>
+            <a:endParaRPr lang="en-US"/>
+          </a:p>
+        </c:txPr>
+        <c:crossAx val="2094734554"/>
+        <c:crosses val="autoZero"/>
+        <c:crossBetween val="between"/>
+        <c:majorUnit val="0.002"/>
+      </c:valAx>
+      <c:spPr>
+        <a:noFill/>
+        <a:ln>
+          <a:noFill/>
+        </a:ln>
+        <a:effectLst/>
+      </c:spPr>
+    </c:plotArea>
+    <c:legend>
+      <c:legendPos val="b"/>
+      <c:overlay val="0"/>
+      <c:txPr>
+        <a:bodyPr/>
+        <a:lstStyle/>
+        <a:p>
+          <a:pPr>
+            <a:defRPr sz="1200">
+              <a:solidFill>
+                <a:srgbClr val="33424F"/>
+              </a:solidFill>
+              <a:latin typeface="+mn-lt"/>
+              <a:cs typeface="+mn-lt"/>
+            </a:defRPr>
+          </a:pPr>
+          <a:endParaRPr lang="en-US"/>
+        </a:p>
+      </c:txPr>
+    </c:legend>
+    <c:plotVisOnly val="1"/>
+    <c:dispBlanksAs val="span"/>
+  </c:chart>
+  <c:spPr>
+    <a:noFill/>
+    <a:ln>
+      <a:noFill/>
+    </a:ln>
+    <a:effectLst/>
+  </c:spPr>
+  <c:externalData r:id="rId1">
+    <c:autoUpdate val="0"/>
+  </c:externalData>
+</c:chartSpace>
+</file>
+
+<file path=ppt/charts/chart7.xml><?xml version="1.0" encoding="utf-8"?>
+<c:chartSpace xmlns:c="http://schemas.openxmlformats.org/drawingml/2006/chart" xmlns:a="http://schemas.openxmlformats.org/drawingml/2006/main" xmlns:r="http://schemas.openxmlformats.org/officeDocument/2006/relationships">
+  <c:date1904 val="0"/>
+  <c:roundedCorners val="1"/>
+  <c:chart>
+    <c:title>
+      <c:tx>
+        <c:rich>
+          <a:bodyPr/>
+          <a:lstStyle/>
+          <a:p>
+            <a:pPr>
+              <a:defRPr sz="1400" b="1" i="0" u="none" strike="noStrike">
+                <a:solidFill>
+                  <a:srgbClr val="24384A"/>
+                </a:solidFill>
+                <a:latin typeface="+mn-lt"/>
+              </a:defRPr>
+            </a:pPr>
+            <a:r>
+              <a:rPr sz="1400" b="1" i="0" u="none" strike="noStrike">
+                <a:solidFill>
+                  <a:srgbClr val="24384A"/>
+                </a:solidFill>
+                <a:latin typeface="+mn-lt"/>
+              </a:rPr>
               <a:t>Recorded ACL AUC change (out-of-fold)</a:t>
             </a:r>
           </a:p>
@@ -1196,7 +2690,7 @@
 </c:chartSpace>
 </file>
 
-<file path=ppt/charts/chart4.xml><?xml version="1.0" encoding="utf-8"?>
+<file path=ppt/charts/chart8.xml><?xml version="1.0" encoding="utf-8"?>
 <c:chartSpace xmlns:c="http://schemas.openxmlformats.org/drawingml/2006/chart" xmlns:a="http://schemas.openxmlformats.org/drawingml/2006/main" xmlns:r="http://schemas.openxmlformats.org/officeDocument/2006/relationships">
   <c:date1904 val="0"/>
   <c:roundedCorners val="1"/>
@@ -1222,7 +2716,7 @@
                 </a:solidFill>
                 <a:latin typeface="+mn-lt"/>
               </a:rPr>
-              <a:t>Public leaderboard reference points (axis starts at 0.90)</a:t>
+              <a:t>Our submissions vs public reference points (axis starts at 0.90)</a:t>
             </a:r>
           </a:p>
         </c:rich>
@@ -1299,7 +2793,7 @@
             <c:bubble3D val="0"/>
             <c:spPr>
               <a:solidFill>
-                <a:srgbClr val="5B6B7A"/>
+                <a:srgbClr val="15857B"/>
               </a:solidFill>
               <a:effectLst/>
             </c:spPr>
@@ -1336,7 +2830,7 @@
                     <c:v>Top public score (mid-Aug, approx.)</c:v>
                   </c:pt>
                   <c:pt idx="1">
-                    <c:v>Parent recipe (V17)</c:v>
+                    <c:v>Our parent submission (V17)</c:v>
                   </c:pt>
                   <c:pt idx="2">
                     <c:v>Our ABG submission</c:v>
@@ -1517,7 +3011,7 @@
 </c:chartSpace>
 </file>
 
-<file path=ppt/charts/chart5.xml><?xml version="1.0" encoding="utf-8"?>
+<file path=ppt/charts/chart9.xml><?xml version="1.0" encoding="utf-8"?>
 <c:chartSpace xmlns:c="http://schemas.openxmlformats.org/drawingml/2006/chart" xmlns:a="http://schemas.openxmlformats.org/drawingml/2006/main" xmlns:r="http://schemas.openxmlformats.org/officeDocument/2006/relationships">
   <c:date1904 val="0"/>
   <c:roundedCorners val="1"/>
@@ -2746,7 +4240,7 @@
           <a:p>
             <a:r>
               <a:rPr lang="en-US" dirty="0"/>
-              <a:t>The batch A, B, G, AB, ABG was fixed before looking at any leaderboard result so later entries cannot be tuned to earlier scores. Our graded submission is ABG. The single-addition runs are planned next and are the way to attribute any gain or loss to one addition.</a:t>
+              <a:t>This is a controlled simulation, not a result on the competition data. Each model score is a signal plus Gaussian noise, with a chosen correlation between models. It shows the mechanism behind our design: ensemble gains saturate quickly, and blending different families only pays off when their errors are not strongly correlated. All parameters are assumed; the script is in the project repository under simulation/.</a:t>
             </a:r>
             <a:endParaRPr lang="en-US" dirty="0"/>
           </a:p>
@@ -2834,7 +4328,7 @@
           <a:p>
             <a:r>
               <a:rPr lang="en-US" dirty="0"/>
-              <a:t>Three ideas we evaluated and retired because they failed gates that were set in advance. OrthoDiffusion gave positive point gains for ACL but its confidence fell short of the required 0.80 and it was negative for MCL and menisci. Anchor-bilinear gave a gain worth about 0.00008 on the macro score. The LCSE residual was negative and failed all six gates. These are historical results from frozen evaluation packages.</a:t>
+              <a:t>Same synthetic setup. Left: a post-calibration residual, as in A and B, changes the macro AUC by a few thousandths at the inherited scale, helpful if the added head is better, harmful if it is worse. Right: gain averaging with weights 1 to 4 to 1 keeps a small gain even when the off-centre views are slightly weaker, whereas equal weights lose it. This motivates the 1:4:1 choice. These are simulated mechanisms, not measured effects of A, B or G on the competition data.</a:t>
             </a:r>
             <a:endParaRPr lang="en-US" dirty="0"/>
           </a:p>
@@ -2922,7 +4416,7 @@
           <a:p>
             <a:r>
               <a:rPr lang="en-US" dirty="0"/>
-              <a:t>These are the checks recorded in the notebook run on the three visible test studies. They validate execution, schema and identity of the output file. They are not accuracy measurements.</a:t>
+              <a:t>The batch A, B, G, AB, ABG was fixed before looking at any leaderboard result so later entries cannot be tuned to earlier scores. Our two graded submissions are the parent recipe at 0.940 and ABG at 0.922. The single-addition runs are planned next and are the way to attribute any gain or loss to one addition.</a:t>
             </a:r>
             <a:endParaRPr lang="en-US" dirty="0"/>
           </a:p>
@@ -3010,7 +4504,7 @@
           <a:p>
             <a:r>
               <a:rPr lang="en-US" dirty="0"/>
-              <a:t>Our ABG submission scored 0.922 on the public leaderboard. For context, the parent recipe that ABG extends has a public score of 0.940 according to the notebook, and a Kaggle forum thread from mid-August quoted about 0.92 for shared public notebooks and about 0.951 for the top public score. Those two mid-August figures are old and the leaderboard has moved since.</a:t>
+              <a:t>Three ideas we evaluated and retired because they failed gates that were set in advance. OrthoDiffusion gave positive point gains for ACL but its confidence fell short of the required 0.80 and it was negative for MCL and menisci. Anchor-bilinear gave a gain worth about 0.00008 on the macro score. The LCSE residual was negative and failed all six gates. These are historical results from frozen evaluation packages.</a:t>
             </a:r>
             <a:endParaRPr lang="en-US" dirty="0"/>
           </a:p>
@@ -3098,7 +4592,7 @@
           <a:p>
             <a:r>
               <a:rPr lang="en-US" dirty="0"/>
-              <a:t>Be direct about the result. Our graded score is lower than the parent recipe's public 0.940, so ABG as a whole did not improve it. We cannot say which of A, B or G is responsible because they were graded together; the planned single-addition runs answer that. The chart is simple arithmetic: a single-target gain is divided by 12 in the macro score.</a:t>
+              <a:t>These are the checks recorded in the notebook run on the three visible test studies. They validate execution, schema and identity of the output file. They are not accuracy measurements.</a:t>
             </a:r>
             <a:endParaRPr lang="en-US" dirty="0"/>
           </a:p>
@@ -3274,7 +4768,7 @@
           <a:p>
             <a:r>
               <a:rPr lang="en-US" dirty="0"/>
-              <a:t>Limitations: nothing new was trained, there is no new held-out validation, the leaderboard is not clinical evidence, some components carry non-commercial share-alike licences, and the outputs are ranking scores.</a:t>
+              <a:t>Our parent submission (the V17 recipe) scored 0.940 and our ABG submission scored 0.922 on the public leaderboard. For context, a Kaggle forum thread from mid-August quoted about 0.92 for shared public notebooks and about 0.951 for the top public score. Those two mid-August figures are old and the leaderboard has moved since.</a:t>
             </a:r>
             <a:endParaRPr lang="en-US" dirty="0"/>
           </a:p>
@@ -3362,7 +4856,7 @@
           <a:p>
             <a:r>
               <a:rPr lang="en-US" dirty="0"/>
-              <a:t>Close with three takeaways and the next steps. The competition closes on 22 October 2026 according to RSNA; winners are announced in November.</a:t>
+              <a:t>Be direct about the result. ABG scored lower than our parent submission, so as a whole it did not improve it. We cannot say which of A, B or G is responsible because they were graded together; the simulation suggests the design alone should cost far less than 0.018, and the planned single-addition runs answer it. The chart is simple arithmetic: a single-target gain is divided by 12 in the macro score.</a:t>
             </a:r>
             <a:endParaRPr lang="en-US" dirty="0"/>
           </a:p>
@@ -3450,7 +4944,7 @@
           <a:p>
             <a:r>
               <a:rPr lang="en-US" dirty="0"/>
-              <a:t>Credit every component. Our contribution is the ABG layer, the protocol and the receipt; the pretrained components and parent recipe come from the authors listed here.</a:t>
+              <a:t>Limitations: nothing new was trained, there is no new held-out validation, the leaderboard is not clinical evidence, some components carry non-commercial share-alike licences, and the outputs are ranking scores.</a:t>
             </a:r>
             <a:endParaRPr lang="en-US" dirty="0"/>
           </a:p>
@@ -3538,7 +5032,7 @@
           <a:p>
             <a:r>
               <a:rPr lang="en-US" dirty="0"/>
-              <a:t/>
+              <a:t>Close with three takeaways and the next steps. The competition closes on 22 October 2026 according to RSNA; winners are announced in November.</a:t>
             </a:r>
             <a:endParaRPr lang="en-US" dirty="0"/>
           </a:p>
@@ -3562,6 +5056,182 @@
             <a:fld id="{F7021451-1387-4CA6-816F-3879F97B5CBC}" type="slidenum">
               <a:rPr lang="en-US"/>
               <a:t>23</a:t>
+            </a:fld>
+            <a:endParaRPr lang="en-US"/>
+          </a:p>
+        </p:txBody>
+      </p:sp>
+    </p:spTree>
+    <p:extLst>
+      <p:ext uri="{BB962C8B-B14F-4D97-AF65-F5344CB8AC3E}">
+        <p14:creationId xmlns:p14="http://schemas.microsoft.com/office/powerpoint/2010/main" val="1024086991"/>
+      </p:ext>
+    </p:extLst>
+  </p:cSld>
+  <p:clrMapOvr>
+    <a:masterClrMapping/>
+  </p:clrMapOvr>
+</p:notes>
+</file>
+
+<file path=ppt/notesSlides/notesSlide24.xml><?xml version="1.0" encoding="utf-8"?>
+<p:notes xmlns:a="http://schemas.openxmlformats.org/drawingml/2006/main" xmlns:r="http://schemas.openxmlformats.org/officeDocument/2006/relationships" xmlns:p="http://schemas.openxmlformats.org/presentationml/2006/main">
+  <p:cSld>
+    <p:spTree>
+      <p:nvGrpSpPr>
+        <p:cNvPr id="1" name=""/>
+        <p:cNvGrpSpPr/>
+        <p:nvPr/>
+      </p:nvGrpSpPr>
+      <p:grpSpPr>
+        <a:xfrm>
+          <a:off x="0" y="0"/>
+          <a:ext cx="0" cy="0"/>
+          <a:chOff x="0" y="0"/>
+          <a:chExt cx="0" cy="0"/>
+        </a:xfrm>
+      </p:grpSpPr>
+      <p:sp>
+        <p:nvSpPr>
+          <p:cNvPr id="2" name="Slide Image Placeholder 1"/>
+          <p:cNvSpPr>
+            <a:spLocks noGrp="1" noRot="1" noChangeAspect="1"/>
+          </p:cNvSpPr>
+          <p:nvPr>
+            <p:ph type="sldImg"/>
+          </p:nvPr>
+        </p:nvSpPr>
+        <p:spPr/>
+      </p:sp>
+      <p:sp>
+        <p:nvSpPr>
+          <p:cNvPr id="3" name="Notes Placeholder 2"/>
+          <p:cNvSpPr>
+            <a:spLocks noGrp="1"/>
+          </p:cNvSpPr>
+          <p:nvPr>
+            <p:ph type="body" idx="1"/>
+          </p:nvPr>
+        </p:nvSpPr>
+        <p:spPr/>
+        <p:txBody>
+          <a:bodyPr/>
+          <a:lstStyle/>
+          <a:p>
+            <a:r>
+              <a:rPr lang="en-US" dirty="0"/>
+              <a:t>Credit every component. Our contribution is the ABG layer, the protocol and the receipt; the pretrained components and parent recipe come from the authors listed here.</a:t>
+            </a:r>
+            <a:endParaRPr lang="en-US" dirty="0"/>
+          </a:p>
+        </p:txBody>
+      </p:sp>
+      <p:sp>
+        <p:nvSpPr>
+          <p:cNvPr id="4" name="Slide Number Placeholder 3"/>
+          <p:cNvSpPr>
+            <a:spLocks noGrp="1"/>
+          </p:cNvSpPr>
+          <p:nvPr>
+            <p:ph type="sldNum" sz="quarter" idx="10"/>
+          </p:nvPr>
+        </p:nvSpPr>
+        <p:spPr/>
+        <p:txBody>
+          <a:bodyPr/>
+          <a:lstStyle/>
+          <a:p>
+            <a:fld id="{F7021451-1387-4CA6-816F-3879F97B5CBC}" type="slidenum">
+              <a:rPr lang="en-US"/>
+              <a:t>24</a:t>
+            </a:fld>
+            <a:endParaRPr lang="en-US"/>
+          </a:p>
+        </p:txBody>
+      </p:sp>
+    </p:spTree>
+    <p:extLst>
+      <p:ext uri="{BB962C8B-B14F-4D97-AF65-F5344CB8AC3E}">
+        <p14:creationId xmlns:p14="http://schemas.microsoft.com/office/powerpoint/2010/main" val="1024086991"/>
+      </p:ext>
+    </p:extLst>
+  </p:cSld>
+  <p:clrMapOvr>
+    <a:masterClrMapping/>
+  </p:clrMapOvr>
+</p:notes>
+</file>
+
+<file path=ppt/notesSlides/notesSlide25.xml><?xml version="1.0" encoding="utf-8"?>
+<p:notes xmlns:a="http://schemas.openxmlformats.org/drawingml/2006/main" xmlns:r="http://schemas.openxmlformats.org/officeDocument/2006/relationships" xmlns:p="http://schemas.openxmlformats.org/presentationml/2006/main">
+  <p:cSld>
+    <p:spTree>
+      <p:nvGrpSpPr>
+        <p:cNvPr id="1" name=""/>
+        <p:cNvGrpSpPr/>
+        <p:nvPr/>
+      </p:nvGrpSpPr>
+      <p:grpSpPr>
+        <a:xfrm>
+          <a:off x="0" y="0"/>
+          <a:ext cx="0" cy="0"/>
+          <a:chOff x="0" y="0"/>
+          <a:chExt cx="0" cy="0"/>
+        </a:xfrm>
+      </p:grpSpPr>
+      <p:sp>
+        <p:nvSpPr>
+          <p:cNvPr id="2" name="Slide Image Placeholder 1"/>
+          <p:cNvSpPr>
+            <a:spLocks noGrp="1" noRot="1" noChangeAspect="1"/>
+          </p:cNvSpPr>
+          <p:nvPr>
+            <p:ph type="sldImg"/>
+          </p:nvPr>
+        </p:nvSpPr>
+        <p:spPr/>
+      </p:sp>
+      <p:sp>
+        <p:nvSpPr>
+          <p:cNvPr id="3" name="Notes Placeholder 2"/>
+          <p:cNvSpPr>
+            <a:spLocks noGrp="1"/>
+          </p:cNvSpPr>
+          <p:nvPr>
+            <p:ph type="body" idx="1"/>
+          </p:nvPr>
+        </p:nvSpPr>
+        <p:spPr/>
+        <p:txBody>
+          <a:bodyPr/>
+          <a:lstStyle/>
+          <a:p>
+            <a:r>
+              <a:rPr lang="en-US" dirty="0"/>
+              <a:t/>
+            </a:r>
+            <a:endParaRPr lang="en-US" dirty="0"/>
+          </a:p>
+        </p:txBody>
+      </p:sp>
+      <p:sp>
+        <p:nvSpPr>
+          <p:cNvPr id="4" name="Slide Number Placeholder 3"/>
+          <p:cNvSpPr>
+            <a:spLocks noGrp="1"/>
+          </p:cNvSpPr>
+          <p:nvPr>
+            <p:ph type="sldNum" sz="quarter" idx="10"/>
+          </p:nvPr>
+        </p:nvSpPr>
+        <p:spPr/>
+        <p:txBody>
+          <a:bodyPr/>
+          <a:lstStyle/>
+          <a:p>
+            <a:fld id="{F7021451-1387-4CA6-816F-3879F97B5CBC}" type="slidenum">
+              <a:rPr lang="en-US"/>
+              <a:t>25</a:t>
             </a:fld>
             <a:endParaRPr lang="en-US"/>
           </a:p>
@@ -3626,7 +5296,7 @@
           <a:p>
             <a:r>
               <a:rPr lang="en-US" dirty="0"/>
-              <a:t>Read the abstract in one breath. Emphasise: ensemble of pretrained components, our ABG experiment layer, verification, 0.922 public score, and honest reporting of what failed.</a:t>
+              <a:t>Read the abstract in one breath. Emphasise: ensemble of pretrained components, our ABG experiment layer, verification, the two graded submissions (parent 0.940, ABG 0.922), the synthetic mechanism study, and honest reporting of what failed.</a:t>
             </a:r>
             <a:endParaRPr lang="en-US" dirty="0"/>
           </a:p>
@@ -9806,7 +11476,7 @@
                   <a:schemeClr val="tx1"/>
                 </a:solidFill>
               </a:rPr>
-              <a:t>Pre-specified ablation batch</a:t>
+              <a:t>Mechanism study: why ensembling helps</a:t>
             </a:r>
             <a:endParaRPr lang="en-US" sz="3400" dirty="0"/>
           </a:p>
@@ -9814,7 +11484,555 @@
       </p:sp>
       <p:graphicFrame>
         <p:nvGraphicFramePr>
-          <p:cNvPr id="16" name="Table 0"/>
+          <p:cNvPr id="4" name="sim-size-chart" descr=""/>
+          <p:cNvGraphicFramePr/>
+          <p:nvPr/>
+        </p:nvGraphicFramePr>
+        <p:xfrm>
+          <a:off x="548640" y="1463040"/>
+          <a:ext cx="5394960" cy="3337560"/>
+        </p:xfrm>
+        <a:graphic xmlns:a="http://schemas.openxmlformats.org/drawingml/2006/main">
+          <a:graphicData uri="http://schemas.openxmlformats.org/drawingml/2006/chart">
+            <c:chart xmlns:c="http://schemas.openxmlformats.org/drawingml/2006/chart" r:id="rId1"/>
+          </a:graphicData>
+        </a:graphic>
+      </p:graphicFrame>
+      <p:graphicFrame>
+        <p:nvGraphicFramePr>
+          <p:cNvPr id="5" name="sim-blend-chart" descr=""/>
+          <p:cNvGraphicFramePr/>
+          <p:nvPr/>
+        </p:nvGraphicFramePr>
+        <p:xfrm>
+          <a:off x="6217920" y="1463040"/>
+          <a:ext cx="5422392" cy="3337560"/>
+        </p:xfrm>
+        <a:graphic xmlns:a="http://schemas.openxmlformats.org/drawingml/2006/main">
+          <a:graphicData uri="http://schemas.openxmlformats.org/drawingml/2006/chart">
+            <c:chart xmlns:c="http://schemas.openxmlformats.org/drawingml/2006/chart" r:id="rId2"/>
+          </a:graphicData>
+        </a:graphic>
+      </p:graphicFrame>
+      <p:sp>
+        <p:nvSpPr>
+          <p:cNvPr id="6" name="card-317"/>
+          <p:cNvSpPr/>
+          <p:nvPr/>
+        </p:nvSpPr>
+        <p:spPr>
+          <a:xfrm>
+            <a:off x="548640" y="4937760"/>
+            <a:ext cx="11094415" cy="566928"/>
+          </a:xfrm>
+          <a:prstGeom prst="roundRect">
+            <a:avLst>
+              <a:gd name="adj" fmla="val 19355"/>
+            </a:avLst>
+          </a:prstGeom>
+          <a:solidFill>
+            <a:schemeClr val="accent4">
+              <a:alpha val="10000"/>
+            </a:schemeClr>
+          </a:solidFill>
+          <a:ln/>
+        </p:spPr>
+      </p:sp>
+      <p:sp>
+        <p:nvSpPr>
+          <p:cNvPr id="7" name="text-318"/>
+          <p:cNvSpPr txBox="1"/>
+          <p:nvPr/>
+        </p:nvSpPr>
+        <p:spPr>
+          <a:xfrm>
+            <a:off x="822960" y="4937760"/>
+            <a:ext cx="10545775" cy="566928"/>
+          </a:xfrm>
+          <a:prstGeom prst="rect">
+            <a:avLst/>
+          </a:prstGeom>
+          <a:noFill/>
+          <a:ln/>
+        </p:spPr>
+        <p:txBody>
+          <a:bodyPr wrap="square" lIns="0" tIns="0" rIns="0" bIns="0" rtlCol="0" anchor="ctr"/>
+          <a:lstStyle/>
+          <a:p>
+            <a:pPr indent="0" marL="0">
+              <a:buNone/>
+            </a:pPr>
+            <a:r>
+              <a:rPr lang="en-US" sz="1500" b="1" dirty="0">
+                <a:solidFill>
+                  <a:schemeClr val="tx2"/>
+                </a:solidFill>
+              </a:rPr>
+              <a:t>Going from 10 to 20 members adds only +0.0020. Blending three families gains +0.0284 at ρ = 0.2 but −0.0033 at ρ = 0.8.</a:t>
+            </a:r>
+            <a:endParaRPr lang="en-US" sz="1500" dirty="0"/>
+          </a:p>
+        </p:txBody>
+      </p:sp>
+      <p:sp>
+        <p:nvSpPr>
+          <p:cNvPr id="8" name="text-319"/>
+          <p:cNvSpPr txBox="1"/>
+          <p:nvPr/>
+        </p:nvSpPr>
+        <p:spPr>
+          <a:xfrm>
+            <a:off x="548640" y="5623560"/>
+            <a:ext cx="11094415" cy="457200"/>
+          </a:xfrm>
+          <a:prstGeom prst="rect">
+            <a:avLst/>
+          </a:prstGeom>
+          <a:noFill/>
+          <a:ln/>
+        </p:spPr>
+        <p:txBody>
+          <a:bodyPr wrap="square" lIns="0" tIns="0" rIns="0" bIns="0" rtlCol="0" anchor="t"/>
+          <a:lstStyle/>
+          <a:p>
+            <a:pPr indent="0" marL="0">
+              <a:buNone/>
+            </a:pPr>
+            <a:r>
+              <a:rPr lang="en-US" sz="1100" dirty="0">
+                <a:solidFill>
+                  <a:schemeClr val="accent5"/>
+                </a:solidFill>
+              </a:rPr>
+              <a:t>SYNTHETIC SIMULATION, NOT RSNA DATA  ·  1,500 studies × 12 targets, prevalence 25%, 40 repetitions; score = signal + correlated Gaussian noise; parameters assumed. 95% intervals ≤ ±0.003.</a:t>
+            </a:r>
+            <a:endParaRPr lang="en-US" sz="1100" dirty="0"/>
+          </a:p>
+        </p:txBody>
+      </p:sp>
+      <p:sp>
+        <p:nvSpPr>
+          <p:cNvPr id="25" name="Slide Number Placeholder 0"/>
+          <p:cNvSpPr>
+            <a:spLocks noGrp="1"/>
+          </p:cNvSpPr>
+          <p:nvPr>
+            <p:ph type="sldNum" sz="quarter" idx="4294967295"/>
+          </p:nvPr>
+        </p:nvSpPr>
+        <p:spPr>
+          <a:xfrm>
+            <a:off x="10972800" y="6419088"/>
+            <a:ext cx="667512" cy="274320"/>
+          </a:xfrm>
+          <a:prstGeom prst="rect">
+            <a:avLst/>
+          </a:prstGeom>
+          <a:extLst>
+            <a:ext uri="{C572A759-6A51-4108-AA02-DFA0A04FC94B}">
+              <ma14:wrappingTextBoxFlag xmlns:ma14="http://schemas.microsoft.com/office/mac/drawingml/2011/main" val="0"/>
+            </a:ext>
+          </a:extLst>
+        </p:spPr>
+        <p:txBody>
+          <a:bodyPr/>
+          <a:lstStyle>
+            <a:lvl1pPr>
+              <a:defRPr sz="1000">
+                <a:solidFill>
+                  <a:srgbClr val="5B6B7A"/>
+                </a:solidFill>
+              </a:defRPr>
+            </a:lvl1pPr>
+          </a:lstStyle>
+          <a:p>
+            <a:pPr algn="r"/>
+            <a:fld id="{F7021451-1387-4CA6-816F-3879F97B5CBC}" type="slidenum">
+              <a:rPr b="0" lang="en-US"/>
+              <a:t>15</a:t>
+            </a:fld>
+            <a:endParaRPr lang="en-US"/>
+          </a:p>
+        </p:txBody>
+      </p:sp>
+    </p:spTree>
+  </p:cSld>
+  <p:clrMapOvr>
+    <a:masterClrMapping/>
+  </p:clrMapOvr>
+</p:sld>
+</file>
+
+<file path=ppt/slides/slide16.xml><?xml version="1.0" encoding="utf-8"?>
+<p:sld xmlns:a="http://schemas.openxmlformats.org/drawingml/2006/main" xmlns:r="http://schemas.openxmlformats.org/officeDocument/2006/relationships" xmlns:p="http://schemas.openxmlformats.org/presentationml/2006/main">
+  <p:cSld name="Slide 16">
+    <p:spTree>
+      <p:nvGrpSpPr>
+        <p:cNvPr id="1" name=""/>
+        <p:cNvGrpSpPr/>
+        <p:nvPr/>
+      </p:nvGrpSpPr>
+      <p:grpSpPr>
+        <a:xfrm>
+          <a:off x="0" y="0"/>
+          <a:ext cx="0" cy="0"/>
+          <a:chOff x="0" y="0"/>
+          <a:chExt cx="0" cy="0"/>
+        </a:xfrm>
+      </p:grpSpPr>
+      <p:sp>
+        <p:nvSpPr>
+          <p:cNvPr id="2" name="Text 0"/>
+          <p:cNvSpPr/>
+          <p:nvPr>
+            <p:ph idx="100" type="body" hasCustomPrompt="1"/>
+          </p:nvPr>
+        </p:nvSpPr>
+        <p:spPr>
+          <a:xfrm>
+            <a:off x="548640" y="310896"/>
+            <a:ext cx="8229600" cy="274320"/>
+          </a:xfrm>
+          <a:prstGeom prst="rect">
+            <a:avLst/>
+          </a:prstGeom>
+          <a:noFill/>
+          <a:ln/>
+        </p:spPr>
+        <p:txBody>
+          <a:bodyPr wrap="square" lIns="0" tIns="0" rIns="0" bIns="0" rtlCol="0" anchor="t"/>
+          <a:lstStyle/>
+          <a:p>
+            <a:pPr algn="l" indent="0" marL="0">
+              <a:buNone/>
+            </a:pPr>
+            <a:r>
+              <a:rPr lang="en-US" sz="1200" b="1" spc="300" kern="0" dirty="0">
+                <a:solidFill>
+                  <a:schemeClr val="accent1"/>
+                </a:solidFill>
+              </a:rPr>
+              <a:t>EXPERIMENTS</a:t>
+            </a:r>
+            <a:endParaRPr lang="en-US" sz="1200" dirty="0"/>
+          </a:p>
+        </p:txBody>
+      </p:sp>
+      <p:sp>
+        <p:nvSpPr>
+          <p:cNvPr id="3" name="Text 0"/>
+          <p:cNvSpPr/>
+          <p:nvPr>
+            <p:ph idx="101" type="title" hasCustomPrompt="1"/>
+          </p:nvPr>
+        </p:nvSpPr>
+        <p:spPr>
+          <a:xfrm>
+            <a:off x="548640" y="566928"/>
+            <a:ext cx="11094415" cy="713232"/>
+          </a:xfrm>
+          <a:prstGeom prst="rect">
+            <a:avLst/>
+          </a:prstGeom>
+          <a:noFill/>
+          <a:ln/>
+        </p:spPr>
+        <p:txBody>
+          <a:bodyPr wrap="square" lIns="0" tIns="0" rIns="0" bIns="0" rtlCol="0" anchor="t"/>
+          <a:lstStyle/>
+          <a:p>
+            <a:pPr algn="l" indent="0" marL="0">
+              <a:buNone/>
+            </a:pPr>
+            <a:r>
+              <a:rPr lang="en-US" sz="3400" b="1" dirty="0">
+                <a:solidFill>
+                  <a:schemeClr val="tx1"/>
+                </a:solidFill>
+              </a:rPr>
+              <a:t>Mechanism study: residuals and gain views</a:t>
+            </a:r>
+            <a:endParaRPr lang="en-US" sz="3400" dirty="0"/>
+          </a:p>
+        </p:txBody>
+      </p:sp>
+      <p:graphicFrame>
+        <p:nvGraphicFramePr>
+          <p:cNvPr id="4" name="sim-resid-chart" descr=""/>
+          <p:cNvGraphicFramePr/>
+          <p:nvPr/>
+        </p:nvGraphicFramePr>
+        <p:xfrm>
+          <a:off x="548640" y="1463040"/>
+          <a:ext cx="5852160" cy="3337560"/>
+        </p:xfrm>
+        <a:graphic xmlns:a="http://schemas.openxmlformats.org/drawingml/2006/main">
+          <a:graphicData uri="http://schemas.openxmlformats.org/drawingml/2006/chart">
+            <c:chart xmlns:c="http://schemas.openxmlformats.org/drawingml/2006/chart" r:id="rId1"/>
+          </a:graphicData>
+        </a:graphic>
+      </p:graphicFrame>
+      <p:graphicFrame>
+        <p:nvGraphicFramePr>
+          <p:cNvPr id="5" name="sim-gain-chart" descr=""/>
+          <p:cNvGraphicFramePr/>
+          <p:nvPr/>
+        </p:nvGraphicFramePr>
+        <p:xfrm>
+          <a:off x="6583680" y="1463040"/>
+          <a:ext cx="5056632" cy="3337560"/>
+        </p:xfrm>
+        <a:graphic xmlns:a="http://schemas.openxmlformats.org/drawingml/2006/main">
+          <a:graphicData uri="http://schemas.openxmlformats.org/drawingml/2006/chart">
+            <c:chart xmlns:c="http://schemas.openxmlformats.org/drawingml/2006/chart" r:id="rId2"/>
+          </a:graphicData>
+        </a:graphic>
+      </p:graphicFrame>
+      <p:sp>
+        <p:nvSpPr>
+          <p:cNvPr id="6" name="card-320"/>
+          <p:cNvSpPr/>
+          <p:nvPr/>
+        </p:nvSpPr>
+        <p:spPr>
+          <a:xfrm>
+            <a:off x="548640" y="4937760"/>
+            <a:ext cx="11094415" cy="566928"/>
+          </a:xfrm>
+          <a:prstGeom prst="roundRect">
+            <a:avLst>
+              <a:gd name="adj" fmla="val 19355"/>
+            </a:avLst>
+          </a:prstGeom>
+          <a:solidFill>
+            <a:schemeClr val="accent4">
+              <a:alpha val="10000"/>
+            </a:schemeClr>
+          </a:solidFill>
+          <a:ln/>
+        </p:spPr>
+      </p:sp>
+      <p:sp>
+        <p:nvSpPr>
+          <p:cNvPr id="7" name="text-321"/>
+          <p:cNvSpPr txBox="1"/>
+          <p:nvPr/>
+        </p:nvSpPr>
+        <p:spPr>
+          <a:xfrm>
+            <a:off x="822960" y="4937760"/>
+            <a:ext cx="10545775" cy="566928"/>
+          </a:xfrm>
+          <a:prstGeom prst="rect">
+            <a:avLst/>
+          </a:prstGeom>
+          <a:noFill/>
+          <a:ln/>
+        </p:spPr>
+        <p:txBody>
+          <a:bodyPr wrap="square" lIns="0" tIns="0" rIns="0" bIns="0" rtlCol="0" anchor="ctr"/>
+          <a:lstStyle/>
+          <a:p>
+            <a:pPr indent="0" marL="0">
+              <a:buNone/>
+            </a:pPr>
+            <a:r>
+              <a:rPr lang="en-US" sz="1500" b="1" dirty="0">
+                <a:solidFill>
+                  <a:schemeClr val="tx2"/>
+                </a:solidFill>
+              </a:rPr>
+              <a:t>At the inherited scale 0.15 a worse head costs −0.0056; 1:4:1 gain weights keep +0.0018 when off-centre views are weaker, equal thirds do not.</a:t>
+            </a:r>
+            <a:endParaRPr lang="en-US" sz="1500" dirty="0"/>
+          </a:p>
+        </p:txBody>
+      </p:sp>
+      <p:sp>
+        <p:nvSpPr>
+          <p:cNvPr id="8" name="text-322"/>
+          <p:cNvSpPr txBox="1"/>
+          <p:nvPr/>
+        </p:nvSpPr>
+        <p:spPr>
+          <a:xfrm>
+            <a:off x="548640" y="5623560"/>
+            <a:ext cx="11094415" cy="457200"/>
+          </a:xfrm>
+          <a:prstGeom prst="rect">
+            <a:avLst/>
+          </a:prstGeom>
+          <a:noFill/>
+          <a:ln/>
+        </p:spPr>
+        <p:txBody>
+          <a:bodyPr wrap="square" lIns="0" tIns="0" rIns="0" bIns="0" rtlCol="0" anchor="t"/>
+          <a:lstStyle/>
+          <a:p>
+            <a:pPr indent="0" marL="0">
+              <a:buNone/>
+            </a:pPr>
+            <a:r>
+              <a:rPr lang="en-US" sz="1100" dirty="0">
+                <a:solidFill>
+                  <a:schemeClr val="accent5"/>
+                </a:solidFill>
+              </a:rPr>
+              <a:t>SYNTHETIC SIMULATION, NOT RSNA DATA  ·  same setup as the previous slide; heads a and b share most of their noise (ρ = 0.92), gain views share noise with ρ = 0.9; parameters assumed. Paired 95% intervals ≤ ±0.0003.</a:t>
+            </a:r>
+            <a:endParaRPr lang="en-US" sz="1100" dirty="0"/>
+          </a:p>
+        </p:txBody>
+      </p:sp>
+      <p:sp>
+        <p:nvSpPr>
+          <p:cNvPr id="25" name="Slide Number Placeholder 0"/>
+          <p:cNvSpPr>
+            <a:spLocks noGrp="1"/>
+          </p:cNvSpPr>
+          <p:nvPr>
+            <p:ph type="sldNum" sz="quarter" idx="4294967295"/>
+          </p:nvPr>
+        </p:nvSpPr>
+        <p:spPr>
+          <a:xfrm>
+            <a:off x="10972800" y="6419088"/>
+            <a:ext cx="667512" cy="274320"/>
+          </a:xfrm>
+          <a:prstGeom prst="rect">
+            <a:avLst/>
+          </a:prstGeom>
+          <a:extLst>
+            <a:ext uri="{C572A759-6A51-4108-AA02-DFA0A04FC94B}">
+              <ma14:wrappingTextBoxFlag xmlns:ma14="http://schemas.microsoft.com/office/mac/drawingml/2011/main" val="0"/>
+            </a:ext>
+          </a:extLst>
+        </p:spPr>
+        <p:txBody>
+          <a:bodyPr/>
+          <a:lstStyle>
+            <a:lvl1pPr>
+              <a:defRPr sz="1000">
+                <a:solidFill>
+                  <a:srgbClr val="5B6B7A"/>
+                </a:solidFill>
+              </a:defRPr>
+            </a:lvl1pPr>
+          </a:lstStyle>
+          <a:p>
+            <a:pPr algn="r"/>
+            <a:fld id="{F7021451-1387-4CA6-816F-3879F97B5CBC}" type="slidenum">
+              <a:rPr b="0" lang="en-US"/>
+              <a:t>16</a:t>
+            </a:fld>
+            <a:endParaRPr lang="en-US"/>
+          </a:p>
+        </p:txBody>
+      </p:sp>
+    </p:spTree>
+  </p:cSld>
+  <p:clrMapOvr>
+    <a:masterClrMapping/>
+  </p:clrMapOvr>
+</p:sld>
+</file>
+
+<file path=ppt/slides/slide17.xml><?xml version="1.0" encoding="utf-8"?>
+<p:sld xmlns:a="http://schemas.openxmlformats.org/drawingml/2006/main" xmlns:r="http://schemas.openxmlformats.org/officeDocument/2006/relationships" xmlns:p="http://schemas.openxmlformats.org/presentationml/2006/main">
+  <p:cSld name="Slide 17">
+    <p:spTree>
+      <p:nvGrpSpPr>
+        <p:cNvPr id="1" name=""/>
+        <p:cNvGrpSpPr/>
+        <p:nvPr/>
+      </p:nvGrpSpPr>
+      <p:grpSpPr>
+        <a:xfrm>
+          <a:off x="0" y="0"/>
+          <a:ext cx="0" cy="0"/>
+          <a:chOff x="0" y="0"/>
+          <a:chExt cx="0" cy="0"/>
+        </a:xfrm>
+      </p:grpSpPr>
+      <p:sp>
+        <p:nvSpPr>
+          <p:cNvPr id="2" name="Text 0"/>
+          <p:cNvSpPr/>
+          <p:nvPr>
+            <p:ph idx="100" type="body" hasCustomPrompt="1"/>
+          </p:nvPr>
+        </p:nvSpPr>
+        <p:spPr>
+          <a:xfrm>
+            <a:off x="548640" y="310896"/>
+            <a:ext cx="8229600" cy="274320"/>
+          </a:xfrm>
+          <a:prstGeom prst="rect">
+            <a:avLst/>
+          </a:prstGeom>
+          <a:noFill/>
+          <a:ln/>
+        </p:spPr>
+        <p:txBody>
+          <a:bodyPr wrap="square" lIns="0" tIns="0" rIns="0" bIns="0" rtlCol="0" anchor="t"/>
+          <a:lstStyle/>
+          <a:p>
+            <a:pPr algn="l" indent="0" marL="0">
+              <a:buNone/>
+            </a:pPr>
+            <a:r>
+              <a:rPr lang="en-US" sz="1200" b="1" spc="300" kern="0" dirty="0">
+                <a:solidFill>
+                  <a:schemeClr val="accent1"/>
+                </a:solidFill>
+              </a:rPr>
+              <a:t>EXPERIMENTS</a:t>
+            </a:r>
+            <a:endParaRPr lang="en-US" sz="1200" dirty="0"/>
+          </a:p>
+        </p:txBody>
+      </p:sp>
+      <p:sp>
+        <p:nvSpPr>
+          <p:cNvPr id="3" name="Text 0"/>
+          <p:cNvSpPr/>
+          <p:nvPr>
+            <p:ph idx="101" type="title" hasCustomPrompt="1"/>
+          </p:nvPr>
+        </p:nvSpPr>
+        <p:spPr>
+          <a:xfrm>
+            <a:off x="548640" y="566928"/>
+            <a:ext cx="11094415" cy="713232"/>
+          </a:xfrm>
+          <a:prstGeom prst="rect">
+            <a:avLst/>
+          </a:prstGeom>
+          <a:noFill/>
+          <a:ln/>
+        </p:spPr>
+        <p:txBody>
+          <a:bodyPr wrap="square" lIns="0" tIns="0" rIns="0" bIns="0" rtlCol="0" anchor="t"/>
+          <a:lstStyle/>
+          <a:p>
+            <a:pPr algn="l" indent="0" marL="0">
+              <a:buNone/>
+            </a:pPr>
+            <a:r>
+              <a:rPr lang="en-US" sz="3400" b="1" dirty="0">
+                <a:solidFill>
+                  <a:schemeClr val="tx1"/>
+                </a:solidFill>
+              </a:rPr>
+              <a:t>Submissions and ablation batch</a:t>
+            </a:r>
+            <a:endParaRPr lang="en-US" sz="3400" dirty="0"/>
+          </a:p>
+        </p:txBody>
+      </p:sp>
+      <p:graphicFrame>
+        <p:nvGraphicFramePr>
+          <p:cNvPr id="18" name="Table 0"/>
           <p:cNvGraphicFramePr>
             <a:graphicFrameLocks noGrp="1"/>
           </p:cNvGraphicFramePr>
@@ -10378,12 +12596,12 @@
                         <a:buNone/>
                       </a:pPr>
                       <a:r>
-                        <a:rPr lang="en-US" sz="1200" dirty="0">
+                        <a:rPr lang="en-US" sz="1200" b="1" dirty="0">
                           <a:solidFill>
-                            <a:srgbClr val="5B6B7A"/>
+                            <a:srgbClr val="6D5BD0"/>
                           </a:solidFill>
                         </a:rPr>
-                        <a:t>Public score 0.940 (reference)</a:t>
+                        <a:t>Graded: 0.940 (submission 1)</a:t>
                       </a:r>
                       <a:endParaRPr lang="en-US" sz="1200" dirty="0"/>
                     </a:p>
@@ -11862,7 +14080,7 @@
                             <a:srgbClr val="6D5BD0"/>
                           </a:solidFill>
                         </a:rPr>
-                        <a:t>Graded: 0.922 (public)</a:t>
+                        <a:t>Graded: 0.922 (submission 2)</a:t>
                       </a:r>
                       <a:endParaRPr lang="en-US" sz="1200" dirty="0"/>
                     </a:p>
@@ -11916,7 +14134,7 @@
       </p:graphicFrame>
       <p:sp>
         <p:nvSpPr>
-          <p:cNvPr id="5" name="text-317"/>
+          <p:cNvPr id="5" name="text-323"/>
           <p:cNvSpPr txBox="1"/>
           <p:nvPr/>
         </p:nvSpPr>
@@ -11944,7 +14162,7 @@
                   <a:schemeClr val="accent5"/>
                 </a:solidFill>
               </a:rPr>
-              <a:t>Only ABG has a graded score so far; A, B, G and AB are the next runs.</a:t>
+              <a:t>Two submissions are graded so far. A, B, G and AB are the next runs, and the only way to attribute the change to one addition.</a:t>
             </a:r>
             <a:endParaRPr lang="en-US" sz="1300" dirty="0"/>
           </a:p>
@@ -11952,7 +14170,7 @@
       </p:sp>
       <p:sp>
         <p:nvSpPr>
-          <p:cNvPr id="6" name="card-318"/>
+          <p:cNvPr id="6" name="card-324"/>
           <p:cNvSpPr/>
           <p:nvPr/>
         </p:nvSpPr>
@@ -11974,7 +14192,7 @@
       </p:sp>
       <p:sp>
         <p:nvSpPr>
-          <p:cNvPr id="7" name="text-319"/>
+          <p:cNvPr id="7" name="text-325"/>
           <p:cNvSpPr txBox="1"/>
           <p:nvPr/>
         </p:nvSpPr>
@@ -12010,7 +14228,7 @@
       </p:sp>
       <p:sp>
         <p:nvSpPr>
-          <p:cNvPr id="8" name="badge-320"/>
+          <p:cNvPr id="8" name="badge-326"/>
           <p:cNvSpPr/>
           <p:nvPr/>
         </p:nvSpPr>
@@ -12030,7 +14248,7 @@
       </p:sp>
       <p:pic>
         <p:nvPicPr>
-          <p:cNvPr id="9" name="icon-321" descr="preencoded.png">    </p:cNvPr>
+          <p:cNvPr id="9" name="icon-327" descr="preencoded.png">    </p:cNvPr>
           <p:cNvPicPr>
             <a:picLocks noChangeAspect="1"/>
           </p:cNvPicPr>
@@ -12054,7 +14272,7 @@
       </p:pic>
       <p:sp>
         <p:nvSpPr>
-          <p:cNvPr id="10" name="text-322"/>
+          <p:cNvPr id="10" name="text-328"/>
           <p:cNvSpPr txBox="1"/>
           <p:nvPr/>
         </p:nvSpPr>
@@ -12090,7 +14308,7 @@
       </p:sp>
       <p:sp>
         <p:nvSpPr>
-          <p:cNvPr id="11" name="text-323"/>
+          <p:cNvPr id="11" name="text-329"/>
           <p:cNvSpPr txBox="1"/>
           <p:nvPr/>
         </p:nvSpPr>
@@ -12126,7 +14344,7 @@
       </p:sp>
       <p:sp>
         <p:nvSpPr>
-          <p:cNvPr id="12" name="badge-324"/>
+          <p:cNvPr id="12" name="badge-330"/>
           <p:cNvSpPr/>
           <p:nvPr/>
         </p:nvSpPr>
@@ -12146,7 +14364,7 @@
       </p:sp>
       <p:pic>
         <p:nvPicPr>
-          <p:cNvPr id="13" name="icon-325" descr="preencoded.png">    </p:cNvPr>
+          <p:cNvPr id="13" name="icon-331" descr="preencoded.png">    </p:cNvPr>
           <p:cNvPicPr>
             <a:picLocks noChangeAspect="1"/>
           </p:cNvPicPr>
@@ -12170,7 +14388,7 @@
       </p:pic>
       <p:sp>
         <p:nvSpPr>
-          <p:cNvPr id="14" name="text-326"/>
+          <p:cNvPr id="14" name="text-332"/>
           <p:cNvSpPr txBox="1"/>
           <p:nvPr/>
         </p:nvSpPr>
@@ -12206,7 +14424,7 @@
       </p:sp>
       <p:sp>
         <p:nvSpPr>
-          <p:cNvPr id="15" name="text-327"/>
+          <p:cNvPr id="15" name="text-333"/>
           <p:cNvSpPr txBox="1"/>
           <p:nvPr/>
         </p:nvSpPr>
@@ -12242,7 +14460,7 @@
       </p:sp>
       <p:sp>
         <p:nvSpPr>
-          <p:cNvPr id="16" name="badge-328"/>
+          <p:cNvPr id="16" name="badge-334"/>
           <p:cNvSpPr/>
           <p:nvPr/>
         </p:nvSpPr>
@@ -12262,7 +14480,7 @@
       </p:sp>
       <p:pic>
         <p:nvPicPr>
-          <p:cNvPr id="17" name="icon-329" descr="preencoded.png">    </p:cNvPr>
+          <p:cNvPr id="17" name="icon-335" descr="preencoded.png">    </p:cNvPr>
           <p:cNvPicPr>
             <a:picLocks noChangeAspect="1"/>
           </p:cNvPicPr>
@@ -12286,7 +14504,7 @@
       </p:pic>
       <p:sp>
         <p:nvSpPr>
-          <p:cNvPr id="18" name="text-330"/>
+          <p:cNvPr id="18" name="text-336"/>
           <p:cNvSpPr txBox="1"/>
           <p:nvPr/>
         </p:nvSpPr>
@@ -12322,7 +14540,7 @@
       </p:sp>
       <p:sp>
         <p:nvSpPr>
-          <p:cNvPr id="19" name="text-331"/>
+          <p:cNvPr id="19" name="text-337"/>
           <p:cNvSpPr txBox="1"/>
           <p:nvPr/>
         </p:nvSpPr>
@@ -12395,7 +14613,7 @@
             <a:pPr algn="r"/>
             <a:fld id="{F7021451-1387-4CA6-816F-3879F97B5CBC}" type="slidenum">
               <a:rPr b="0" lang="en-US"/>
-              <a:t>15</a:t>
+              <a:t>17</a:t>
             </a:fld>
             <a:endParaRPr lang="en-US"/>
           </a:p>
@@ -12409,9 +14627,9 @@
 </p:sld>
 </file>
 
-<file path=ppt/slides/slide16.xml><?xml version="1.0" encoding="utf-8"?>
+<file path=ppt/slides/slide18.xml><?xml version="1.0" encoding="utf-8"?>
 <p:sld xmlns:a="http://schemas.openxmlformats.org/drawingml/2006/main" xmlns:r="http://schemas.openxmlformats.org/officeDocument/2006/relationships" xmlns:p="http://schemas.openxmlformats.org/presentationml/2006/main">
-  <p:cSld name="Slide 16">
+  <p:cSld name="Slide 18">
     <p:spTree>
       <p:nvGrpSpPr>
         <p:cNvPr id="1" name=""/>
@@ -12520,7 +14738,7 @@
       </p:graphicFrame>
       <p:sp>
         <p:nvSpPr>
-          <p:cNvPr id="5" name="text-332"/>
+          <p:cNvPr id="5" name="text-338"/>
           <p:cNvSpPr txBox="1"/>
           <p:nvPr/>
         </p:nvSpPr>
@@ -12556,7 +14774,7 @@
       </p:sp>
       <p:graphicFrame>
         <p:nvGraphicFramePr>
-          <p:cNvPr id="17" name="Table 0"/>
+          <p:cNvPr id="19" name="Table 0"/>
           <p:cNvGraphicFramePr>
             <a:graphicFrameLocks noGrp="1"/>
           </p:cNvGraphicFramePr>
@@ -13512,7 +15730,7 @@
       </p:graphicFrame>
       <p:sp>
         <p:nvSpPr>
-          <p:cNvPr id="7" name="card-333"/>
+          <p:cNvPr id="7" name="card-339"/>
           <p:cNvSpPr/>
           <p:nvPr/>
         </p:nvSpPr>
@@ -13536,7 +15754,7 @@
       </p:sp>
       <p:sp>
         <p:nvSpPr>
-          <p:cNvPr id="8" name="text-334"/>
+          <p:cNvPr id="8" name="text-340"/>
           <p:cNvSpPr txBox="1"/>
           <p:nvPr/>
         </p:nvSpPr>
@@ -13609,7 +15827,7 @@
             <a:pPr algn="r"/>
             <a:fld id="{F7021451-1387-4CA6-816F-3879F97B5CBC}" type="slidenum">
               <a:rPr b="0" lang="en-US"/>
-              <a:t>16</a:t>
+              <a:t>18</a:t>
             </a:fld>
             <a:endParaRPr lang="en-US"/>
           </a:p>
@@ -13623,9 +15841,9 @@
 </p:sld>
 </file>
 
-<file path=ppt/slides/slide17.xml><?xml version="1.0" encoding="utf-8"?>
+<file path=ppt/slides/slide19.xml><?xml version="1.0" encoding="utf-8"?>
 <p:sld xmlns:a="http://schemas.openxmlformats.org/drawingml/2006/main" xmlns:r="http://schemas.openxmlformats.org/officeDocument/2006/relationships" xmlns:p="http://schemas.openxmlformats.org/presentationml/2006/main">
-  <p:cSld name="Slide 17">
+  <p:cSld name="Slide 19">
     <p:spTree>
       <p:nvGrpSpPr>
         <p:cNvPr id="1" name=""/>
@@ -13718,7 +15936,7 @@
       </p:sp>
       <p:graphicFrame>
         <p:nvGraphicFramePr>
-          <p:cNvPr id="18" name="Table 0"/>
+          <p:cNvPr id="20" name="Table 0"/>
           <p:cNvGraphicFramePr>
             <a:graphicFrameLocks noGrp="1"/>
           </p:cNvGraphicFramePr>
@@ -15044,7 +17262,7 @@
       </p:graphicFrame>
       <p:sp>
         <p:nvSpPr>
-          <p:cNvPr id="5" name="card-335"/>
+          <p:cNvPr id="5" name="card-341"/>
           <p:cNvSpPr/>
           <p:nvPr/>
         </p:nvSpPr>
@@ -15066,7 +17284,7 @@
       </p:sp>
       <p:sp>
         <p:nvSpPr>
-          <p:cNvPr id="6" name="text-336"/>
+          <p:cNvPr id="6" name="text-342"/>
           <p:cNvSpPr txBox="1"/>
           <p:nvPr/>
         </p:nvSpPr>
@@ -15105,7 +17323,7 @@
       </p:sp>
       <p:sp>
         <p:nvSpPr>
-          <p:cNvPr id="7" name="text-337"/>
+          <p:cNvPr id="7" name="text-343"/>
           <p:cNvSpPr txBox="1"/>
           <p:nvPr/>
         </p:nvSpPr>
@@ -15141,7 +17359,7 @@
       </p:sp>
       <p:sp>
         <p:nvSpPr>
-          <p:cNvPr id="8" name="card-338"/>
+          <p:cNvPr id="8" name="card-344"/>
           <p:cNvSpPr/>
           <p:nvPr/>
         </p:nvSpPr>
@@ -15163,7 +17381,7 @@
       </p:sp>
       <p:sp>
         <p:nvSpPr>
-          <p:cNvPr id="9" name="text-339"/>
+          <p:cNvPr id="9" name="text-345"/>
           <p:cNvSpPr txBox="1"/>
           <p:nvPr/>
         </p:nvSpPr>
@@ -15202,7 +17420,7 @@
       </p:sp>
       <p:sp>
         <p:nvSpPr>
-          <p:cNvPr id="10" name="text-340"/>
+          <p:cNvPr id="10" name="text-346"/>
           <p:cNvSpPr txBox="1"/>
           <p:nvPr/>
         </p:nvSpPr>
@@ -15238,7 +17456,7 @@
       </p:sp>
       <p:sp>
         <p:nvSpPr>
-          <p:cNvPr id="11" name="card-341"/>
+          <p:cNvPr id="11" name="card-347"/>
           <p:cNvSpPr/>
           <p:nvPr/>
         </p:nvSpPr>
@@ -15260,7 +17478,7 @@
       </p:sp>
       <p:sp>
         <p:nvSpPr>
-          <p:cNvPr id="12" name="text-342"/>
+          <p:cNvPr id="12" name="text-348"/>
           <p:cNvSpPr txBox="1"/>
           <p:nvPr/>
         </p:nvSpPr>
@@ -15299,7 +17517,7 @@
       </p:sp>
       <p:sp>
         <p:nvSpPr>
-          <p:cNvPr id="13" name="text-343"/>
+          <p:cNvPr id="13" name="text-349"/>
           <p:cNvSpPr txBox="1"/>
           <p:nvPr/>
         </p:nvSpPr>
@@ -15335,7 +17553,7 @@
       </p:sp>
       <p:sp>
         <p:nvSpPr>
-          <p:cNvPr id="14" name="text-344"/>
+          <p:cNvPr id="14" name="text-350"/>
           <p:cNvSpPr txBox="1"/>
           <p:nvPr/>
         </p:nvSpPr>
@@ -15366,985 +17584,6 @@
               <a:t>These checks show that the pipeline runs correctly and writes a valid file. They do not measure AUC.</a:t>
             </a:r>
             <a:endParaRPr lang="en-US" sz="1300" dirty="0"/>
-          </a:p>
-        </p:txBody>
-      </p:sp>
-      <p:sp>
-        <p:nvSpPr>
-          <p:cNvPr id="25" name="Slide Number Placeholder 0"/>
-          <p:cNvSpPr>
-            <a:spLocks noGrp="1"/>
-          </p:cNvSpPr>
-          <p:nvPr>
-            <p:ph type="sldNum" sz="quarter" idx="4294967295"/>
-          </p:nvPr>
-        </p:nvSpPr>
-        <p:spPr>
-          <a:xfrm>
-            <a:off x="10972800" y="6419088"/>
-            <a:ext cx="667512" cy="274320"/>
-          </a:xfrm>
-          <a:prstGeom prst="rect">
-            <a:avLst/>
-          </a:prstGeom>
-          <a:extLst>
-            <a:ext uri="{C572A759-6A51-4108-AA02-DFA0A04FC94B}">
-              <ma14:wrappingTextBoxFlag xmlns:ma14="http://schemas.microsoft.com/office/mac/drawingml/2011/main" val="0"/>
-            </a:ext>
-          </a:extLst>
-        </p:spPr>
-        <p:txBody>
-          <a:bodyPr/>
-          <a:lstStyle>
-            <a:lvl1pPr>
-              <a:defRPr sz="1000">
-                <a:solidFill>
-                  <a:srgbClr val="5B6B7A"/>
-                </a:solidFill>
-              </a:defRPr>
-            </a:lvl1pPr>
-          </a:lstStyle>
-          <a:p>
-            <a:pPr algn="r"/>
-            <a:fld id="{F7021451-1387-4CA6-816F-3879F97B5CBC}" type="slidenum">
-              <a:rPr b="0" lang="en-US"/>
-              <a:t>17</a:t>
-            </a:fld>
-            <a:endParaRPr lang="en-US"/>
-          </a:p>
-        </p:txBody>
-      </p:sp>
-    </p:spTree>
-  </p:cSld>
-  <p:clrMapOvr>
-    <a:masterClrMapping/>
-  </p:clrMapOvr>
-</p:sld>
-</file>
-
-<file path=ppt/slides/slide18.xml><?xml version="1.0" encoding="utf-8"?>
-<p:sld xmlns:a="http://schemas.openxmlformats.org/drawingml/2006/main" xmlns:r="http://schemas.openxmlformats.org/officeDocument/2006/relationships" xmlns:p="http://schemas.openxmlformats.org/presentationml/2006/main">
-  <p:cSld name="Slide 18">
-    <p:spTree>
-      <p:nvGrpSpPr>
-        <p:cNvPr id="1" name=""/>
-        <p:cNvGrpSpPr/>
-        <p:nvPr/>
-      </p:nvGrpSpPr>
-      <p:grpSpPr>
-        <a:xfrm>
-          <a:off x="0" y="0"/>
-          <a:ext cx="0" cy="0"/>
-          <a:chOff x="0" y="0"/>
-          <a:chExt cx="0" cy="0"/>
-        </a:xfrm>
-      </p:grpSpPr>
-      <p:sp>
-        <p:nvSpPr>
-          <p:cNvPr id="2" name="Text 0"/>
-          <p:cNvSpPr/>
-          <p:nvPr>
-            <p:ph idx="100" type="body" hasCustomPrompt="1"/>
-          </p:nvPr>
-        </p:nvSpPr>
-        <p:spPr>
-          <a:xfrm>
-            <a:off x="548640" y="310896"/>
-            <a:ext cx="8229600" cy="274320"/>
-          </a:xfrm>
-          <a:prstGeom prst="rect">
-            <a:avLst/>
-          </a:prstGeom>
-          <a:noFill/>
-          <a:ln/>
-        </p:spPr>
-        <p:txBody>
-          <a:bodyPr wrap="square" lIns="0" tIns="0" rIns="0" bIns="0" rtlCol="0" anchor="t"/>
-          <a:lstStyle/>
-          <a:p>
-            <a:pPr algn="l" indent="0" marL="0">
-              <a:buNone/>
-            </a:pPr>
-            <a:r>
-              <a:rPr lang="en-US" sz="1200" b="1" spc="300" kern="0" dirty="0">
-                <a:solidFill>
-                  <a:schemeClr val="accent1"/>
-                </a:solidFill>
-              </a:rPr>
-              <a:t>RESULTS</a:t>
-            </a:r>
-            <a:endParaRPr lang="en-US" sz="1200" dirty="0"/>
-          </a:p>
-        </p:txBody>
-      </p:sp>
-      <p:sp>
-        <p:nvSpPr>
-          <p:cNvPr id="3" name="Text 0"/>
-          <p:cNvSpPr/>
-          <p:nvPr>
-            <p:ph idx="101" type="title" hasCustomPrompt="1"/>
-          </p:nvPr>
-        </p:nvSpPr>
-        <p:spPr>
-          <a:xfrm>
-            <a:off x="548640" y="566928"/>
-            <a:ext cx="11094415" cy="713232"/>
-          </a:xfrm>
-          <a:prstGeom prst="rect">
-            <a:avLst/>
-          </a:prstGeom>
-          <a:noFill/>
-          <a:ln/>
-        </p:spPr>
-        <p:txBody>
-          <a:bodyPr wrap="square" lIns="0" tIns="0" rIns="0" bIns="0" rtlCol="0" anchor="t"/>
-          <a:lstStyle/>
-          <a:p>
-            <a:pPr algn="l" indent="0" marL="0">
-              <a:buNone/>
-            </a:pPr>
-            <a:r>
-              <a:rPr lang="en-US" sz="3400" b="1" dirty="0">
-                <a:solidFill>
-                  <a:schemeClr val="tx1"/>
-                </a:solidFill>
-              </a:rPr>
-              <a:t>Leaderboard result</a:t>
-            </a:r>
-            <a:endParaRPr lang="en-US" sz="3400" dirty="0"/>
-          </a:p>
-        </p:txBody>
-      </p:sp>
-      <p:sp>
-        <p:nvSpPr>
-          <p:cNvPr id="4" name="card-345"/>
-          <p:cNvSpPr/>
-          <p:nvPr/>
-        </p:nvSpPr>
-        <p:spPr>
-          <a:xfrm>
-            <a:off x="548640" y="1554480"/>
-            <a:ext cx="4206240" cy="4526280"/>
-          </a:xfrm>
-          <a:prstGeom prst="roundRect">
-            <a:avLst>
-              <a:gd name="adj" fmla="val 2609"/>
-            </a:avLst>
-          </a:prstGeom>
-          <a:solidFill>
-            <a:schemeClr val="bg2"/>
-          </a:solidFill>
-          <a:ln/>
-        </p:spPr>
-      </p:sp>
-      <p:sp>
-        <p:nvSpPr>
-          <p:cNvPr id="5" name="text-346"/>
-          <p:cNvSpPr txBox="1"/>
-          <p:nvPr/>
-        </p:nvSpPr>
-        <p:spPr>
-          <a:xfrm>
-            <a:off x="914400" y="1783080"/>
-            <a:ext cx="3474720" cy="256032"/>
-          </a:xfrm>
-          <a:prstGeom prst="rect">
-            <a:avLst/>
-          </a:prstGeom>
-          <a:noFill/>
-          <a:ln/>
-        </p:spPr>
-        <p:txBody>
-          <a:bodyPr wrap="square" lIns="0" tIns="0" rIns="0" bIns="0" rtlCol="0" anchor="t"/>
-          <a:lstStyle/>
-          <a:p>
-            <a:pPr indent="0" marL="0">
-              <a:buNone/>
-            </a:pPr>
-            <a:r>
-              <a:rPr lang="en-US" sz="1100" b="1" spc="200" kern="0" dirty="0">
-                <a:solidFill>
-                  <a:schemeClr val="accent5"/>
-                </a:solidFill>
-              </a:rPr>
-              <a:t>ABG SUBMISSION</a:t>
-            </a:r>
-            <a:endParaRPr lang="en-US" sz="1100" dirty="0"/>
-          </a:p>
-        </p:txBody>
-      </p:sp>
-      <p:sp>
-        <p:nvSpPr>
-          <p:cNvPr id="6" name="text-347"/>
-          <p:cNvSpPr txBox="1"/>
-          <p:nvPr/>
-        </p:nvSpPr>
-        <p:spPr>
-          <a:xfrm>
-            <a:off x="914400" y="2194560"/>
-            <a:ext cx="3474720" cy="1280160"/>
-          </a:xfrm>
-          <a:prstGeom prst="rect">
-            <a:avLst/>
-          </a:prstGeom>
-          <a:noFill/>
-          <a:ln/>
-        </p:spPr>
-        <p:txBody>
-          <a:bodyPr wrap="square" lIns="0" tIns="0" rIns="0" bIns="0" rtlCol="0" anchor="t"/>
-          <a:lstStyle/>
-          <a:p>
-            <a:pPr indent="0" marL="0">
-              <a:buNone/>
-            </a:pPr>
-            <a:r>
-              <a:rPr lang="en-US" sz="8000" b="1" dirty="0">
-                <a:solidFill>
-                  <a:schemeClr val="accent4"/>
-                </a:solidFill>
-                <a:latin typeface="Cambria" pitchFamily="34" charset="0"/>
-                <a:ea typeface="Cambria" pitchFamily="34" charset="-122"/>
-                <a:cs typeface="Cambria" pitchFamily="34" charset="-120"/>
-              </a:rPr>
-              <a:t>0.922</a:t>
-            </a:r>
-            <a:endParaRPr lang="en-US" sz="8000" dirty="0"/>
-          </a:p>
-        </p:txBody>
-      </p:sp>
-      <p:sp>
-        <p:nvSpPr>
-          <p:cNvPr id="7" name="text-348"/>
-          <p:cNvSpPr txBox="1"/>
-          <p:nvPr/>
-        </p:nvSpPr>
-        <p:spPr>
-          <a:xfrm>
-            <a:off x="914400" y="3611880"/>
-            <a:ext cx="3474720" cy="731520"/>
-          </a:xfrm>
-          <a:prstGeom prst="rect">
-            <a:avLst/>
-          </a:prstGeom>
-          <a:noFill/>
-          <a:ln/>
-        </p:spPr>
-        <p:txBody>
-          <a:bodyPr wrap="square" lIns="0" tIns="0" rIns="0" bIns="0" rtlCol="0" anchor="t"/>
-          <a:lstStyle/>
-          <a:p>
-            <a:pPr indent="0" marL="0">
-              <a:buNone/>
-            </a:pPr>
-            <a:r>
-              <a:rPr lang="en-US" sz="1500" dirty="0">
-                <a:solidFill>
-                  <a:schemeClr val="tx2"/>
-                </a:solidFill>
-              </a:rPr>
-              <a:t>public leaderboard score, mean AUC over 12 findings</a:t>
-            </a:r>
-            <a:endParaRPr lang="en-US" sz="1500" dirty="0"/>
-          </a:p>
-        </p:txBody>
-      </p:sp>
-      <p:sp>
-        <p:nvSpPr>
-          <p:cNvPr id="8" name="text-349"/>
-          <p:cNvSpPr txBox="1"/>
-          <p:nvPr/>
-        </p:nvSpPr>
-        <p:spPr>
-          <a:xfrm>
-            <a:off x="914400" y="4617720"/>
-            <a:ext cx="3474720" cy="1005840"/>
-          </a:xfrm>
-          <a:prstGeom prst="rect">
-            <a:avLst/>
-          </a:prstGeom>
-          <a:noFill/>
-          <a:ln/>
-        </p:spPr>
-        <p:txBody>
-          <a:bodyPr wrap="square" lIns="0" tIns="0" rIns="0" bIns="0" rtlCol="0" anchor="t"/>
-          <a:lstStyle/>
-          <a:p>
-            <a:pPr indent="0" marL="0">
-              <a:buNone/>
-            </a:pPr>
-            <a:r>
-              <a:rPr lang="en-US" sz="1300" dirty="0">
-                <a:solidFill>
-                  <a:schemeClr val="accent5"/>
-                </a:solidFill>
-              </a:rPr>
-              <a:t>Scored by Kaggle on the hidden test set by re-running the full notebook.</a:t>
-            </a:r>
-            <a:endParaRPr lang="en-US" sz="1300" dirty="0"/>
-          </a:p>
-        </p:txBody>
-      </p:sp>
-      <p:graphicFrame>
-        <p:nvGraphicFramePr>
-          <p:cNvPr id="9" name="leaderboard-chart" descr=""/>
-          <p:cNvGraphicFramePr/>
-          <p:nvPr/>
-        </p:nvGraphicFramePr>
-        <p:xfrm>
-          <a:off x="4983480" y="1554480"/>
-          <a:ext cx="6656832" cy="3931920"/>
-        </p:xfrm>
-        <a:graphic xmlns:a="http://schemas.openxmlformats.org/drawingml/2006/main">
-          <a:graphicData uri="http://schemas.openxmlformats.org/drawingml/2006/chart">
-            <c:chart xmlns:c="http://schemas.openxmlformats.org/drawingml/2006/chart" r:id="rId1"/>
-          </a:graphicData>
-        </a:graphic>
-      </p:graphicFrame>
-      <p:sp>
-        <p:nvSpPr>
-          <p:cNvPr id="10" name="text-350"/>
-          <p:cNvSpPr txBox="1"/>
-          <p:nvPr/>
-        </p:nvSpPr>
-        <p:spPr>
-          <a:xfrm>
-            <a:off x="4983480" y="5577840"/>
-            <a:ext cx="6656832" cy="502920"/>
-          </a:xfrm>
-          <a:prstGeom prst="rect">
-            <a:avLst/>
-          </a:prstGeom>
-          <a:noFill/>
-          <a:ln/>
-        </p:spPr>
-        <p:txBody>
-          <a:bodyPr wrap="square" lIns="0" tIns="0" rIns="0" bIns="0" rtlCol="0" anchor="t"/>
-          <a:lstStyle/>
-          <a:p>
-            <a:pPr indent="0" marL="0">
-              <a:buNone/>
-            </a:pPr>
-            <a:r>
-              <a:rPr lang="en-US" sz="1100" dirty="0">
-                <a:solidFill>
-                  <a:schemeClr val="accent5"/>
-                </a:solidFill>
-              </a:rPr>
-              <a:t>Sources: our graded submission; parent score from the notebook; mid-Aug 2026 values from the Kaggle discussion forum (≈0.92 and ≈0.951), now out of date.</a:t>
-            </a:r>
-            <a:endParaRPr lang="en-US" sz="1100" dirty="0"/>
-          </a:p>
-        </p:txBody>
-      </p:sp>
-      <p:sp>
-        <p:nvSpPr>
-          <p:cNvPr id="25" name="Slide Number Placeholder 0"/>
-          <p:cNvSpPr>
-            <a:spLocks noGrp="1"/>
-          </p:cNvSpPr>
-          <p:nvPr>
-            <p:ph type="sldNum" sz="quarter" idx="4294967295"/>
-          </p:nvPr>
-        </p:nvSpPr>
-        <p:spPr>
-          <a:xfrm>
-            <a:off x="10972800" y="6419088"/>
-            <a:ext cx="667512" cy="274320"/>
-          </a:xfrm>
-          <a:prstGeom prst="rect">
-            <a:avLst/>
-          </a:prstGeom>
-          <a:extLst>
-            <a:ext uri="{C572A759-6A51-4108-AA02-DFA0A04FC94B}">
-              <ma14:wrappingTextBoxFlag xmlns:ma14="http://schemas.microsoft.com/office/mac/drawingml/2011/main" val="0"/>
-            </a:ext>
-          </a:extLst>
-        </p:spPr>
-        <p:txBody>
-          <a:bodyPr/>
-          <a:lstStyle>
-            <a:lvl1pPr>
-              <a:defRPr sz="1000">
-                <a:solidFill>
-                  <a:srgbClr val="5B6B7A"/>
-                </a:solidFill>
-              </a:defRPr>
-            </a:lvl1pPr>
-          </a:lstStyle>
-          <a:p>
-            <a:pPr algn="r"/>
-            <a:fld id="{F7021451-1387-4CA6-816F-3879F97B5CBC}" type="slidenum">
-              <a:rPr b="0" lang="en-US"/>
-              <a:t>18</a:t>
-            </a:fld>
-            <a:endParaRPr lang="en-US"/>
-          </a:p>
-        </p:txBody>
-      </p:sp>
-    </p:spTree>
-  </p:cSld>
-  <p:clrMapOvr>
-    <a:masterClrMapping/>
-  </p:clrMapOvr>
-</p:sld>
-</file>
-
-<file path=ppt/slides/slide19.xml><?xml version="1.0" encoding="utf-8"?>
-<p:sld xmlns:a="http://schemas.openxmlformats.org/drawingml/2006/main" xmlns:r="http://schemas.openxmlformats.org/officeDocument/2006/relationships" xmlns:p="http://schemas.openxmlformats.org/presentationml/2006/main">
-  <p:cSld name="Slide 19">
-    <p:spTree>
-      <p:nvGrpSpPr>
-        <p:cNvPr id="1" name=""/>
-        <p:cNvGrpSpPr/>
-        <p:nvPr/>
-      </p:nvGrpSpPr>
-      <p:grpSpPr>
-        <a:xfrm>
-          <a:off x="0" y="0"/>
-          <a:ext cx="0" cy="0"/>
-          <a:chOff x="0" y="0"/>
-          <a:chExt cx="0" cy="0"/>
-        </a:xfrm>
-      </p:grpSpPr>
-      <p:sp>
-        <p:nvSpPr>
-          <p:cNvPr id="2" name="Text 0"/>
-          <p:cNvSpPr/>
-          <p:nvPr>
-            <p:ph idx="100" type="body" hasCustomPrompt="1"/>
-          </p:nvPr>
-        </p:nvSpPr>
-        <p:spPr>
-          <a:xfrm>
-            <a:off x="548640" y="310896"/>
-            <a:ext cx="8229600" cy="274320"/>
-          </a:xfrm>
-          <a:prstGeom prst="rect">
-            <a:avLst/>
-          </a:prstGeom>
-          <a:noFill/>
-          <a:ln/>
-        </p:spPr>
-        <p:txBody>
-          <a:bodyPr wrap="square" lIns="0" tIns="0" rIns="0" bIns="0" rtlCol="0" anchor="t"/>
-          <a:lstStyle/>
-          <a:p>
-            <a:pPr algn="l" indent="0" marL="0">
-              <a:buNone/>
-            </a:pPr>
-            <a:r>
-              <a:rPr lang="en-US" sz="1200" b="1" spc="300" kern="0" dirty="0">
-                <a:solidFill>
-                  <a:schemeClr val="accent1"/>
-                </a:solidFill>
-              </a:rPr>
-              <a:t>RESULTS</a:t>
-            </a:r>
-            <a:endParaRPr lang="en-US" sz="1200" dirty="0"/>
-          </a:p>
-        </p:txBody>
-      </p:sp>
-      <p:sp>
-        <p:nvSpPr>
-          <p:cNvPr id="3" name="Text 0"/>
-          <p:cNvSpPr/>
-          <p:nvPr>
-            <p:ph idx="101" type="title" hasCustomPrompt="1"/>
-          </p:nvPr>
-        </p:nvSpPr>
-        <p:spPr>
-          <a:xfrm>
-            <a:off x="548640" y="566928"/>
-            <a:ext cx="11094415" cy="713232"/>
-          </a:xfrm>
-          <a:prstGeom prst="rect">
-            <a:avLst/>
-          </a:prstGeom>
-          <a:noFill/>
-          <a:ln/>
-        </p:spPr>
-        <p:txBody>
-          <a:bodyPr wrap="square" lIns="0" tIns="0" rIns="0" bIns="0" rtlCol="0" anchor="t"/>
-          <a:lstStyle/>
-          <a:p>
-            <a:pPr algn="l" indent="0" marL="0">
-              <a:buNone/>
-            </a:pPr>
-            <a:r>
-              <a:rPr lang="en-US" sz="3400" b="1" dirty="0">
-                <a:solidFill>
-                  <a:schemeClr val="tx1"/>
-                </a:solidFill>
-              </a:rPr>
-              <a:t>Reading the 0.922 honestly</a:t>
-            </a:r>
-            <a:endParaRPr lang="en-US" sz="3400" dirty="0"/>
-          </a:p>
-        </p:txBody>
-      </p:sp>
-      <p:sp>
-        <p:nvSpPr>
-          <p:cNvPr id="4" name="card-351"/>
-          <p:cNvSpPr/>
-          <p:nvPr/>
-        </p:nvSpPr>
-        <p:spPr>
-          <a:xfrm>
-            <a:off x="548640" y="1554480"/>
-            <a:ext cx="5943600" cy="1417320"/>
-          </a:xfrm>
-          <a:prstGeom prst="roundRect">
-            <a:avLst>
-              <a:gd name="adj" fmla="val 7742"/>
-            </a:avLst>
-          </a:prstGeom>
-          <a:solidFill>
-            <a:schemeClr val="bg2"/>
-          </a:solidFill>
-          <a:ln/>
-        </p:spPr>
-      </p:sp>
-      <p:sp>
-        <p:nvSpPr>
-          <p:cNvPr id="5" name="badge-352"/>
-          <p:cNvSpPr/>
-          <p:nvPr/>
-        </p:nvSpPr>
-        <p:spPr>
-          <a:xfrm>
-            <a:off x="822960" y="1920240"/>
-            <a:ext cx="640080" cy="640080"/>
-          </a:xfrm>
-          <a:prstGeom prst="ellipse">
-            <a:avLst/>
-          </a:prstGeom>
-          <a:solidFill>
-            <a:schemeClr val="accent3"/>
-          </a:solidFill>
-          <a:ln/>
-        </p:spPr>
-      </p:sp>
-      <p:pic>
-        <p:nvPicPr>
-          <p:cNvPr id="6" name="icon-353" descr="preencoded.png">    </p:cNvPr>
-          <p:cNvPicPr>
-            <a:picLocks noChangeAspect="1"/>
-          </p:cNvPicPr>
-          <p:nvPr/>
-        </p:nvPicPr>
-        <p:blipFill>
-          <a:blip r:embed="rId1"/>
-          <a:stretch>
-            <a:fillRect/>
-          </a:stretch>
-        </p:blipFill>
-        <p:spPr>
-          <a:xfrm>
-            <a:off x="989381" y="2086661"/>
-            <a:ext cx="307238" cy="307238"/>
-          </a:xfrm>
-          <a:prstGeom prst="rect">
-            <a:avLst/>
-          </a:prstGeom>
-        </p:spPr>
-      </p:pic>
-      <p:sp>
-        <p:nvSpPr>
-          <p:cNvPr id="7" name="text-354"/>
-          <p:cNvSpPr txBox="1"/>
-          <p:nvPr/>
-        </p:nvSpPr>
-        <p:spPr>
-          <a:xfrm>
-            <a:off x="1691640" y="1737360"/>
-            <a:ext cx="4572000" cy="320040"/>
-          </a:xfrm>
-          <a:prstGeom prst="rect">
-            <a:avLst/>
-          </a:prstGeom>
-          <a:noFill/>
-          <a:ln/>
-        </p:spPr>
-        <p:txBody>
-          <a:bodyPr wrap="square" lIns="0" tIns="0" rIns="0" bIns="0" rtlCol="0" anchor="t"/>
-          <a:lstStyle/>
-          <a:p>
-            <a:pPr indent="0" marL="0">
-              <a:buNone/>
-            </a:pPr>
-            <a:r>
-              <a:rPr lang="en-US" sz="1700" b="1" dirty="0">
-                <a:solidFill>
-                  <a:schemeClr val="tx1"/>
-                </a:solidFill>
-              </a:rPr>
-              <a:t>Below the parent</a:t>
-            </a:r>
-            <a:endParaRPr lang="en-US" sz="1700" dirty="0"/>
-          </a:p>
-        </p:txBody>
-      </p:sp>
-      <p:sp>
-        <p:nvSpPr>
-          <p:cNvPr id="8" name="text-355"/>
-          <p:cNvSpPr txBox="1"/>
-          <p:nvPr/>
-        </p:nvSpPr>
-        <p:spPr>
-          <a:xfrm>
-            <a:off x="1691640" y="2103120"/>
-            <a:ext cx="4572000" cy="822960"/>
-          </a:xfrm>
-          <a:prstGeom prst="rect">
-            <a:avLst/>
-          </a:prstGeom>
-          <a:noFill/>
-          <a:ln/>
-        </p:spPr>
-        <p:txBody>
-          <a:bodyPr wrap="square" lIns="0" tIns="0" rIns="0" bIns="0" rtlCol="0" anchor="t"/>
-          <a:lstStyle/>
-          <a:p>
-            <a:pPr indent="0" marL="0">
-              <a:buNone/>
-            </a:pPr>
-            <a:r>
-              <a:rPr lang="en-US" sz="1300" dirty="0">
-                <a:solidFill>
-                  <a:schemeClr val="tx2"/>
-                </a:solidFill>
-              </a:rPr>
-              <a:t>0.922 is 0.018 under the parent recipe's public 0.940, so the three ABG additions did not help on the public leaderboard.</a:t>
-            </a:r>
-            <a:endParaRPr lang="en-US" sz="1300" dirty="0"/>
-          </a:p>
-        </p:txBody>
-      </p:sp>
-      <p:sp>
-        <p:nvSpPr>
-          <p:cNvPr id="9" name="card-356"/>
-          <p:cNvSpPr/>
-          <p:nvPr/>
-        </p:nvSpPr>
-        <p:spPr>
-          <a:xfrm>
-            <a:off x="548640" y="3108960"/>
-            <a:ext cx="5943600" cy="1417320"/>
-          </a:xfrm>
-          <a:prstGeom prst="roundRect">
-            <a:avLst>
-              <a:gd name="adj" fmla="val 7742"/>
-            </a:avLst>
-          </a:prstGeom>
-          <a:solidFill>
-            <a:schemeClr val="bg2"/>
-          </a:solidFill>
-          <a:ln/>
-        </p:spPr>
-      </p:sp>
-      <p:sp>
-        <p:nvSpPr>
-          <p:cNvPr id="10" name="badge-357"/>
-          <p:cNvSpPr/>
-          <p:nvPr/>
-        </p:nvSpPr>
-        <p:spPr>
-          <a:xfrm>
-            <a:off x="822960" y="3474720"/>
-            <a:ext cx="640080" cy="640080"/>
-          </a:xfrm>
-          <a:prstGeom prst="ellipse">
-            <a:avLst/>
-          </a:prstGeom>
-          <a:solidFill>
-            <a:schemeClr val="accent4"/>
-          </a:solidFill>
-          <a:ln/>
-        </p:spPr>
-      </p:sp>
-      <p:pic>
-        <p:nvPicPr>
-          <p:cNvPr id="11" name="icon-358" descr="preencoded.png">    </p:cNvPr>
-          <p:cNvPicPr>
-            <a:picLocks noChangeAspect="1"/>
-          </p:cNvPicPr>
-          <p:nvPr/>
-        </p:nvPicPr>
-        <p:blipFill>
-          <a:blip r:embed="rId2"/>
-          <a:stretch>
-            <a:fillRect/>
-          </a:stretch>
-        </p:blipFill>
-        <p:spPr>
-          <a:xfrm>
-            <a:off x="989381" y="3641141"/>
-            <a:ext cx="307238" cy="307238"/>
-          </a:xfrm>
-          <a:prstGeom prst="rect">
-            <a:avLst/>
-          </a:prstGeom>
-        </p:spPr>
-      </p:pic>
-      <p:sp>
-        <p:nvSpPr>
-          <p:cNvPr id="12" name="text-359"/>
-          <p:cNvSpPr txBox="1"/>
-          <p:nvPr/>
-        </p:nvSpPr>
-        <p:spPr>
-          <a:xfrm>
-            <a:off x="1691640" y="3291840"/>
-            <a:ext cx="4572000" cy="320040"/>
-          </a:xfrm>
-          <a:prstGeom prst="rect">
-            <a:avLst/>
-          </a:prstGeom>
-          <a:noFill/>
-          <a:ln/>
-        </p:spPr>
-        <p:txBody>
-          <a:bodyPr wrap="square" lIns="0" tIns="0" rIns="0" bIns="0" rtlCol="0" anchor="t"/>
-          <a:lstStyle/>
-          <a:p>
-            <a:pPr indent="0" marL="0">
-              <a:buNone/>
-            </a:pPr>
-            <a:r>
-              <a:rPr lang="en-US" sz="1700" b="1" dirty="0">
-                <a:solidFill>
-                  <a:schemeClr val="tx1"/>
-                </a:solidFill>
-              </a:rPr>
-              <a:t>Cause not isolated</a:t>
-            </a:r>
-            <a:endParaRPr lang="en-US" sz="1700" dirty="0"/>
-          </a:p>
-        </p:txBody>
-      </p:sp>
-      <p:sp>
-        <p:nvSpPr>
-          <p:cNvPr id="13" name="text-360"/>
-          <p:cNvSpPr txBox="1"/>
-          <p:nvPr/>
-        </p:nvSpPr>
-        <p:spPr>
-          <a:xfrm>
-            <a:off x="1691640" y="3657600"/>
-            <a:ext cx="4572000" cy="822960"/>
-          </a:xfrm>
-          <a:prstGeom prst="rect">
-            <a:avLst/>
-          </a:prstGeom>
-          <a:noFill/>
-          <a:ln/>
-        </p:spPr>
-        <p:txBody>
-          <a:bodyPr wrap="square" lIns="0" tIns="0" rIns="0" bIns="0" rtlCol="0" anchor="t"/>
-          <a:lstStyle/>
-          <a:p>
-            <a:pPr indent="0" marL="0">
-              <a:buNone/>
-            </a:pPr>
-            <a:r>
-              <a:rPr lang="en-US" sz="1300" dirty="0">
-                <a:solidFill>
-                  <a:schemeClr val="tx2"/>
-                </a:solidFill>
-              </a:rPr>
-              <a:t>A, B and G were graded only together. Runs A, B, G and AB are needed to see which addition, if any, caused the drop.</a:t>
-            </a:r>
-            <a:endParaRPr lang="en-US" sz="1300" dirty="0"/>
-          </a:p>
-        </p:txBody>
-      </p:sp>
-      <p:sp>
-        <p:nvSpPr>
-          <p:cNvPr id="14" name="card-361"/>
-          <p:cNvSpPr/>
-          <p:nvPr/>
-        </p:nvSpPr>
-        <p:spPr>
-          <a:xfrm>
-            <a:off x="548640" y="4663440"/>
-            <a:ext cx="5943600" cy="1417320"/>
-          </a:xfrm>
-          <a:prstGeom prst="roundRect">
-            <a:avLst>
-              <a:gd name="adj" fmla="val 7742"/>
-            </a:avLst>
-          </a:prstGeom>
-          <a:solidFill>
-            <a:schemeClr val="bg2"/>
-          </a:solidFill>
-          <a:ln/>
-        </p:spPr>
-      </p:sp>
-      <p:sp>
-        <p:nvSpPr>
-          <p:cNvPr id="15" name="badge-362"/>
-          <p:cNvSpPr/>
-          <p:nvPr/>
-        </p:nvSpPr>
-        <p:spPr>
-          <a:xfrm>
-            <a:off x="822960" y="5029200"/>
-            <a:ext cx="640080" cy="640080"/>
-          </a:xfrm>
-          <a:prstGeom prst="ellipse">
-            <a:avLst/>
-          </a:prstGeom>
-          <a:solidFill>
-            <a:schemeClr val="accent1"/>
-          </a:solidFill>
-          <a:ln/>
-        </p:spPr>
-      </p:sp>
-      <p:pic>
-        <p:nvPicPr>
-          <p:cNvPr id="16" name="icon-363" descr="preencoded.png">    </p:cNvPr>
-          <p:cNvPicPr>
-            <a:picLocks noChangeAspect="1"/>
-          </p:cNvPicPr>
-          <p:nvPr/>
-        </p:nvPicPr>
-        <p:blipFill>
-          <a:blip r:embed="rId3"/>
-          <a:stretch>
-            <a:fillRect/>
-          </a:stretch>
-        </p:blipFill>
-        <p:spPr>
-          <a:xfrm>
-            <a:off x="989381" y="5195621"/>
-            <a:ext cx="307238" cy="307238"/>
-          </a:xfrm>
-          <a:prstGeom prst="rect">
-            <a:avLst/>
-          </a:prstGeom>
-        </p:spPr>
-      </p:pic>
-      <p:sp>
-        <p:nvSpPr>
-          <p:cNvPr id="17" name="text-364"/>
-          <p:cNvSpPr txBox="1"/>
-          <p:nvPr/>
-        </p:nvSpPr>
-        <p:spPr>
-          <a:xfrm>
-            <a:off x="1691640" y="4846320"/>
-            <a:ext cx="4572000" cy="320040"/>
-          </a:xfrm>
-          <a:prstGeom prst="rect">
-            <a:avLst/>
-          </a:prstGeom>
-          <a:noFill/>
-          <a:ln/>
-        </p:spPr>
-        <p:txBody>
-          <a:bodyPr wrap="square" lIns="0" tIns="0" rIns="0" bIns="0" rtlCol="0" anchor="t"/>
-          <a:lstStyle/>
-          <a:p>
-            <a:pPr indent="0" marL="0">
-              <a:buNone/>
-            </a:pPr>
-            <a:r>
-              <a:rPr lang="en-US" sz="1700" b="1" dirty="0">
-                <a:solidFill>
-                  <a:schemeClr val="tx1"/>
-                </a:solidFill>
-              </a:rPr>
-              <a:t>No tuning to the result</a:t>
-            </a:r>
-            <a:endParaRPr lang="en-US" sz="1700" dirty="0"/>
-          </a:p>
-        </p:txBody>
-      </p:sp>
-      <p:sp>
-        <p:nvSpPr>
-          <p:cNvPr id="18" name="text-365"/>
-          <p:cNvSpPr txBox="1"/>
-          <p:nvPr/>
-        </p:nvSpPr>
-        <p:spPr>
-          <a:xfrm>
-            <a:off x="1691640" y="5212080"/>
-            <a:ext cx="4572000" cy="822960"/>
-          </a:xfrm>
-          <a:prstGeom prst="rect">
-            <a:avLst/>
-          </a:prstGeom>
-          <a:noFill/>
-          <a:ln/>
-        </p:spPr>
-        <p:txBody>
-          <a:bodyPr wrap="square" lIns="0" tIns="0" rIns="0" bIns="0" rtlCol="0" anchor="t"/>
-          <a:lstStyle/>
-          <a:p>
-            <a:pPr indent="0" marL="0">
-              <a:buNone/>
-            </a:pPr>
-            <a:r>
-              <a:rPr lang="en-US" sz="1300" dirty="0">
-                <a:solidFill>
-                  <a:schemeClr val="tx2"/>
-                </a:solidFill>
-              </a:rPr>
-              <a:t>Residual scales are inherited, not fitted, and the batch was fixed in advance, so we report the outcome as it came.</a:t>
-            </a:r>
-            <a:endParaRPr lang="en-US" sz="1300" dirty="0"/>
-          </a:p>
-        </p:txBody>
-      </p:sp>
-      <p:graphicFrame>
-        <p:nvGraphicFramePr>
-          <p:cNvPr id="19" name="sensitivity-chart" descr=""/>
-          <p:cNvGraphicFramePr/>
-          <p:nvPr/>
-        </p:nvGraphicFramePr>
-        <p:xfrm>
-          <a:off x="6675120" y="1554480"/>
-          <a:ext cx="4965192" cy="3840480"/>
-        </p:xfrm>
-        <a:graphic xmlns:a="http://schemas.openxmlformats.org/drawingml/2006/main">
-          <a:graphicData uri="http://schemas.openxmlformats.org/drawingml/2006/chart">
-            <c:chart xmlns:c="http://schemas.openxmlformats.org/drawingml/2006/chart" r:id="rId4"/>
-          </a:graphicData>
-        </a:graphic>
-      </p:graphicFrame>
-      <p:sp>
-        <p:nvSpPr>
-          <p:cNvPr id="20" name="text-366"/>
-          <p:cNvSpPr txBox="1"/>
-          <p:nvPr/>
-        </p:nvSpPr>
-        <p:spPr>
-          <a:xfrm>
-            <a:off x="6675120" y="5486400"/>
-            <a:ext cx="4965192" cy="548640"/>
-          </a:xfrm>
-          <a:prstGeom prst="rect">
-            <a:avLst/>
-          </a:prstGeom>
-          <a:noFill/>
-          <a:ln/>
-        </p:spPr>
-        <p:txBody>
-          <a:bodyPr wrap="square" lIns="0" tIns="0" rIns="0" bIns="0" rtlCol="0" anchor="t"/>
-          <a:lstStyle/>
-          <a:p>
-            <a:pPr indent="0" marL="0">
-              <a:buNone/>
-            </a:pPr>
-            <a:r>
-              <a:rPr lang="en-US" sz="1200" dirty="0">
-                <a:solidFill>
-                  <a:schemeClr val="accent5"/>
-                </a:solidFill>
-              </a:rPr>
-              <a:t>Macro AUC is a mean of 12, so each target counts 1/12: +0.001 overall needs +0.012 summed over targets.</a:t>
-            </a:r>
-            <a:endParaRPr lang="en-US" sz="1200" dirty="0"/>
           </a:p>
         </p:txBody>
       </p:sp>
@@ -17040,7 +18279,7 @@
                   <a:schemeClr val="accent5"/>
                 </a:solidFill>
               </a:rPr>
-              <a:t>ABG layer, ablation batch, retired ideas</a:t>
+              <a:t>ABG layer, simulation study, ablation batch, retired ideas</a:t>
             </a:r>
             <a:endParaRPr lang="en-US" sz="1400" dirty="0"/>
           </a:p>
@@ -17424,7 +18663,7 @@
                   <a:schemeClr val="accent1"/>
                 </a:solidFill>
               </a:rPr>
-              <a:t>CONCLUSION</a:t>
+              <a:t>RESULTS</a:t>
             </a:r>
             <a:endParaRPr lang="en-US" sz="1200" dirty="0"/>
           </a:p>
@@ -17462,7 +18701,7 @@
                   <a:schemeClr val="tx1"/>
                 </a:solidFill>
               </a:rPr>
-              <a:t>Limitations and responsible use</a:t>
+              <a:t>Leaderboard results</a:t>
             </a:r>
             <a:endParaRPr lang="en-US" sz="3400" dirty="0"/>
           </a:p>
@@ -17470,18 +18709,18 @@
       </p:sp>
       <p:sp>
         <p:nvSpPr>
-          <p:cNvPr id="4" name="card-367"/>
+          <p:cNvPr id="4" name="card-351"/>
           <p:cNvSpPr/>
           <p:nvPr/>
         </p:nvSpPr>
         <p:spPr>
           <a:xfrm>
             <a:off x="548640" y="1554480"/>
-            <a:ext cx="5458968" cy="2103120"/>
+            <a:ext cx="4206240" cy="4526280"/>
           </a:xfrm>
           <a:prstGeom prst="roundRect">
             <a:avLst>
-              <a:gd name="adj" fmla="val 5217"/>
+              <a:gd name="adj" fmla="val 2609"/>
             </a:avLst>
           </a:prstGeom>
           <a:solidFill>
@@ -17492,58 +18731,14 @@
       </p:sp>
       <p:sp>
         <p:nvSpPr>
-          <p:cNvPr id="5" name="badge-368"/>
-          <p:cNvSpPr/>
-          <p:nvPr/>
-        </p:nvSpPr>
-        <p:spPr>
-          <a:xfrm>
-            <a:off x="822960" y="1828800"/>
-            <a:ext cx="640080" cy="640080"/>
-          </a:xfrm>
-          <a:prstGeom prst="ellipse">
-            <a:avLst/>
-          </a:prstGeom>
-          <a:solidFill>
-            <a:schemeClr val="accent5"/>
-          </a:solidFill>
-          <a:ln/>
-        </p:spPr>
-      </p:sp>
-      <p:pic>
-        <p:nvPicPr>
-          <p:cNvPr id="6" name="icon-369" descr="preencoded.png">    </p:cNvPr>
-          <p:cNvPicPr>
-            <a:picLocks noChangeAspect="1"/>
-          </p:cNvPicPr>
-          <p:nvPr/>
-        </p:nvPicPr>
-        <p:blipFill>
-          <a:blip r:embed="rId1"/>
-          <a:stretch>
-            <a:fillRect/>
-          </a:stretch>
-        </p:blipFill>
-        <p:spPr>
-          <a:xfrm>
-            <a:off x="989381" y="1995221"/>
-            <a:ext cx="307238" cy="307238"/>
-          </a:xfrm>
-          <a:prstGeom prst="rect">
-            <a:avLst/>
-          </a:prstGeom>
-        </p:spPr>
-      </p:pic>
-      <p:sp>
-        <p:nvSpPr>
-          <p:cNvPr id="7" name="text-370"/>
+          <p:cNvPr id="5" name="text-352"/>
           <p:cNvSpPr txBox="1"/>
           <p:nvPr/>
         </p:nvSpPr>
         <p:spPr>
           <a:xfrm>
-            <a:off x="1691640" y="1874520"/>
-            <a:ext cx="4114800" cy="365760"/>
+            <a:off x="914400" y="1783080"/>
+            <a:ext cx="3474720" cy="256032"/>
           </a:xfrm>
           <a:prstGeom prst="rect">
             <a:avLst/>
@@ -17559,27 +18754,27 @@
               <a:buNone/>
             </a:pPr>
             <a:r>
-              <a:rPr lang="en-US" sz="1800" b="1" dirty="0">
-                <a:solidFill>
-                  <a:schemeClr val="tx1"/>
-                </a:solidFill>
-              </a:rPr>
-              <a:t>No new training or validation</a:t>
-            </a:r>
-            <a:endParaRPr lang="en-US" sz="1800" dirty="0"/>
-          </a:p>
-        </p:txBody>
-      </p:sp>
-      <p:sp>
-        <p:nvSpPr>
-          <p:cNvPr id="8" name="text-371"/>
+              <a:rPr lang="en-US" sz="1100" b="1" spc="200" kern="0" dirty="0">
+                <a:solidFill>
+                  <a:schemeClr val="accent5"/>
+                </a:solidFill>
+              </a:rPr>
+              <a:t>OUR TWO GRADED SUBMISSIONS</a:t>
+            </a:r>
+            <a:endParaRPr lang="en-US" sz="1100" dirty="0"/>
+          </a:p>
+        </p:txBody>
+      </p:sp>
+      <p:sp>
+        <p:nvSpPr>
+          <p:cNvPr id="6" name="text-353"/>
           <p:cNvSpPr txBox="1"/>
           <p:nvPr/>
         </p:nvSpPr>
         <p:spPr>
           <a:xfrm>
-            <a:off x="822960" y="2651760"/>
-            <a:ext cx="4937760" cy="914400"/>
+            <a:off x="914400" y="2148840"/>
+            <a:ext cx="3474720" cy="1005840"/>
           </a:xfrm>
           <a:prstGeom prst="rect">
             <a:avLst/>
@@ -17595,12 +18790,51 @@
               <a:buNone/>
             </a:pPr>
             <a:r>
+              <a:rPr lang="en-US" sz="6400" b="1" dirty="0">
+                <a:solidFill>
+                  <a:schemeClr val="accent1"/>
+                </a:solidFill>
+                <a:latin typeface="Cambria" pitchFamily="34" charset="0"/>
+                <a:ea typeface="Cambria" pitchFamily="34" charset="-122"/>
+                <a:cs typeface="Cambria" pitchFamily="34" charset="-120"/>
+              </a:rPr>
+              <a:t>0.940</a:t>
+            </a:r>
+            <a:endParaRPr lang="en-US" sz="6400" dirty="0"/>
+          </a:p>
+        </p:txBody>
+      </p:sp>
+      <p:sp>
+        <p:nvSpPr>
+          <p:cNvPr id="7" name="text-354"/>
+          <p:cNvSpPr txBox="1"/>
+          <p:nvPr/>
+        </p:nvSpPr>
+        <p:spPr>
+          <a:xfrm>
+            <a:off x="914400" y="3154680"/>
+            <a:ext cx="3474720" cy="365760"/>
+          </a:xfrm>
+          <a:prstGeom prst="rect">
+            <a:avLst/>
+          </a:prstGeom>
+          <a:noFill/>
+          <a:ln/>
+        </p:spPr>
+        <p:txBody>
+          <a:bodyPr wrap="square" lIns="0" tIns="0" rIns="0" bIns="0" rtlCol="0" anchor="t"/>
+          <a:lstStyle/>
+          <a:p>
+            <a:pPr indent="0" marL="0">
+              <a:buNone/>
+            </a:pPr>
+            <a:r>
               <a:rPr lang="en-US" sz="1500" dirty="0">
                 <a:solidFill>
                   <a:schemeClr val="tx2"/>
                 </a:solidFill>
               </a:rPr>
-              <a:t>Base models are public releases; no new held-out validation was run, and no AUC gain was claimed beforehand.</a:t>
+              <a:t>submission 1: parent recipe (V17)</a:t>
             </a:r>
             <a:endParaRPr lang="en-US" sz="1500" dirty="0"/>
           </a:p>
@@ -17608,80 +18842,14 @@
       </p:sp>
       <p:sp>
         <p:nvSpPr>
-          <p:cNvPr id="9" name="card-372"/>
-          <p:cNvSpPr/>
-          <p:nvPr/>
-        </p:nvSpPr>
-        <p:spPr>
-          <a:xfrm>
-            <a:off x="6190488" y="1554480"/>
-            <a:ext cx="5458968" cy="2103120"/>
-          </a:xfrm>
-          <a:prstGeom prst="roundRect">
-            <a:avLst>
-              <a:gd name="adj" fmla="val 5217"/>
-            </a:avLst>
-          </a:prstGeom>
-          <a:solidFill>
-            <a:schemeClr val="bg2"/>
-          </a:solidFill>
-          <a:ln/>
-        </p:spPr>
-      </p:sp>
-      <p:sp>
-        <p:nvSpPr>
-          <p:cNvPr id="10" name="badge-373"/>
-          <p:cNvSpPr/>
-          <p:nvPr/>
-        </p:nvSpPr>
-        <p:spPr>
-          <a:xfrm>
-            <a:off x="6464808" y="1828800"/>
-            <a:ext cx="640080" cy="640080"/>
-          </a:xfrm>
-          <a:prstGeom prst="ellipse">
-            <a:avLst/>
-          </a:prstGeom>
-          <a:solidFill>
-            <a:schemeClr val="accent5"/>
-          </a:solidFill>
-          <a:ln/>
-        </p:spPr>
-      </p:sp>
-      <p:pic>
-        <p:nvPicPr>
-          <p:cNvPr id="11" name="icon-374" descr="preencoded.png">    </p:cNvPr>
-          <p:cNvPicPr>
-            <a:picLocks noChangeAspect="1"/>
-          </p:cNvPicPr>
-          <p:nvPr/>
-        </p:nvPicPr>
-        <p:blipFill>
-          <a:blip r:embed="rId2"/>
-          <a:stretch>
-            <a:fillRect/>
-          </a:stretch>
-        </p:blipFill>
-        <p:spPr>
-          <a:xfrm>
-            <a:off x="6631229" y="1995221"/>
-            <a:ext cx="307238" cy="307238"/>
-          </a:xfrm>
-          <a:prstGeom prst="rect">
-            <a:avLst/>
-          </a:prstGeom>
-        </p:spPr>
-      </p:pic>
-      <p:sp>
-        <p:nvSpPr>
-          <p:cNvPr id="12" name="text-375"/>
+          <p:cNvPr id="8" name="text-355"/>
           <p:cNvSpPr txBox="1"/>
           <p:nvPr/>
         </p:nvSpPr>
         <p:spPr>
           <a:xfrm>
-            <a:off x="7333488" y="1874520"/>
-            <a:ext cx="4114800" cy="365760"/>
+            <a:off x="914400" y="3749040"/>
+            <a:ext cx="3474720" cy="1005840"/>
           </a:xfrm>
           <a:prstGeom prst="rect">
             <a:avLst/>
@@ -17697,27 +18865,30 @@
               <a:buNone/>
             </a:pPr>
             <a:r>
-              <a:rPr lang="en-US" sz="1800" b="1" dirty="0">
-                <a:solidFill>
-                  <a:schemeClr val="tx1"/>
-                </a:solidFill>
-              </a:rPr>
-              <a:t>Not clinical evidence</a:t>
-            </a:r>
-            <a:endParaRPr lang="en-US" sz="1800" dirty="0"/>
-          </a:p>
-        </p:txBody>
-      </p:sp>
-      <p:sp>
-        <p:nvSpPr>
-          <p:cNvPr id="13" name="text-376"/>
+              <a:rPr lang="en-US" sz="6400" b="1" dirty="0">
+                <a:solidFill>
+                  <a:schemeClr val="accent4"/>
+                </a:solidFill>
+                <a:latin typeface="Cambria" pitchFamily="34" charset="0"/>
+                <a:ea typeface="Cambria" pitchFamily="34" charset="-122"/>
+                <a:cs typeface="Cambria" pitchFamily="34" charset="-120"/>
+              </a:rPr>
+              <a:t>0.922</a:t>
+            </a:r>
+            <a:endParaRPr lang="en-US" sz="6400" dirty="0"/>
+          </a:p>
+        </p:txBody>
+      </p:sp>
+      <p:sp>
+        <p:nvSpPr>
+          <p:cNvPr id="9" name="text-356"/>
           <p:cNvSpPr txBox="1"/>
           <p:nvPr/>
         </p:nvSpPr>
         <p:spPr>
           <a:xfrm>
-            <a:off x="6464808" y="2651760"/>
-            <a:ext cx="4937760" cy="914400"/>
+            <a:off x="914400" y="4754880"/>
+            <a:ext cx="3474720" cy="365760"/>
           </a:xfrm>
           <a:prstGeom prst="rect">
             <a:avLst/>
@@ -17738,7 +18909,7 @@
                   <a:schemeClr val="tx2"/>
                 </a:solidFill>
               </a:rPr>
-              <a:t>A leaderboard score does not establish performance on other scanners, sites or patients.</a:t>
+              <a:t>submission 2: ABG</a:t>
             </a:r>
             <a:endParaRPr lang="en-US" sz="1500" dirty="0"/>
           </a:p>
@@ -17746,80 +18917,14 @@
       </p:sp>
       <p:sp>
         <p:nvSpPr>
-          <p:cNvPr id="14" name="card-377"/>
-          <p:cNvSpPr/>
-          <p:nvPr/>
-        </p:nvSpPr>
-        <p:spPr>
-          <a:xfrm>
-            <a:off x="548640" y="3840480"/>
-            <a:ext cx="5458968" cy="2103120"/>
-          </a:xfrm>
-          <a:prstGeom prst="roundRect">
-            <a:avLst>
-              <a:gd name="adj" fmla="val 5217"/>
-            </a:avLst>
-          </a:prstGeom>
-          <a:solidFill>
-            <a:schemeClr val="bg2"/>
-          </a:solidFill>
-          <a:ln/>
-        </p:spPr>
-      </p:sp>
-      <p:sp>
-        <p:nvSpPr>
-          <p:cNvPr id="15" name="badge-378"/>
-          <p:cNvSpPr/>
-          <p:nvPr/>
-        </p:nvSpPr>
-        <p:spPr>
-          <a:xfrm>
-            <a:off x="822960" y="4114800"/>
-            <a:ext cx="640080" cy="640080"/>
-          </a:xfrm>
-          <a:prstGeom prst="ellipse">
-            <a:avLst/>
-          </a:prstGeom>
-          <a:solidFill>
-            <a:schemeClr val="accent5"/>
-          </a:solidFill>
-          <a:ln/>
-        </p:spPr>
-      </p:sp>
-      <p:pic>
-        <p:nvPicPr>
-          <p:cNvPr id="16" name="icon-379" descr="preencoded.png">    </p:cNvPr>
-          <p:cNvPicPr>
-            <a:picLocks noChangeAspect="1"/>
-          </p:cNvPicPr>
-          <p:nvPr/>
-        </p:nvPicPr>
-        <p:blipFill>
-          <a:blip r:embed="rId3"/>
-          <a:stretch>
-            <a:fillRect/>
-          </a:stretch>
-        </p:blipFill>
-        <p:spPr>
-          <a:xfrm>
-            <a:off x="989381" y="4281221"/>
-            <a:ext cx="307238" cy="307238"/>
-          </a:xfrm>
-          <a:prstGeom prst="rect">
-            <a:avLst/>
-          </a:prstGeom>
-        </p:spPr>
-      </p:pic>
-      <p:sp>
-        <p:nvSpPr>
-          <p:cNvPr id="17" name="text-380"/>
+          <p:cNvPr id="10" name="text-357"/>
           <p:cNvSpPr txBox="1"/>
           <p:nvPr/>
         </p:nvSpPr>
         <p:spPr>
           <a:xfrm>
-            <a:off x="1691640" y="4160520"/>
-            <a:ext cx="4114800" cy="365760"/>
+            <a:off x="914400" y="5257800"/>
+            <a:ext cx="3474720" cy="731520"/>
           </a:xfrm>
           <a:prstGeom prst="rect">
             <a:avLst/>
@@ -17835,27 +18940,43 @@
               <a:buNone/>
             </a:pPr>
             <a:r>
-              <a:rPr lang="en-US" sz="1800" b="1" dirty="0">
-                <a:solidFill>
-                  <a:schemeClr val="tx1"/>
-                </a:solidFill>
-              </a:rPr>
-              <a:t>Licences differ per component</a:t>
-            </a:r>
-            <a:endParaRPr lang="en-US" sz="1800" dirty="0"/>
-          </a:p>
-        </p:txBody>
-      </p:sp>
-      <p:sp>
-        <p:nvSpPr>
-          <p:cNvPr id="18" name="text-381"/>
+              <a:rPr lang="en-US" sz="1200" dirty="0">
+                <a:solidFill>
+                  <a:schemeClr val="accent5"/>
+                </a:solidFill>
+              </a:rPr>
+              <a:t>Public leaderboard, mean AUC over 12 findings; Kaggle re-runs the full notebook on the hidden test set.</a:t>
+            </a:r>
+            <a:endParaRPr lang="en-US" sz="1200" dirty="0"/>
+          </a:p>
+        </p:txBody>
+      </p:sp>
+      <p:graphicFrame>
+        <p:nvGraphicFramePr>
+          <p:cNvPr id="11" name="leaderboard-chart" descr=""/>
+          <p:cNvGraphicFramePr/>
+          <p:nvPr/>
+        </p:nvGraphicFramePr>
+        <p:xfrm>
+          <a:off x="4983480" y="1554480"/>
+          <a:ext cx="6656832" cy="3931920"/>
+        </p:xfrm>
+        <a:graphic xmlns:a="http://schemas.openxmlformats.org/drawingml/2006/main">
+          <a:graphicData uri="http://schemas.openxmlformats.org/drawingml/2006/chart">
+            <c:chart xmlns:c="http://schemas.openxmlformats.org/drawingml/2006/chart" r:id="rId1"/>
+          </a:graphicData>
+        </a:graphic>
+      </p:graphicFrame>
+      <p:sp>
+        <p:nvSpPr>
+          <p:cNvPr id="12" name="text-358"/>
           <p:cNvSpPr txBox="1"/>
           <p:nvPr/>
         </p:nvSpPr>
         <p:spPr>
           <a:xfrm>
-            <a:off x="822960" y="4937760"/>
-            <a:ext cx="4937760" cy="914400"/>
+            <a:off x="4983480" y="5577840"/>
+            <a:ext cx="6656832" cy="502920"/>
           </a:xfrm>
           <a:prstGeom prst="rect">
             <a:avLst/>
@@ -17871,152 +18992,14 @@
               <a:buNone/>
             </a:pPr>
             <a:r>
-              <a:rPr lang="en-US" sz="1500" dirty="0">
-                <a:solidFill>
-                  <a:schemeClr val="tx2"/>
-                </a:solidFill>
-              </a:rPr>
-              <a:t>RadImageNet-based heads are CC-BY-NC-SA 4.0, DINOv3 has its own licence, and several datasets are CC0.</a:t>
-            </a:r>
-            <a:endParaRPr lang="en-US" sz="1500" dirty="0"/>
-          </a:p>
-        </p:txBody>
-      </p:sp>
-      <p:sp>
-        <p:nvSpPr>
-          <p:cNvPr id="19" name="card-382"/>
-          <p:cNvSpPr/>
-          <p:nvPr/>
-        </p:nvSpPr>
-        <p:spPr>
-          <a:xfrm>
-            <a:off x="6190488" y="3840480"/>
-            <a:ext cx="5458968" cy="2103120"/>
-          </a:xfrm>
-          <a:prstGeom prst="roundRect">
-            <a:avLst>
-              <a:gd name="adj" fmla="val 5217"/>
-            </a:avLst>
-          </a:prstGeom>
-          <a:solidFill>
-            <a:schemeClr val="bg2"/>
-          </a:solidFill>
-          <a:ln/>
-        </p:spPr>
-      </p:sp>
-      <p:sp>
-        <p:nvSpPr>
-          <p:cNvPr id="20" name="badge-383"/>
-          <p:cNvSpPr/>
-          <p:nvPr/>
-        </p:nvSpPr>
-        <p:spPr>
-          <a:xfrm>
-            <a:off x="6464808" y="4114800"/>
-            <a:ext cx="640080" cy="640080"/>
-          </a:xfrm>
-          <a:prstGeom prst="ellipse">
-            <a:avLst/>
-          </a:prstGeom>
-          <a:solidFill>
-            <a:schemeClr val="accent5"/>
-          </a:solidFill>
-          <a:ln/>
-        </p:spPr>
-      </p:sp>
-      <p:pic>
-        <p:nvPicPr>
-          <p:cNvPr id="21" name="icon-384" descr="preencoded.png">    </p:cNvPr>
-          <p:cNvPicPr>
-            <a:picLocks noChangeAspect="1"/>
-          </p:cNvPicPr>
-          <p:nvPr/>
-        </p:nvPicPr>
-        <p:blipFill>
-          <a:blip r:embed="rId4"/>
-          <a:stretch>
-            <a:fillRect/>
-          </a:stretch>
-        </p:blipFill>
-        <p:spPr>
-          <a:xfrm>
-            <a:off x="6631229" y="4281221"/>
-            <a:ext cx="307238" cy="307238"/>
-          </a:xfrm>
-          <a:prstGeom prst="rect">
-            <a:avLst/>
-          </a:prstGeom>
-        </p:spPr>
-      </p:pic>
-      <p:sp>
-        <p:nvSpPr>
-          <p:cNvPr id="22" name="text-385"/>
-          <p:cNvSpPr txBox="1"/>
-          <p:nvPr/>
-        </p:nvSpPr>
-        <p:spPr>
-          <a:xfrm>
-            <a:off x="7333488" y="4160520"/>
-            <a:ext cx="4114800" cy="365760"/>
-          </a:xfrm>
-          <a:prstGeom prst="rect">
-            <a:avLst/>
-          </a:prstGeom>
-          <a:noFill/>
-          <a:ln/>
-        </p:spPr>
-        <p:txBody>
-          <a:bodyPr wrap="square" lIns="0" tIns="0" rIns="0" bIns="0" rtlCol="0" anchor="t"/>
-          <a:lstStyle/>
-          <a:p>
-            <a:pPr indent="0" marL="0">
-              <a:buNone/>
-            </a:pPr>
-            <a:r>
-              <a:rPr lang="en-US" sz="1800" b="1" dirty="0">
-                <a:solidFill>
-                  <a:schemeClr val="tx1"/>
-                </a:solidFill>
-              </a:rPr>
-              <a:t>A ranking score, not a probability</a:t>
-            </a:r>
-            <a:endParaRPr lang="en-US" sz="1800" dirty="0"/>
-          </a:p>
-        </p:txBody>
-      </p:sp>
-      <p:sp>
-        <p:nvSpPr>
-          <p:cNvPr id="23" name="text-386"/>
-          <p:cNvSpPr txBox="1"/>
-          <p:nvPr/>
-        </p:nvSpPr>
-        <p:spPr>
-          <a:xfrm>
-            <a:off x="6464808" y="4937760"/>
-            <a:ext cx="4937760" cy="914400"/>
-          </a:xfrm>
-          <a:prstGeom prst="rect">
-            <a:avLst/>
-          </a:prstGeom>
-          <a:noFill/>
-          <a:ln/>
-        </p:spPr>
-        <p:txBody>
-          <a:bodyPr wrap="square" lIns="0" tIns="0" rIns="0" bIns="0" rtlCol="0" anchor="t"/>
-          <a:lstStyle/>
-          <a:p>
-            <a:pPr indent="0" marL="0">
-              <a:buNone/>
-            </a:pPr>
-            <a:r>
-              <a:rPr lang="en-US" sz="1500" dirty="0">
-                <a:solidFill>
-                  <a:schemeClr val="tx2"/>
-                </a:solidFill>
-              </a:rPr>
-              <a:t>Outputs are percentile ranks for AUC, not calibrated probabilities for clinical decisions.</a:t>
-            </a:r>
-            <a:endParaRPr lang="en-US" sz="1500" dirty="0"/>
+              <a:rPr lang="en-US" sz="1100" dirty="0">
+                <a:solidFill>
+                  <a:schemeClr val="accent5"/>
+                </a:solidFill>
+              </a:rPr>
+              <a:t>Sources: our graded submissions; mid-Aug 2026 values from the Kaggle discussion forum (≈0.92 and ≈0.951), now out of date.</a:t>
+            </a:r>
+            <a:endParaRPr lang="en-US" sz="1100" dirty="0"/>
           </a:p>
         </p:txBody>
       </p:sp>
@@ -18119,10 +19102,10 @@
             <a:r>
               <a:rPr lang="en-US" sz="1200" b="1" spc="300" kern="0" dirty="0">
                 <a:solidFill>
-                  <a:schemeClr val="accent6"/>
-                </a:solidFill>
-              </a:rPr>
-              <a:t>CONCLUSION</a:t>
+                  <a:schemeClr val="accent1"/>
+                </a:solidFill>
+              </a:rPr>
+              <a:t>RESULTS</a:t>
             </a:r>
             <a:endParaRPr lang="en-US" sz="1200" dirty="0"/>
           </a:p>
@@ -18157,10 +19140,10 @@
             <a:r>
               <a:rPr lang="en-US" sz="3400" b="1" dirty="0">
                 <a:solidFill>
-                  <a:schemeClr val="bg1"/>
-                </a:solidFill>
-              </a:rPr>
-              <a:t>Conclusion and next steps</a:t>
+                  <a:schemeClr val="tx1"/>
+                </a:solidFill>
+              </a:rPr>
+              <a:t>Reading the two scores honestly</a:t>
             </a:r>
             <a:endParaRPr lang="en-US" sz="3400" dirty="0"/>
           </a:p>
@@ -18168,38 +19151,80 @@
       </p:sp>
       <p:sp>
         <p:nvSpPr>
-          <p:cNvPr id="4" name="card-387"/>
+          <p:cNvPr id="4" name="card-359"/>
           <p:cNvSpPr/>
           <p:nvPr/>
         </p:nvSpPr>
         <p:spPr>
           <a:xfrm>
             <a:off x="548640" y="1554480"/>
-            <a:ext cx="5440680" cy="4526280"/>
+            <a:ext cx="5943600" cy="1417320"/>
           </a:xfrm>
           <a:prstGeom prst="roundRect">
             <a:avLst>
-              <a:gd name="adj" fmla="val 2424"/>
+              <a:gd name="adj" fmla="val 7742"/>
             </a:avLst>
           </a:prstGeom>
           <a:solidFill>
-            <a:schemeClr val="bg1">
-              <a:alpha val="8000"/>
-            </a:schemeClr>
+            <a:schemeClr val="bg2"/>
           </a:solidFill>
           <a:ln/>
         </p:spPr>
       </p:sp>
       <p:sp>
         <p:nvSpPr>
-          <p:cNvPr id="5" name="text-388"/>
+          <p:cNvPr id="5" name="badge-360"/>
+          <p:cNvSpPr/>
+          <p:nvPr/>
+        </p:nvSpPr>
+        <p:spPr>
+          <a:xfrm>
+            <a:off x="822960" y="1920240"/>
+            <a:ext cx="640080" cy="640080"/>
+          </a:xfrm>
+          <a:prstGeom prst="ellipse">
+            <a:avLst/>
+          </a:prstGeom>
+          <a:solidFill>
+            <a:schemeClr val="accent3"/>
+          </a:solidFill>
+          <a:ln/>
+        </p:spPr>
+      </p:sp>
+      <p:pic>
+        <p:nvPicPr>
+          <p:cNvPr id="6" name="icon-361" descr="preencoded.png">    </p:cNvPr>
+          <p:cNvPicPr>
+            <a:picLocks noChangeAspect="1"/>
+          </p:cNvPicPr>
+          <p:nvPr/>
+        </p:nvPicPr>
+        <p:blipFill>
+          <a:blip r:embed="rId1"/>
+          <a:stretch>
+            <a:fillRect/>
+          </a:stretch>
+        </p:blipFill>
+        <p:spPr>
+          <a:xfrm>
+            <a:off x="989381" y="2086661"/>
+            <a:ext cx="307238" cy="307238"/>
+          </a:xfrm>
+          <a:prstGeom prst="rect">
+            <a:avLst/>
+          </a:prstGeom>
+        </p:spPr>
+      </p:pic>
+      <p:sp>
+        <p:nvSpPr>
+          <p:cNvPr id="7" name="text-362"/>
           <p:cNvSpPr txBox="1"/>
           <p:nvPr/>
         </p:nvSpPr>
         <p:spPr>
           <a:xfrm>
-            <a:off x="868680" y="1783080"/>
-            <a:ext cx="4754880" cy="256032"/>
+            <a:off x="1691640" y="1737360"/>
+            <a:ext cx="4572000" cy="320040"/>
           </a:xfrm>
           <a:prstGeom prst="rect">
             <a:avLst/>
@@ -18215,27 +19240,27 @@
               <a:buNone/>
             </a:pPr>
             <a:r>
-              <a:rPr lang="en-US" sz="1100" b="1" spc="200" kern="0" dirty="0">
-                <a:solidFill>
-                  <a:schemeClr val="accent6"/>
-                </a:solidFill>
-              </a:rPr>
-              <a:t>WHAT WE SHOWED</a:t>
-            </a:r>
-            <a:endParaRPr lang="en-US" sz="1100" dirty="0"/>
-          </a:p>
-        </p:txBody>
-      </p:sp>
-      <p:sp>
-        <p:nvSpPr>
-          <p:cNvPr id="6" name="Text 4"/>
+              <a:rPr lang="en-US" sz="1700" b="1" dirty="0">
+                <a:solidFill>
+                  <a:schemeClr val="tx1"/>
+                </a:solidFill>
+              </a:rPr>
+              <a:t>Below the parent</a:t>
+            </a:r>
+            <a:endParaRPr lang="en-US" sz="1700" dirty="0"/>
+          </a:p>
+        </p:txBody>
+      </p:sp>
+      <p:sp>
+        <p:nvSpPr>
+          <p:cNvPr id="8" name="text-363"/>
           <p:cNvSpPr txBox="1"/>
           <p:nvPr/>
         </p:nvSpPr>
         <p:spPr>
           <a:xfrm>
-            <a:off x="868680" y="2194560"/>
-            <a:ext cx="4846320" cy="3749040"/>
+            <a:off x="1691640" y="2103120"/>
+            <a:ext cx="4572000" cy="822960"/>
           </a:xfrm>
           <a:prstGeom prst="rect">
             <a:avLst/>
@@ -18247,95 +19272,97 @@
           <a:bodyPr wrap="square" lIns="0" tIns="0" rIns="0" bIns="0" rtlCol="0" anchor="t"/>
           <a:lstStyle/>
           <a:p>
-            <a:pPr marL="203200" indent="-203200">
-              <a:spcAft>
-                <a:spcPts val="1600"/>
-              </a:spcAft>
-              <a:buSzPct val="100000"/>
-              <a:buChar char="•"/>
-            </a:pPr>
-            <a:r>
-              <a:rPr lang="en-US" sz="1700" dirty="0">
-                <a:solidFill>
-                  <a:schemeClr val="bg1"/>
-                </a:solidFill>
-              </a:rPr>
-              <a:t>A five-stage, three-family ensemble runs reproducibly inside Kaggle's offline two-T4 budget and writes a receipt-bound submission.</a:t>
-            </a:r>
-            <a:endParaRPr lang="en-US" sz="1700" dirty="0"/>
-          </a:p>
-          <a:p>
-            <a:pPr marL="203200" indent="-203200">
-              <a:spcAft>
-                <a:spcPts val="1600"/>
-              </a:spcAft>
-              <a:buSzPct val="100000"/>
-              <a:buChar char="•"/>
-            </a:pPr>
-            <a:r>
-              <a:rPr lang="en-US" sz="1700" dirty="0">
-                <a:solidFill>
-                  <a:schemeClr val="bg1"/>
-                </a:solidFill>
-              </a:rPr>
-              <a:t>The ABG submission scored 0.922 and did not beat the 0.940 parent, a clear negative result we can now investigate.</a:t>
-            </a:r>
-            <a:endParaRPr lang="en-US" sz="1700" dirty="0"/>
-          </a:p>
-          <a:p>
-            <a:pPr marL="203200" indent="-203200">
-              <a:spcAft>
-                <a:spcPts val="1600"/>
-              </a:spcAft>
-              <a:buSzPct val="100000"/>
-              <a:buChar char="•"/>
-            </a:pPr>
-            <a:r>
-              <a:rPr lang="en-US" sz="1700" dirty="0">
-                <a:solidFill>
-                  <a:schemeClr val="bg1"/>
-                </a:solidFill>
-              </a:rPr>
-              <a:t>A pre-specified protocol and hard gates kept three weak ideas out of the submission.</a:t>
-            </a:r>
-            <a:endParaRPr lang="en-US" sz="1700" dirty="0"/>
-          </a:p>
-        </p:txBody>
-      </p:sp>
-      <p:sp>
-        <p:nvSpPr>
-          <p:cNvPr id="7" name="card-389"/>
+            <a:pPr indent="0" marL="0">
+              <a:buNone/>
+            </a:pPr>
+            <a:r>
+              <a:rPr lang="en-US" sz="1300" dirty="0">
+                <a:solidFill>
+                  <a:schemeClr val="tx2"/>
+                </a:solidFill>
+              </a:rPr>
+              <a:t>ABG scored 0.922, 0.018 under our parent submission at 0.940, so the three additions did not help on the public leaderboard.</a:t>
+            </a:r>
+            <a:endParaRPr lang="en-US" sz="1300" dirty="0"/>
+          </a:p>
+        </p:txBody>
+      </p:sp>
+      <p:sp>
+        <p:nvSpPr>
+          <p:cNvPr id="9" name="card-364"/>
           <p:cNvSpPr/>
           <p:nvPr/>
         </p:nvSpPr>
         <p:spPr>
           <a:xfrm>
-            <a:off x="6199632" y="1554480"/>
-            <a:ext cx="5440680" cy="4526280"/>
+            <a:off x="548640" y="3108960"/>
+            <a:ext cx="5943600" cy="1417320"/>
           </a:xfrm>
           <a:prstGeom prst="roundRect">
             <a:avLst>
-              <a:gd name="adj" fmla="val 2424"/>
+              <a:gd name="adj" fmla="val 7742"/>
             </a:avLst>
           </a:prstGeom>
           <a:solidFill>
-            <a:schemeClr val="bg1">
-              <a:alpha val="8000"/>
-            </a:schemeClr>
+            <a:schemeClr val="bg2"/>
           </a:solidFill>
           <a:ln/>
         </p:spPr>
       </p:sp>
       <p:sp>
         <p:nvSpPr>
-          <p:cNvPr id="8" name="text-390"/>
+          <p:cNvPr id="10" name="badge-365"/>
+          <p:cNvSpPr/>
+          <p:nvPr/>
+        </p:nvSpPr>
+        <p:spPr>
+          <a:xfrm>
+            <a:off x="822960" y="3474720"/>
+            <a:ext cx="640080" cy="640080"/>
+          </a:xfrm>
+          <a:prstGeom prst="ellipse">
+            <a:avLst/>
+          </a:prstGeom>
+          <a:solidFill>
+            <a:schemeClr val="accent4"/>
+          </a:solidFill>
+          <a:ln/>
+        </p:spPr>
+      </p:sp>
+      <p:pic>
+        <p:nvPicPr>
+          <p:cNvPr id="11" name="icon-366" descr="preencoded.png">    </p:cNvPr>
+          <p:cNvPicPr>
+            <a:picLocks noChangeAspect="1"/>
+          </p:cNvPicPr>
+          <p:nvPr/>
+        </p:nvPicPr>
+        <p:blipFill>
+          <a:blip r:embed="rId2"/>
+          <a:stretch>
+            <a:fillRect/>
+          </a:stretch>
+        </p:blipFill>
+        <p:spPr>
+          <a:xfrm>
+            <a:off x="989381" y="3641141"/>
+            <a:ext cx="307238" cy="307238"/>
+          </a:xfrm>
+          <a:prstGeom prst="rect">
+            <a:avLst/>
+          </a:prstGeom>
+        </p:spPr>
+      </p:pic>
+      <p:sp>
+        <p:nvSpPr>
+          <p:cNvPr id="12" name="text-367"/>
           <p:cNvSpPr txBox="1"/>
           <p:nvPr/>
         </p:nvSpPr>
         <p:spPr>
           <a:xfrm>
-            <a:off x="6519672" y="1783080"/>
-            <a:ext cx="4754880" cy="256032"/>
+            <a:off x="1691640" y="3291840"/>
+            <a:ext cx="4572000" cy="320040"/>
           </a:xfrm>
           <a:prstGeom prst="rect">
             <a:avLst/>
@@ -18351,27 +19378,85 @@
               <a:buNone/>
             </a:pPr>
             <a:r>
-              <a:rPr lang="en-US" sz="1100" b="1" spc="200" kern="0" dirty="0">
-                <a:solidFill>
-                  <a:schemeClr val="accent6"/>
-                </a:solidFill>
-              </a:rPr>
-              <a:t>NEXT STEPS</a:t>
-            </a:r>
-            <a:endParaRPr lang="en-US" sz="1100" dirty="0"/>
-          </a:p>
-        </p:txBody>
-      </p:sp>
-      <p:sp>
-        <p:nvSpPr>
-          <p:cNvPr id="9" name="letter-391"/>
+              <a:rPr lang="en-US" sz="1700" b="1" dirty="0">
+                <a:solidFill>
+                  <a:schemeClr val="tx1"/>
+                </a:solidFill>
+              </a:rPr>
+              <a:t>Cause not isolated</a:t>
+            </a:r>
+            <a:endParaRPr lang="en-US" sz="1700" dirty="0"/>
+          </a:p>
+        </p:txBody>
+      </p:sp>
+      <p:sp>
+        <p:nvSpPr>
+          <p:cNvPr id="13" name="text-368"/>
+          <p:cNvSpPr txBox="1"/>
+          <p:nvPr/>
+        </p:nvSpPr>
+        <p:spPr>
+          <a:xfrm>
+            <a:off x="1691640" y="3657600"/>
+            <a:ext cx="4572000" cy="822960"/>
+          </a:xfrm>
+          <a:prstGeom prst="rect">
+            <a:avLst/>
+          </a:prstGeom>
+          <a:noFill/>
+          <a:ln/>
+        </p:spPr>
+        <p:txBody>
+          <a:bodyPr wrap="square" lIns="0" tIns="0" rIns="0" bIns="0" rtlCol="0" anchor="t"/>
+          <a:lstStyle/>
+          <a:p>
+            <a:pPr indent="0" marL="0">
+              <a:buNone/>
+            </a:pPr>
+            <a:r>
+              <a:rPr lang="en-US" sz="1300" dirty="0">
+                <a:solidFill>
+                  <a:schemeClr val="tx2"/>
+                </a:solidFill>
+              </a:rPr>
+              <a:t>A, B and G were graded only together. In simulation a clearly worse residual costs ≈0.006 at the inherited scale, so a 0.018 gap needs the single-addition runs to explain.</a:t>
+            </a:r>
+            <a:endParaRPr lang="en-US" sz="1300" dirty="0"/>
+          </a:p>
+        </p:txBody>
+      </p:sp>
+      <p:sp>
+        <p:nvSpPr>
+          <p:cNvPr id="14" name="card-369"/>
           <p:cNvSpPr/>
           <p:nvPr/>
         </p:nvSpPr>
         <p:spPr>
           <a:xfrm>
-            <a:off x="6519672" y="2194560"/>
-            <a:ext cx="365760" cy="365760"/>
+            <a:off x="548640" y="4663440"/>
+            <a:ext cx="5943600" cy="1417320"/>
+          </a:xfrm>
+          <a:prstGeom prst="roundRect">
+            <a:avLst>
+              <a:gd name="adj" fmla="val 7742"/>
+            </a:avLst>
+          </a:prstGeom>
+          <a:solidFill>
+            <a:schemeClr val="bg2"/>
+          </a:solidFill>
+          <a:ln/>
+        </p:spPr>
+      </p:sp>
+      <p:sp>
+        <p:nvSpPr>
+          <p:cNvPr id="15" name="badge-370"/>
+          <p:cNvSpPr/>
+          <p:nvPr/>
+        </p:nvSpPr>
+        <p:spPr>
+          <a:xfrm>
+            <a:off x="822960" y="5029200"/>
+            <a:ext cx="640080" cy="640080"/>
           </a:xfrm>
           <a:prstGeom prst="ellipse">
             <a:avLst/>
@@ -18381,280 +19466,152 @@
           </a:solidFill>
           <a:ln/>
         </p:spPr>
-        <p:txBody>
-          <a:bodyPr wrap="square" lIns="0" tIns="0" rIns="0" bIns="0" rtlCol="0" anchor="ctr"/>
-          <a:lstStyle/>
-          <a:p>
-            <a:pPr algn="ctr" indent="0" marL="0">
-              <a:buNone/>
-            </a:pPr>
-            <a:r>
-              <a:rPr lang="en-US" sz="1200" b="1" dirty="0">
-                <a:solidFill>
-                  <a:schemeClr val="bg1"/>
-                </a:solidFill>
-              </a:rPr>
-              <a:t>1</a:t>
+      </p:sp>
+      <p:pic>
+        <p:nvPicPr>
+          <p:cNvPr id="16" name="icon-371" descr="preencoded.png">    </p:cNvPr>
+          <p:cNvPicPr>
+            <a:picLocks noChangeAspect="1"/>
+          </p:cNvPicPr>
+          <p:nvPr/>
+        </p:nvPicPr>
+        <p:blipFill>
+          <a:blip r:embed="rId3"/>
+          <a:stretch>
+            <a:fillRect/>
+          </a:stretch>
+        </p:blipFill>
+        <p:spPr>
+          <a:xfrm>
+            <a:off x="989381" y="5195621"/>
+            <a:ext cx="307238" cy="307238"/>
+          </a:xfrm>
+          <a:prstGeom prst="rect">
+            <a:avLst/>
+          </a:prstGeom>
+        </p:spPr>
+      </p:pic>
+      <p:sp>
+        <p:nvSpPr>
+          <p:cNvPr id="17" name="text-372"/>
+          <p:cNvSpPr txBox="1"/>
+          <p:nvPr/>
+        </p:nvSpPr>
+        <p:spPr>
+          <a:xfrm>
+            <a:off x="1691640" y="4846320"/>
+            <a:ext cx="4572000" cy="320040"/>
+          </a:xfrm>
+          <a:prstGeom prst="rect">
+            <a:avLst/>
+          </a:prstGeom>
+          <a:noFill/>
+          <a:ln/>
+        </p:spPr>
+        <p:txBody>
+          <a:bodyPr wrap="square" lIns="0" tIns="0" rIns="0" bIns="0" rtlCol="0" anchor="t"/>
+          <a:lstStyle/>
+          <a:p>
+            <a:pPr indent="0" marL="0">
+              <a:buNone/>
+            </a:pPr>
+            <a:r>
+              <a:rPr lang="en-US" sz="1700" b="1" dirty="0">
+                <a:solidFill>
+                  <a:schemeClr val="tx1"/>
+                </a:solidFill>
+              </a:rPr>
+              <a:t>No tuning to the result</a:t>
+            </a:r>
+            <a:endParaRPr lang="en-US" sz="1700" dirty="0"/>
+          </a:p>
+        </p:txBody>
+      </p:sp>
+      <p:sp>
+        <p:nvSpPr>
+          <p:cNvPr id="18" name="text-373"/>
+          <p:cNvSpPr txBox="1"/>
+          <p:nvPr/>
+        </p:nvSpPr>
+        <p:spPr>
+          <a:xfrm>
+            <a:off x="1691640" y="5212080"/>
+            <a:ext cx="4572000" cy="822960"/>
+          </a:xfrm>
+          <a:prstGeom prst="rect">
+            <a:avLst/>
+          </a:prstGeom>
+          <a:noFill/>
+          <a:ln/>
+        </p:spPr>
+        <p:txBody>
+          <a:bodyPr wrap="square" lIns="0" tIns="0" rIns="0" bIns="0" rtlCol="0" anchor="t"/>
+          <a:lstStyle/>
+          <a:p>
+            <a:pPr indent="0" marL="0">
+              <a:buNone/>
+            </a:pPr>
+            <a:r>
+              <a:rPr lang="en-US" sz="1300" dirty="0">
+                <a:solidFill>
+                  <a:schemeClr val="tx2"/>
+                </a:solidFill>
+              </a:rPr>
+              <a:t>Residual scales are inherited, not fitted, and the batch was fixed in advance, so we report the outcome as it came.</a:t>
+            </a:r>
+            <a:endParaRPr lang="en-US" sz="1300" dirty="0"/>
+          </a:p>
+        </p:txBody>
+      </p:sp>
+      <p:graphicFrame>
+        <p:nvGraphicFramePr>
+          <p:cNvPr id="19" name="sensitivity-chart" descr=""/>
+          <p:cNvGraphicFramePr/>
+          <p:nvPr/>
+        </p:nvGraphicFramePr>
+        <p:xfrm>
+          <a:off x="6675120" y="1554480"/>
+          <a:ext cx="4965192" cy="3840480"/>
+        </p:xfrm>
+        <a:graphic xmlns:a="http://schemas.openxmlformats.org/drawingml/2006/main">
+          <a:graphicData uri="http://schemas.openxmlformats.org/drawingml/2006/chart">
+            <c:chart xmlns:c="http://schemas.openxmlformats.org/drawingml/2006/chart" r:id="rId4"/>
+          </a:graphicData>
+        </a:graphic>
+      </p:graphicFrame>
+      <p:sp>
+        <p:nvSpPr>
+          <p:cNvPr id="20" name="text-374"/>
+          <p:cNvSpPr txBox="1"/>
+          <p:nvPr/>
+        </p:nvSpPr>
+        <p:spPr>
+          <a:xfrm>
+            <a:off x="6675120" y="5486400"/>
+            <a:ext cx="4965192" cy="548640"/>
+          </a:xfrm>
+          <a:prstGeom prst="rect">
+            <a:avLst/>
+          </a:prstGeom>
+          <a:noFill/>
+          <a:ln/>
+        </p:spPr>
+        <p:txBody>
+          <a:bodyPr wrap="square" lIns="0" tIns="0" rIns="0" bIns="0" rtlCol="0" anchor="t"/>
+          <a:lstStyle/>
+          <a:p>
+            <a:pPr indent="0" marL="0">
+              <a:buNone/>
+            </a:pPr>
+            <a:r>
+              <a:rPr lang="en-US" sz="1200" dirty="0">
+                <a:solidFill>
+                  <a:schemeClr val="accent5"/>
+                </a:solidFill>
+              </a:rPr>
+              <a:t>Macro AUC is a mean of 12, so each target counts 1/12: +0.001 overall needs +0.012 summed over targets.</a:t>
             </a:r>
             <a:endParaRPr lang="en-US" sz="1200" dirty="0"/>
-          </a:p>
-        </p:txBody>
-      </p:sp>
-      <p:sp>
-        <p:nvSpPr>
-          <p:cNvPr id="10" name="text-392"/>
-          <p:cNvSpPr txBox="1"/>
-          <p:nvPr/>
-        </p:nvSpPr>
-        <p:spPr>
-          <a:xfrm>
-            <a:off x="7040880" y="2176272"/>
-            <a:ext cx="4389120" cy="914400"/>
-          </a:xfrm>
-          <a:prstGeom prst="rect">
-            <a:avLst/>
-          </a:prstGeom>
-          <a:noFill/>
-          <a:ln/>
-        </p:spPr>
-        <p:txBody>
-          <a:bodyPr wrap="square" lIns="0" tIns="0" rIns="0" bIns="0" rtlCol="0" anchor="t"/>
-          <a:lstStyle/>
-          <a:p>
-            <a:pPr indent="0" marL="0">
-              <a:buNone/>
-            </a:pPr>
-            <a:r>
-              <a:rPr lang="en-US" sz="1500" dirty="0">
-                <a:solidFill>
-                  <a:schemeClr val="bg1"/>
-                </a:solidFill>
-              </a:rPr>
-              <a:t>Run A, B, G and AB separately to attribute the gap to the parent</a:t>
-            </a:r>
-            <a:endParaRPr lang="en-US" sz="1500" dirty="0"/>
-          </a:p>
-        </p:txBody>
-      </p:sp>
-      <p:sp>
-        <p:nvSpPr>
-          <p:cNvPr id="11" name="letter-393"/>
-          <p:cNvSpPr/>
-          <p:nvPr/>
-        </p:nvSpPr>
-        <p:spPr>
-          <a:xfrm>
-            <a:off x="6519672" y="3172968"/>
-            <a:ext cx="365760" cy="365760"/>
-          </a:xfrm>
-          <a:prstGeom prst="ellipse">
-            <a:avLst/>
-          </a:prstGeom>
-          <a:solidFill>
-            <a:schemeClr val="accent1"/>
-          </a:solidFill>
-          <a:ln/>
-        </p:spPr>
-        <p:txBody>
-          <a:bodyPr wrap="square" lIns="0" tIns="0" rIns="0" bIns="0" rtlCol="0" anchor="ctr"/>
-          <a:lstStyle/>
-          <a:p>
-            <a:pPr algn="ctr" indent="0" marL="0">
-              <a:buNone/>
-            </a:pPr>
-            <a:r>
-              <a:rPr lang="en-US" sz="1200" b="1" dirty="0">
-                <a:solidFill>
-                  <a:schemeClr val="bg1"/>
-                </a:solidFill>
-              </a:rPr>
-              <a:t>2</a:t>
-            </a:r>
-            <a:endParaRPr lang="en-US" sz="1200" dirty="0"/>
-          </a:p>
-        </p:txBody>
-      </p:sp>
-      <p:sp>
-        <p:nvSpPr>
-          <p:cNvPr id="12" name="text-394"/>
-          <p:cNvSpPr txBox="1"/>
-          <p:nvPr/>
-        </p:nvSpPr>
-        <p:spPr>
-          <a:xfrm>
-            <a:off x="7040880" y="3154680"/>
-            <a:ext cx="4389120" cy="914400"/>
-          </a:xfrm>
-          <a:prstGeom prst="rect">
-            <a:avLst/>
-          </a:prstGeom>
-          <a:noFill/>
-          <a:ln/>
-        </p:spPr>
-        <p:txBody>
-          <a:bodyPr wrap="square" lIns="0" tIns="0" rIns="0" bIns="0" rtlCol="0" anchor="t"/>
-          <a:lstStyle/>
-          <a:p>
-            <a:pPr indent="0" marL="0">
-              <a:buNone/>
-            </a:pPr>
-            <a:r>
-              <a:rPr lang="en-US" sz="1500" dirty="0">
-                <a:solidFill>
-                  <a:schemeClr val="bg1"/>
-                </a:solidFill>
-              </a:rPr>
-              <a:t>Record each graded score against earlier submissions</a:t>
-            </a:r>
-            <a:endParaRPr lang="en-US" sz="1500" dirty="0"/>
-          </a:p>
-        </p:txBody>
-      </p:sp>
-      <p:sp>
-        <p:nvSpPr>
-          <p:cNvPr id="13" name="letter-395"/>
-          <p:cNvSpPr/>
-          <p:nvPr/>
-        </p:nvSpPr>
-        <p:spPr>
-          <a:xfrm>
-            <a:off x="6519672" y="4151376"/>
-            <a:ext cx="365760" cy="365760"/>
-          </a:xfrm>
-          <a:prstGeom prst="ellipse">
-            <a:avLst/>
-          </a:prstGeom>
-          <a:solidFill>
-            <a:schemeClr val="accent1"/>
-          </a:solidFill>
-          <a:ln/>
-        </p:spPr>
-        <p:txBody>
-          <a:bodyPr wrap="square" lIns="0" tIns="0" rIns="0" bIns="0" rtlCol="0" anchor="ctr"/>
-          <a:lstStyle/>
-          <a:p>
-            <a:pPr algn="ctr" indent="0" marL="0">
-              <a:buNone/>
-            </a:pPr>
-            <a:r>
-              <a:rPr lang="en-US" sz="1200" b="1" dirty="0">
-                <a:solidFill>
-                  <a:schemeClr val="bg1"/>
-                </a:solidFill>
-              </a:rPr>
-              <a:t>3</a:t>
-            </a:r>
-            <a:endParaRPr lang="en-US" sz="1200" dirty="0"/>
-          </a:p>
-        </p:txBody>
-      </p:sp>
-      <p:sp>
-        <p:nvSpPr>
-          <p:cNvPr id="14" name="text-396"/>
-          <p:cNvSpPr txBox="1"/>
-          <p:nvPr/>
-        </p:nvSpPr>
-        <p:spPr>
-          <a:xfrm>
-            <a:off x="7040880" y="4133088"/>
-            <a:ext cx="4389120" cy="914400"/>
-          </a:xfrm>
-          <a:prstGeom prst="rect">
-            <a:avLst/>
-          </a:prstGeom>
-          <a:noFill/>
-          <a:ln/>
-        </p:spPr>
-        <p:txBody>
-          <a:bodyPr wrap="square" lIns="0" tIns="0" rIns="0" bIns="0" rtlCol="0" anchor="t"/>
-          <a:lstStyle/>
-          <a:p>
-            <a:pPr indent="0" marL="0">
-              <a:buNone/>
-            </a:pPr>
-            <a:r>
-              <a:rPr lang="en-US" sz="1500" dirty="0">
-                <a:solidFill>
-                  <a:schemeClr val="bg1"/>
-                </a:solidFill>
-              </a:rPr>
-              <a:t>Evaluate prospectively: patient-level splits, acceptance criteria set before opening held-out results</a:t>
-            </a:r>
-            <a:endParaRPr lang="en-US" sz="1500" dirty="0"/>
-          </a:p>
-        </p:txBody>
-      </p:sp>
-      <p:sp>
-        <p:nvSpPr>
-          <p:cNvPr id="15" name="letter-397"/>
-          <p:cNvSpPr/>
-          <p:nvPr/>
-        </p:nvSpPr>
-        <p:spPr>
-          <a:xfrm>
-            <a:off x="6519672" y="5129784"/>
-            <a:ext cx="365760" cy="365760"/>
-          </a:xfrm>
-          <a:prstGeom prst="ellipse">
-            <a:avLst/>
-          </a:prstGeom>
-          <a:solidFill>
-            <a:schemeClr val="accent1"/>
-          </a:solidFill>
-          <a:ln/>
-        </p:spPr>
-        <p:txBody>
-          <a:bodyPr wrap="square" lIns="0" tIns="0" rIns="0" bIns="0" rtlCol="0" anchor="ctr"/>
-          <a:lstStyle/>
-          <a:p>
-            <a:pPr algn="ctr" indent="0" marL="0">
-              <a:buNone/>
-            </a:pPr>
-            <a:r>
-              <a:rPr lang="en-US" sz="1200" b="1" dirty="0">
-                <a:solidFill>
-                  <a:schemeClr val="bg1"/>
-                </a:solidFill>
-              </a:rPr>
-              <a:t>4</a:t>
-            </a:r>
-            <a:endParaRPr lang="en-US" sz="1200" dirty="0"/>
-          </a:p>
-        </p:txBody>
-      </p:sp>
-      <p:sp>
-        <p:nvSpPr>
-          <p:cNvPr id="16" name="text-398"/>
-          <p:cNvSpPr txBox="1"/>
-          <p:nvPr/>
-        </p:nvSpPr>
-        <p:spPr>
-          <a:xfrm>
-            <a:off x="7040880" y="5111496"/>
-            <a:ext cx="4389120" cy="914400"/>
-          </a:xfrm>
-          <a:prstGeom prst="rect">
-            <a:avLst/>
-          </a:prstGeom>
-          <a:noFill/>
-          <a:ln/>
-        </p:spPr>
-        <p:txBody>
-          <a:bodyPr wrap="square" lIns="0" tIns="0" rIns="0" bIns="0" rtlCol="0" anchor="t"/>
-          <a:lstStyle/>
-          <a:p>
-            <a:pPr indent="0" marL="0">
-              <a:buNone/>
-            </a:pPr>
-            <a:r>
-              <a:rPr lang="en-US" sz="1500" dirty="0">
-                <a:solidFill>
-                  <a:schemeClr val="bg1"/>
-                </a:solidFill>
-              </a:rPr>
-              <a:t>Finalise report and presentation before the competition closes on 22 Oct</a:t>
-            </a:r>
-            <a:endParaRPr lang="en-US" sz="1500" dirty="0"/>
           </a:p>
         </p:txBody>
       </p:sp>
@@ -18688,7 +19645,7 @@
             <a:lvl1pPr>
               <a:defRPr sz="1000">
                 <a:solidFill>
-                  <a:srgbClr val="9FB0BE"/>
+                  <a:srgbClr val="5B6B7A"/>
                 </a:solidFill>
               </a:defRPr>
             </a:lvl1pPr>
@@ -18798,7 +19755,7 @@
                   <a:schemeClr val="tx1"/>
                 </a:solidFill>
               </a:rPr>
-              <a:t>References and acknowledgements</a:t>
+              <a:t>Limitations and responsible use</a:t>
             </a:r>
             <a:endParaRPr lang="en-US" sz="3400" dirty="0"/>
           </a:p>
@@ -18806,14 +19763,80 @@
       </p:sp>
       <p:sp>
         <p:nvSpPr>
-          <p:cNvPr id="4" name="Text 2"/>
+          <p:cNvPr id="4" name="card-375"/>
+          <p:cNvSpPr/>
+          <p:nvPr/>
+        </p:nvSpPr>
+        <p:spPr>
+          <a:xfrm>
+            <a:off x="548640" y="1554480"/>
+            <a:ext cx="5458968" cy="2103120"/>
+          </a:xfrm>
+          <a:prstGeom prst="roundRect">
+            <a:avLst>
+              <a:gd name="adj" fmla="val 5217"/>
+            </a:avLst>
+          </a:prstGeom>
+          <a:solidFill>
+            <a:schemeClr val="bg2"/>
+          </a:solidFill>
+          <a:ln/>
+        </p:spPr>
+      </p:sp>
+      <p:sp>
+        <p:nvSpPr>
+          <p:cNvPr id="5" name="badge-376"/>
+          <p:cNvSpPr/>
+          <p:nvPr/>
+        </p:nvSpPr>
+        <p:spPr>
+          <a:xfrm>
+            <a:off x="822960" y="1828800"/>
+            <a:ext cx="640080" cy="640080"/>
+          </a:xfrm>
+          <a:prstGeom prst="ellipse">
+            <a:avLst/>
+          </a:prstGeom>
+          <a:solidFill>
+            <a:schemeClr val="accent5"/>
+          </a:solidFill>
+          <a:ln/>
+        </p:spPr>
+      </p:sp>
+      <p:pic>
+        <p:nvPicPr>
+          <p:cNvPr id="6" name="icon-377" descr="preencoded.png">    </p:cNvPr>
+          <p:cNvPicPr>
+            <a:picLocks noChangeAspect="1"/>
+          </p:cNvPicPr>
+          <p:nvPr/>
+        </p:nvPicPr>
+        <p:blipFill>
+          <a:blip r:embed="rId1"/>
+          <a:stretch>
+            <a:fillRect/>
+          </a:stretch>
+        </p:blipFill>
+        <p:spPr>
+          <a:xfrm>
+            <a:off x="989381" y="1995221"/>
+            <a:ext cx="307238" cy="307238"/>
+          </a:xfrm>
+          <a:prstGeom prst="rect">
+            <a:avLst/>
+          </a:prstGeom>
+        </p:spPr>
+      </p:pic>
+      <p:sp>
+        <p:nvSpPr>
+          <p:cNvPr id="7" name="text-378"/>
           <p:cNvSpPr txBox="1"/>
           <p:nvPr/>
         </p:nvSpPr>
         <p:spPr>
           <a:xfrm>
-            <a:off x="548640" y="1508760"/>
-            <a:ext cx="5486400" cy="4754880"/>
+            <a:off x="1691640" y="1874520"/>
+            <a:ext cx="4114800" cy="365760"/>
           </a:xfrm>
           <a:prstGeom prst="rect">
             <a:avLst/>
@@ -18826,400 +19849,467 @@
           <a:lstStyle/>
           <a:p>
             <a:pPr indent="0" marL="0">
-              <a:spcBef>
-                <a:spcPts val="600"/>
-              </a:spcBef>
-              <a:spcAft>
-                <a:spcPts val="300"/>
-              </a:spcAft>
-              <a:buNone/>
-            </a:pPr>
-            <a:r>
-              <a:rPr lang="en-US" sz="1400" b="1" dirty="0">
+              <a:buNone/>
+            </a:pPr>
+            <a:r>
+              <a:rPr lang="en-US" sz="1800" b="1" dirty="0">
+                <a:solidFill>
+                  <a:schemeClr val="tx1"/>
+                </a:solidFill>
+              </a:rPr>
+              <a:t>No new training or validation</a:t>
+            </a:r>
+            <a:endParaRPr lang="en-US" sz="1800" dirty="0"/>
+          </a:p>
+        </p:txBody>
+      </p:sp>
+      <p:sp>
+        <p:nvSpPr>
+          <p:cNvPr id="8" name="text-379"/>
+          <p:cNvSpPr txBox="1"/>
+          <p:nvPr/>
+        </p:nvSpPr>
+        <p:spPr>
+          <a:xfrm>
+            <a:off x="822960" y="2651760"/>
+            <a:ext cx="4937760" cy="914400"/>
+          </a:xfrm>
+          <a:prstGeom prst="rect">
+            <a:avLst/>
+          </a:prstGeom>
+          <a:noFill/>
+          <a:ln/>
+        </p:spPr>
+        <p:txBody>
+          <a:bodyPr wrap="square" lIns="0" tIns="0" rIns="0" bIns="0" rtlCol="0" anchor="t"/>
+          <a:lstStyle/>
+          <a:p>
+            <a:pPr indent="0" marL="0">
+              <a:buNone/>
+            </a:pPr>
+            <a:r>
+              <a:rPr lang="en-US" sz="1500" dirty="0">
                 <a:solidFill>
                   <a:schemeClr val="tx2"/>
                 </a:solidFill>
               </a:rPr>
-              <a:t>Challenge and data</a:t>
-            </a:r>
-            <a:endParaRPr lang="en-US" sz="1400" dirty="0"/>
-          </a:p>
+              <a:t>Base models are public releases and no held-out validation was run. The mechanism study uses synthetic data with assumed parameters.</a:t>
+            </a:r>
+            <a:endParaRPr lang="en-US" sz="1500" dirty="0"/>
+          </a:p>
+        </p:txBody>
+      </p:sp>
+      <p:sp>
+        <p:nvSpPr>
+          <p:cNvPr id="9" name="card-380"/>
+          <p:cNvSpPr/>
+          <p:nvPr/>
+        </p:nvSpPr>
+        <p:spPr>
+          <a:xfrm>
+            <a:off x="6190488" y="1554480"/>
+            <a:ext cx="5458968" cy="2103120"/>
+          </a:xfrm>
+          <a:prstGeom prst="roundRect">
+            <a:avLst>
+              <a:gd name="adj" fmla="val 5217"/>
+            </a:avLst>
+          </a:prstGeom>
+          <a:solidFill>
+            <a:schemeClr val="bg2"/>
+          </a:solidFill>
+          <a:ln/>
+        </p:spPr>
+      </p:sp>
+      <p:sp>
+        <p:nvSpPr>
+          <p:cNvPr id="10" name="badge-381"/>
+          <p:cNvSpPr/>
+          <p:nvPr/>
+        </p:nvSpPr>
+        <p:spPr>
+          <a:xfrm>
+            <a:off x="6464808" y="1828800"/>
+            <a:ext cx="640080" cy="640080"/>
+          </a:xfrm>
+          <a:prstGeom prst="ellipse">
+            <a:avLst/>
+          </a:prstGeom>
+          <a:solidFill>
+            <a:schemeClr val="accent5"/>
+          </a:solidFill>
+          <a:ln/>
+        </p:spPr>
+      </p:sp>
+      <p:pic>
+        <p:nvPicPr>
+          <p:cNvPr id="11" name="icon-382" descr="preencoded.png">    </p:cNvPr>
+          <p:cNvPicPr>
+            <a:picLocks noChangeAspect="1"/>
+          </p:cNvPicPr>
+          <p:nvPr/>
+        </p:nvPicPr>
+        <p:blipFill>
+          <a:blip r:embed="rId2"/>
+          <a:stretch>
+            <a:fillRect/>
+          </a:stretch>
+        </p:blipFill>
+        <p:spPr>
+          <a:xfrm>
+            <a:off x="6631229" y="1995221"/>
+            <a:ext cx="307238" cy="307238"/>
+          </a:xfrm>
+          <a:prstGeom prst="rect">
+            <a:avLst/>
+          </a:prstGeom>
+        </p:spPr>
+      </p:pic>
+      <p:sp>
+        <p:nvSpPr>
+          <p:cNvPr id="12" name="text-383"/>
+          <p:cNvSpPr txBox="1"/>
+          <p:nvPr/>
+        </p:nvSpPr>
+        <p:spPr>
+          <a:xfrm>
+            <a:off x="7333488" y="1874520"/>
+            <a:ext cx="4114800" cy="365760"/>
+          </a:xfrm>
+          <a:prstGeom prst="rect">
+            <a:avLst/>
+          </a:prstGeom>
+          <a:noFill/>
+          <a:ln/>
+        </p:spPr>
+        <p:txBody>
+          <a:bodyPr wrap="square" lIns="0" tIns="0" rIns="0" bIns="0" rtlCol="0" anchor="t"/>
+          <a:lstStyle/>
           <a:p>
             <a:pPr indent="0" marL="0">
-              <a:spcAft>
-                <a:spcPts val="500"/>
-              </a:spcAft>
-              <a:buNone/>
-            </a:pPr>
-            <a:r>
-              <a:rPr lang="en-US" sz="1400" dirty="0">
+              <a:buNone/>
+            </a:pPr>
+            <a:r>
+              <a:rPr lang="en-US" sz="1800" b="1" dirty="0">
+                <a:solidFill>
+                  <a:schemeClr val="tx1"/>
+                </a:solidFill>
+              </a:rPr>
+              <a:t>Not clinical evidence</a:t>
+            </a:r>
+            <a:endParaRPr lang="en-US" sz="1800" dirty="0"/>
+          </a:p>
+        </p:txBody>
+      </p:sp>
+      <p:sp>
+        <p:nvSpPr>
+          <p:cNvPr id="13" name="text-384"/>
+          <p:cNvSpPr txBox="1"/>
+          <p:nvPr/>
+        </p:nvSpPr>
+        <p:spPr>
+          <a:xfrm>
+            <a:off x="6464808" y="2651760"/>
+            <a:ext cx="4937760" cy="914400"/>
+          </a:xfrm>
+          <a:prstGeom prst="rect">
+            <a:avLst/>
+          </a:prstGeom>
+          <a:noFill/>
+          <a:ln/>
+        </p:spPr>
+        <p:txBody>
+          <a:bodyPr wrap="square" lIns="0" tIns="0" rIns="0" bIns="0" rtlCol="0" anchor="t"/>
+          <a:lstStyle/>
+          <a:p>
+            <a:pPr indent="0" marL="0">
+              <a:buNone/>
+            </a:pPr>
+            <a:r>
+              <a:rPr lang="en-US" sz="1500" dirty="0">
                 <a:solidFill>
                   <a:schemeClr val="tx2"/>
                 </a:solidFill>
               </a:rPr>
-              <a:t>RSNA Knee Abnormality Detection AI Challenge (2026). rsna.org/artificial-intelligence/ai-image-challenge/knee-mri-ai-challenge</a:t>
-            </a:r>
-            <a:endParaRPr lang="en-US" sz="1400" dirty="0"/>
-          </a:p>
+              <a:t>A leaderboard score does not establish performance on other scanners, sites or patients.</a:t>
+            </a:r>
+            <a:endParaRPr lang="en-US" sz="1500" dirty="0"/>
+          </a:p>
+        </p:txBody>
+      </p:sp>
+      <p:sp>
+        <p:nvSpPr>
+          <p:cNvPr id="14" name="card-385"/>
+          <p:cNvSpPr/>
+          <p:nvPr/>
+        </p:nvSpPr>
+        <p:spPr>
+          <a:xfrm>
+            <a:off x="548640" y="3840480"/>
+            <a:ext cx="5458968" cy="2103120"/>
+          </a:xfrm>
+          <a:prstGeom prst="roundRect">
+            <a:avLst>
+              <a:gd name="adj" fmla="val 5217"/>
+            </a:avLst>
+          </a:prstGeom>
+          <a:solidFill>
+            <a:schemeClr val="bg2"/>
+          </a:solidFill>
+          <a:ln/>
+        </p:spPr>
+      </p:sp>
+      <p:sp>
+        <p:nvSpPr>
+          <p:cNvPr id="15" name="badge-386"/>
+          <p:cNvSpPr/>
+          <p:nvPr/>
+        </p:nvSpPr>
+        <p:spPr>
+          <a:xfrm>
+            <a:off x="822960" y="4114800"/>
+            <a:ext cx="640080" cy="640080"/>
+          </a:xfrm>
+          <a:prstGeom prst="ellipse">
+            <a:avLst/>
+          </a:prstGeom>
+          <a:solidFill>
+            <a:schemeClr val="accent5"/>
+          </a:solidFill>
+          <a:ln/>
+        </p:spPr>
+      </p:sp>
+      <p:pic>
+        <p:nvPicPr>
+          <p:cNvPr id="16" name="icon-387" descr="preencoded.png">    </p:cNvPr>
+          <p:cNvPicPr>
+            <a:picLocks noChangeAspect="1"/>
+          </p:cNvPicPr>
+          <p:nvPr/>
+        </p:nvPicPr>
+        <p:blipFill>
+          <a:blip r:embed="rId3"/>
+          <a:stretch>
+            <a:fillRect/>
+          </a:stretch>
+        </p:blipFill>
+        <p:spPr>
+          <a:xfrm>
+            <a:off x="989381" y="4281221"/>
+            <a:ext cx="307238" cy="307238"/>
+          </a:xfrm>
+          <a:prstGeom prst="rect">
+            <a:avLst/>
+          </a:prstGeom>
+        </p:spPr>
+      </p:pic>
+      <p:sp>
+        <p:nvSpPr>
+          <p:cNvPr id="17" name="text-388"/>
+          <p:cNvSpPr txBox="1"/>
+          <p:nvPr/>
+        </p:nvSpPr>
+        <p:spPr>
+          <a:xfrm>
+            <a:off x="1691640" y="4160520"/>
+            <a:ext cx="4114800" cy="365760"/>
+          </a:xfrm>
+          <a:prstGeom prst="rect">
+            <a:avLst/>
+          </a:prstGeom>
+          <a:noFill/>
+          <a:ln/>
+        </p:spPr>
+        <p:txBody>
+          <a:bodyPr wrap="square" lIns="0" tIns="0" rIns="0" bIns="0" rtlCol="0" anchor="t"/>
+          <a:lstStyle/>
           <a:p>
             <a:pPr indent="0" marL="0">
-              <a:spcAft>
-                <a:spcPts val="500"/>
-              </a:spcAft>
-              <a:buNone/>
-            </a:pPr>
-            <a:r>
-              <a:rPr lang="en-US" sz="1400" dirty="0">
+              <a:buNone/>
+            </a:pPr>
+            <a:r>
+              <a:rPr lang="en-US" sz="1800" b="1" dirty="0">
+                <a:solidFill>
+                  <a:schemeClr val="tx1"/>
+                </a:solidFill>
+              </a:rPr>
+              <a:t>Licences differ per component</a:t>
+            </a:r>
+            <a:endParaRPr lang="en-US" sz="1800" dirty="0"/>
+          </a:p>
+        </p:txBody>
+      </p:sp>
+      <p:sp>
+        <p:nvSpPr>
+          <p:cNvPr id="18" name="text-389"/>
+          <p:cNvSpPr txBox="1"/>
+          <p:nvPr/>
+        </p:nvSpPr>
+        <p:spPr>
+          <a:xfrm>
+            <a:off x="822960" y="4937760"/>
+            <a:ext cx="4937760" cy="914400"/>
+          </a:xfrm>
+          <a:prstGeom prst="rect">
+            <a:avLst/>
+          </a:prstGeom>
+          <a:noFill/>
+          <a:ln/>
+        </p:spPr>
+        <p:txBody>
+          <a:bodyPr wrap="square" lIns="0" tIns="0" rIns="0" bIns="0" rtlCol="0" anchor="t"/>
+          <a:lstStyle/>
+          <a:p>
+            <a:pPr indent="0" marL="0">
+              <a:buNone/>
+            </a:pPr>
+            <a:r>
+              <a:rPr lang="en-US" sz="1500" dirty="0">
                 <a:solidFill>
                   <a:schemeClr val="tx2"/>
                 </a:solidFill>
               </a:rPr>
-              <a:t>Kaggle competition: kaggle.com/competitions/rsna-knee-abnormality-detection</a:t>
-            </a:r>
-            <a:endParaRPr lang="en-US" sz="1400" dirty="0"/>
-          </a:p>
+              <a:t>RadImageNet-based heads are CC-BY-NC-SA 4.0, DINOv3 has its own licence, and several datasets are CC0.</a:t>
+            </a:r>
+            <a:endParaRPr lang="en-US" sz="1500" dirty="0"/>
+          </a:p>
+        </p:txBody>
+      </p:sp>
+      <p:sp>
+        <p:nvSpPr>
+          <p:cNvPr id="19" name="card-390"/>
+          <p:cNvSpPr/>
+          <p:nvPr/>
+        </p:nvSpPr>
+        <p:spPr>
+          <a:xfrm>
+            <a:off x="6190488" y="3840480"/>
+            <a:ext cx="5458968" cy="2103120"/>
+          </a:xfrm>
+          <a:prstGeom prst="roundRect">
+            <a:avLst>
+              <a:gd name="adj" fmla="val 5217"/>
+            </a:avLst>
+          </a:prstGeom>
+          <a:solidFill>
+            <a:schemeClr val="bg2"/>
+          </a:solidFill>
+          <a:ln/>
+        </p:spPr>
+      </p:sp>
+      <p:sp>
+        <p:nvSpPr>
+          <p:cNvPr id="20" name="badge-391"/>
+          <p:cNvSpPr/>
+          <p:nvPr/>
+        </p:nvSpPr>
+        <p:spPr>
+          <a:xfrm>
+            <a:off x="6464808" y="4114800"/>
+            <a:ext cx="640080" cy="640080"/>
+          </a:xfrm>
+          <a:prstGeom prst="ellipse">
+            <a:avLst/>
+          </a:prstGeom>
+          <a:solidFill>
+            <a:schemeClr val="accent5"/>
+          </a:solidFill>
+          <a:ln/>
+        </p:spPr>
+      </p:sp>
+      <p:pic>
+        <p:nvPicPr>
+          <p:cNvPr id="21" name="icon-392" descr="preencoded.png">    </p:cNvPr>
+          <p:cNvPicPr>
+            <a:picLocks noChangeAspect="1"/>
+          </p:cNvPicPr>
+          <p:nvPr/>
+        </p:nvPicPr>
+        <p:blipFill>
+          <a:blip r:embed="rId4"/>
+          <a:stretch>
+            <a:fillRect/>
+          </a:stretch>
+        </p:blipFill>
+        <p:spPr>
+          <a:xfrm>
+            <a:off x="6631229" y="4281221"/>
+            <a:ext cx="307238" cy="307238"/>
+          </a:xfrm>
+          <a:prstGeom prst="rect">
+            <a:avLst/>
+          </a:prstGeom>
+        </p:spPr>
+      </p:pic>
+      <p:sp>
+        <p:nvSpPr>
+          <p:cNvPr id="22" name="text-393"/>
+          <p:cNvSpPr txBox="1"/>
+          <p:nvPr/>
+        </p:nvSpPr>
+        <p:spPr>
+          <a:xfrm>
+            <a:off x="7333488" y="4160520"/>
+            <a:ext cx="4114800" cy="365760"/>
+          </a:xfrm>
+          <a:prstGeom prst="rect">
+            <a:avLst/>
+          </a:prstGeom>
+          <a:noFill/>
+          <a:ln/>
+        </p:spPr>
+        <p:txBody>
+          <a:bodyPr wrap="square" lIns="0" tIns="0" rIns="0" bIns="0" rtlCol="0" anchor="t"/>
+          <a:lstStyle/>
           <a:p>
             <a:pPr indent="0" marL="0">
-              <a:spcAft>
-                <a:spcPts val="500"/>
-              </a:spcAft>
-              <a:buNone/>
-            </a:pPr>
-            <a:r>
-              <a:rPr lang="en-US" sz="1400" dirty="0">
+              <a:buNone/>
+            </a:pPr>
+            <a:r>
+              <a:rPr lang="en-US" sz="1800" b="1" dirty="0">
+                <a:solidFill>
+                  <a:schemeClr val="tx1"/>
+                </a:solidFill>
+              </a:rPr>
+              <a:t>A ranking score, not a probability</a:t>
+            </a:r>
+            <a:endParaRPr lang="en-US" sz="1800" dirty="0"/>
+          </a:p>
+        </p:txBody>
+      </p:sp>
+      <p:sp>
+        <p:nvSpPr>
+          <p:cNvPr id="23" name="text-394"/>
+          <p:cNvSpPr txBox="1"/>
+          <p:nvPr/>
+        </p:nvSpPr>
+        <p:spPr>
+          <a:xfrm>
+            <a:off x="6464808" y="4937760"/>
+            <a:ext cx="4937760" cy="914400"/>
+          </a:xfrm>
+          <a:prstGeom prst="rect">
+            <a:avLst/>
+          </a:prstGeom>
+          <a:noFill/>
+          <a:ln/>
+        </p:spPr>
+        <p:txBody>
+          <a:bodyPr wrap="square" lIns="0" tIns="0" rIns="0" bIns="0" rtlCol="0" anchor="t"/>
+          <a:lstStyle/>
+          <a:p>
+            <a:pPr indent="0" marL="0">
+              <a:buNone/>
+            </a:pPr>
+            <a:r>
+              <a:rPr lang="en-US" sz="1500" dirty="0">
                 <a:solidFill>
                   <a:schemeClr val="tx2"/>
                 </a:solidFill>
               </a:rPr>
-              <a:t>RSNA News, “RSNA Launches Knee Abnormality Detection AI Challenge”, 5 Aug 2026</a:t>
-            </a:r>
-            <a:pPr indent="0" marL="0">
-              <a:buNone/>
-            </a:pPr>
-            <a:endParaRPr lang="en-US" sz="1400" dirty="0"/>
-          </a:p>
-          <a:p>
-            <a:pPr indent="0" marL="0">
-              <a:spcBef>
-                <a:spcPts val="600"/>
-              </a:spcBef>
-              <a:spcAft>
-                <a:spcPts val="300"/>
-              </a:spcAft>
-              <a:buNone/>
-            </a:pPr>
-            <a:r>
-              <a:rPr lang="en-US" sz="1400" b="1" dirty="0">
-                <a:solidFill>
-                  <a:schemeClr val="tx2"/>
-                </a:solidFill>
-              </a:rPr>
-              <a:t>Models and methods</a:t>
-            </a:r>
-            <a:endParaRPr lang="en-US" sz="1400" dirty="0"/>
-          </a:p>
-          <a:p>
-            <a:pPr indent="0" marL="0">
-              <a:spcAft>
-                <a:spcPts val="500"/>
-              </a:spcAft>
-              <a:buNone/>
-            </a:pPr>
-            <a:r>
-              <a:rPr lang="en-US" sz="1400" dirty="0">
-                <a:solidFill>
-                  <a:schemeClr val="tx2"/>
-                </a:solidFill>
-              </a:rPr>
-              <a:t>Siméoni et al., DINOv3, Meta AI, 2025 (arXiv:2508.10104)</a:t>
-            </a:r>
-            <a:endParaRPr lang="en-US" sz="1400" dirty="0"/>
-          </a:p>
-          <a:p>
-            <a:pPr indent="0" marL="0">
-              <a:spcAft>
-                <a:spcPts val="500"/>
-              </a:spcAft>
-              <a:buNone/>
-            </a:pPr>
-            <a:r>
-              <a:rPr lang="en-US" sz="1400" dirty="0">
-                <a:solidFill>
-                  <a:schemeClr val="tx2"/>
-                </a:solidFill>
-              </a:rPr>
-              <a:t>Oquab et al., DINOv2, 2023 (arXiv:2304.07193)</a:t>
-            </a:r>
-            <a:endParaRPr lang="en-US" sz="1400" dirty="0"/>
-          </a:p>
-          <a:p>
-            <a:pPr indent="0" marL="0">
-              <a:spcAft>
-                <a:spcPts val="500"/>
-              </a:spcAft>
-              <a:buNone/>
-            </a:pPr>
-            <a:r>
-              <a:rPr lang="en-US" sz="1400" dirty="0">
-                <a:solidFill>
-                  <a:schemeClr val="tx2"/>
-                </a:solidFill>
-              </a:rPr>
-              <a:t>Dosovitskiy et al., An Image is Worth 16×16 Words (ViT), ICLR 2021</a:t>
-            </a:r>
-            <a:endParaRPr lang="en-US" sz="1400" dirty="0"/>
-          </a:p>
-          <a:p>
-            <a:pPr indent="0" marL="0">
-              <a:spcAft>
-                <a:spcPts val="500"/>
-              </a:spcAft>
-              <a:buNone/>
-            </a:pPr>
-            <a:r>
-              <a:rPr lang="en-US" sz="1400" dirty="0">
-                <a:solidFill>
-                  <a:schemeClr val="tx2"/>
-                </a:solidFill>
-              </a:rPr>
-              <a:t>Dai et al., CoAtNet, NeurIPS 2021</a:t>
-            </a:r>
-            <a:endParaRPr lang="en-US" sz="1400" dirty="0"/>
-          </a:p>
-          <a:p>
-            <a:pPr indent="0" marL="0">
-              <a:spcAft>
-                <a:spcPts val="500"/>
-              </a:spcAft>
-              <a:buNone/>
-            </a:pPr>
-            <a:r>
-              <a:rPr lang="en-US" sz="1400" dirty="0">
-                <a:solidFill>
-                  <a:schemeClr val="tx2"/>
-                </a:solidFill>
-              </a:rPr>
-              <a:t>Mei et al., RadImageNet, Radiology: Artificial Intelligence, 2022</a:t>
-            </a:r>
-            <a:endParaRPr lang="en-US" sz="1400" dirty="0"/>
-          </a:p>
-          <a:p>
-            <a:pPr indent="0" marL="0">
-              <a:spcAft>
-                <a:spcPts val="500"/>
-              </a:spcAft>
-              <a:buNone/>
-            </a:pPr>
-            <a:r>
-              <a:rPr lang="en-US" sz="1400" dirty="0">
-                <a:solidFill>
-                  <a:schemeClr val="tx2"/>
-                </a:solidFill>
-              </a:rPr>
-              <a:t>He et al., Deep Residual Learning for Image Recognition, CVPR 2016</a:t>
-            </a:r>
-            <a:endParaRPr lang="en-US" sz="1400" dirty="0"/>
-          </a:p>
-        </p:txBody>
-      </p:sp>
-      <p:sp>
-        <p:nvSpPr>
-          <p:cNvPr id="5" name="Text 3"/>
-          <p:cNvSpPr txBox="1"/>
-          <p:nvPr/>
-        </p:nvSpPr>
-        <p:spPr>
-          <a:xfrm>
-            <a:off x="6309360" y="1508760"/>
-            <a:ext cx="5330952" cy="4754880"/>
-          </a:xfrm>
-          <a:prstGeom prst="rect">
-            <a:avLst/>
-          </a:prstGeom>
-          <a:noFill/>
-          <a:ln/>
-        </p:spPr>
-        <p:txBody>
-          <a:bodyPr wrap="square" lIns="0" tIns="0" rIns="0" bIns="0" rtlCol="0" anchor="t"/>
-          <a:lstStyle/>
-          <a:p>
-            <a:pPr indent="0" marL="0">
-              <a:spcBef>
-                <a:spcPts val="600"/>
-              </a:spcBef>
-              <a:spcAft>
-                <a:spcPts val="300"/>
-              </a:spcAft>
-              <a:buNone/>
-            </a:pPr>
-            <a:r>
-              <a:rPr lang="en-US" sz="1400" b="1" dirty="0">
-                <a:solidFill>
-                  <a:schemeClr val="tx2"/>
-                </a:solidFill>
-              </a:rPr>
-              <a:t>Released components used (Kaggle)</a:t>
-            </a:r>
-            <a:endParaRPr lang="en-US" sz="1400" dirty="0"/>
-          </a:p>
-          <a:p>
-            <a:pPr indent="0" marL="0">
-              <a:spcAft>
-                <a:spcPts val="500"/>
-              </a:spcAft>
-              <a:buNone/>
-            </a:pPr>
-            <a:r>
-              <a:rPr lang="en-US" sz="1400" dirty="0">
-                <a:solidFill>
-                  <a:schemeClr val="tx2"/>
-                </a:solidFill>
-              </a:rPr>
-              <a:t>Mattia Angeli: V27 notebook, A5 fold weights, residual CoAtNet</a:t>
-            </a:r>
-            <a:endParaRPr lang="en-US" sz="1400" dirty="0"/>
-          </a:p>
-          <a:p>
-            <a:pPr indent="0" marL="0">
-              <a:spcAft>
-                <a:spcPts val="500"/>
-              </a:spcAft>
-              <a:buNone/>
-            </a:pPr>
-            <a:r>
-              <a:rPr lang="en-US" sz="1400" dirty="0">
-                <a:solidFill>
-                  <a:schemeClr val="tx2"/>
-                </a:solidFill>
-              </a:rPr>
-              <a:t>pilkwang: DINO MRI ensemble weights</a:t>
-            </a:r>
-            <a:endParaRPr lang="en-US" sz="1400" dirty="0"/>
-          </a:p>
-          <a:p>
-            <a:pPr indent="0" marL="0">
-              <a:spcAft>
-                <a:spcPts val="500"/>
-              </a:spcAft>
-              <a:buNone/>
-            </a:pPr>
-            <a:r>
-              <a:rPr lang="en-US" sz="1400" dirty="0">
-                <a:solidFill>
-                  <a:schemeClr val="tx2"/>
-                </a:solidFill>
-              </a:rPr>
-              <a:t>Johnathan Wagner / DreadDevelopment: Raptor CoAtNet</a:t>
-            </a:r>
-            <a:endParaRPr lang="en-US" sz="1400" dirty="0"/>
-          </a:p>
-          <a:p>
-            <a:pPr indent="0" marL="0">
-              <a:spcAft>
-                <a:spcPts val="500"/>
-              </a:spcAft>
-              <a:buNone/>
-            </a:pPr>
-            <a:r>
-              <a:rPr lang="en-US" sz="1400" dirty="0">
-                <a:solidFill>
-                  <a:schemeClr val="tx2"/>
-                </a:solidFill>
-              </a:rPr>
-              <a:t>Antoine (antoinegg1): reference Rad heads, E11 v20 heads</a:t>
-            </a:r>
-            <a:endParaRPr lang="en-US" sz="1400" dirty="0"/>
-          </a:p>
-          <a:p>
-            <a:pPr indent="0" marL="0">
-              <a:spcAft>
-                <a:spcPts val="500"/>
-              </a:spcAft>
-              <a:buNone/>
-            </a:pPr>
-            <a:r>
-              <a:rPr lang="en-US" sz="1400" dirty="0">
-                <a:solidFill>
-                  <a:schemeClr val="tx2"/>
-                </a:solidFill>
-              </a:rPr>
-              <a:t>Sofia Anjenje: E11 / E13 implementations</a:t>
-            </a:r>
-            <a:endParaRPr lang="en-US" sz="1400" dirty="0"/>
-          </a:p>
-          <a:p>
-            <a:pPr indent="0" marL="0">
-              <a:spcAft>
-                <a:spcPts val="500"/>
-              </a:spcAft>
-              <a:buNone/>
-            </a:pPr>
-            <a:r>
-              <a:rPr lang="en-US" sz="1400" dirty="0">
-                <a:solidFill>
-                  <a:schemeClr val="tx2"/>
-                </a:solidFill>
-              </a:rPr>
-              <a:t>Marwan: RadImageNet ResNet-50 mirror</a:t>
-            </a:r>
-            <a:endParaRPr lang="en-US" sz="1400" dirty="0"/>
-          </a:p>
-          <a:p>
-            <a:pPr indent="0" marL="0">
-              <a:spcAft>
-                <a:spcPts val="500"/>
-              </a:spcAft>
-              <a:buNone/>
-            </a:pPr>
-            <a:r>
-              <a:rPr lang="en-US" sz="1400" dirty="0">
-                <a:solidFill>
-                  <a:schemeClr val="tx2"/>
-                </a:solidFill>
-              </a:rPr>
-              <a:t>Bee V17 (prvsiyan): reproducible parent, public score 0.940</a:t>
-            </a:r>
-            <a:pPr indent="0" marL="0">
-              <a:buNone/>
-            </a:pPr>
-            <a:endParaRPr lang="en-US" sz="1400" dirty="0"/>
-          </a:p>
-          <a:p>
-            <a:pPr indent="0" marL="0">
-              <a:spcBef>
-                <a:spcPts val="600"/>
-              </a:spcBef>
-              <a:spcAft>
-                <a:spcPts val="300"/>
-              </a:spcAft>
-              <a:buNone/>
-            </a:pPr>
-            <a:r>
-              <a:rPr lang="en-US" sz="1400" b="1" dirty="0">
-                <a:solidFill>
-                  <a:schemeClr val="tx2"/>
-                </a:solidFill>
-              </a:rPr>
-              <a:t>Licences</a:t>
-            </a:r>
-            <a:endParaRPr lang="en-US" sz="1400" dirty="0"/>
-          </a:p>
-          <a:p>
-            <a:pPr indent="0" marL="0">
-              <a:spcAft>
-                <a:spcPts val="500"/>
-              </a:spcAft>
-              <a:buNone/>
-            </a:pPr>
-            <a:r>
-              <a:rPr lang="en-US" sz="1400" dirty="0">
-                <a:solidFill>
-                  <a:schemeClr val="tx2"/>
-                </a:solidFill>
-              </a:rPr>
-              <a:t>Apache 2.0 notebook code; CC0 datasets; RadImageNet-based heads CC-BY-NC-SA 4.0; DINOv3 License (Meta)</a:t>
-            </a:r>
-            <a:endParaRPr lang="en-US" sz="1400" dirty="0"/>
+              <a:t>Outputs are percentile ranks for AUC, not calibrated probabilities for clinical decisions.</a:t>
+            </a:r>
+            <a:endParaRPr lang="en-US" sz="1500" dirty="0"/>
           </a:p>
         </p:txBody>
       </p:sp>
@@ -19303,6 +20393,1244 @@
         </p:nvSpPr>
         <p:spPr>
           <a:xfrm>
+            <a:off x="548640" y="310896"/>
+            <a:ext cx="8229600" cy="274320"/>
+          </a:xfrm>
+          <a:prstGeom prst="rect">
+            <a:avLst/>
+          </a:prstGeom>
+          <a:noFill/>
+          <a:ln/>
+        </p:spPr>
+        <p:txBody>
+          <a:bodyPr wrap="square" lIns="0" tIns="0" rIns="0" bIns="0" rtlCol="0" anchor="t"/>
+          <a:lstStyle/>
+          <a:p>
+            <a:pPr algn="l" indent="0" marL="0">
+              <a:buNone/>
+            </a:pPr>
+            <a:r>
+              <a:rPr lang="en-US" sz="1200" b="1" spc="300" kern="0" dirty="0">
+                <a:solidFill>
+                  <a:schemeClr val="accent6"/>
+                </a:solidFill>
+              </a:rPr>
+              <a:t>CONCLUSION</a:t>
+            </a:r>
+            <a:endParaRPr lang="en-US" sz="1200" dirty="0"/>
+          </a:p>
+        </p:txBody>
+      </p:sp>
+      <p:sp>
+        <p:nvSpPr>
+          <p:cNvPr id="3" name="Text 0"/>
+          <p:cNvSpPr/>
+          <p:nvPr>
+            <p:ph idx="101" type="title" hasCustomPrompt="1"/>
+          </p:nvPr>
+        </p:nvSpPr>
+        <p:spPr>
+          <a:xfrm>
+            <a:off x="548640" y="566928"/>
+            <a:ext cx="11094415" cy="713232"/>
+          </a:xfrm>
+          <a:prstGeom prst="rect">
+            <a:avLst/>
+          </a:prstGeom>
+          <a:noFill/>
+          <a:ln/>
+        </p:spPr>
+        <p:txBody>
+          <a:bodyPr wrap="square" lIns="0" tIns="0" rIns="0" bIns="0" rtlCol="0" anchor="t"/>
+          <a:lstStyle/>
+          <a:p>
+            <a:pPr algn="l" indent="0" marL="0">
+              <a:buNone/>
+            </a:pPr>
+            <a:r>
+              <a:rPr lang="en-US" sz="3400" b="1" dirty="0">
+                <a:solidFill>
+                  <a:schemeClr val="bg1"/>
+                </a:solidFill>
+              </a:rPr>
+              <a:t>Conclusion and next steps</a:t>
+            </a:r>
+            <a:endParaRPr lang="en-US" sz="3400" dirty="0"/>
+          </a:p>
+        </p:txBody>
+      </p:sp>
+      <p:sp>
+        <p:nvSpPr>
+          <p:cNvPr id="4" name="card-395"/>
+          <p:cNvSpPr/>
+          <p:nvPr/>
+        </p:nvSpPr>
+        <p:spPr>
+          <a:xfrm>
+            <a:off x="548640" y="1554480"/>
+            <a:ext cx="5440680" cy="4526280"/>
+          </a:xfrm>
+          <a:prstGeom prst="roundRect">
+            <a:avLst>
+              <a:gd name="adj" fmla="val 2424"/>
+            </a:avLst>
+          </a:prstGeom>
+          <a:solidFill>
+            <a:schemeClr val="bg1">
+              <a:alpha val="8000"/>
+            </a:schemeClr>
+          </a:solidFill>
+          <a:ln/>
+        </p:spPr>
+      </p:sp>
+      <p:sp>
+        <p:nvSpPr>
+          <p:cNvPr id="5" name="text-396"/>
+          <p:cNvSpPr txBox="1"/>
+          <p:nvPr/>
+        </p:nvSpPr>
+        <p:spPr>
+          <a:xfrm>
+            <a:off x="868680" y="1783080"/>
+            <a:ext cx="4754880" cy="256032"/>
+          </a:xfrm>
+          <a:prstGeom prst="rect">
+            <a:avLst/>
+          </a:prstGeom>
+          <a:noFill/>
+          <a:ln/>
+        </p:spPr>
+        <p:txBody>
+          <a:bodyPr wrap="square" lIns="0" tIns="0" rIns="0" bIns="0" rtlCol="0" anchor="t"/>
+          <a:lstStyle/>
+          <a:p>
+            <a:pPr indent="0" marL="0">
+              <a:buNone/>
+            </a:pPr>
+            <a:r>
+              <a:rPr lang="en-US" sz="1100" b="1" spc="200" kern="0" dirty="0">
+                <a:solidFill>
+                  <a:schemeClr val="accent6"/>
+                </a:solidFill>
+              </a:rPr>
+              <a:t>WHAT WE SHOWED</a:t>
+            </a:r>
+            <a:endParaRPr lang="en-US" sz="1100" dirty="0"/>
+          </a:p>
+        </p:txBody>
+      </p:sp>
+      <p:sp>
+        <p:nvSpPr>
+          <p:cNvPr id="6" name="Text 4"/>
+          <p:cNvSpPr txBox="1"/>
+          <p:nvPr/>
+        </p:nvSpPr>
+        <p:spPr>
+          <a:xfrm>
+            <a:off x="868680" y="2194560"/>
+            <a:ext cx="4846320" cy="3749040"/>
+          </a:xfrm>
+          <a:prstGeom prst="rect">
+            <a:avLst/>
+          </a:prstGeom>
+          <a:noFill/>
+          <a:ln/>
+        </p:spPr>
+        <p:txBody>
+          <a:bodyPr wrap="square" lIns="0" tIns="0" rIns="0" bIns="0" rtlCol="0" anchor="t"/>
+          <a:lstStyle/>
+          <a:p>
+            <a:pPr marL="203200" indent="-203200">
+              <a:spcAft>
+                <a:spcPts val="1200"/>
+              </a:spcAft>
+              <a:buSzPct val="100000"/>
+              <a:buChar char="•"/>
+            </a:pPr>
+            <a:r>
+              <a:rPr lang="en-US" sz="1600" dirty="0">
+                <a:solidFill>
+                  <a:schemeClr val="bg1"/>
+                </a:solidFill>
+              </a:rPr>
+              <a:t>A five-stage, three-family ensemble runs reproducibly inside Kaggle's offline two-T4 budget and writes a receipt-bound submission.</a:t>
+            </a:r>
+            <a:endParaRPr lang="en-US" sz="1600" dirty="0"/>
+          </a:p>
+          <a:p>
+            <a:pPr marL="203200" indent="-203200">
+              <a:spcAft>
+                <a:spcPts val="1200"/>
+              </a:spcAft>
+              <a:buSzPct val="100000"/>
+              <a:buChar char="•"/>
+            </a:pPr>
+            <a:r>
+              <a:rPr lang="en-US" sz="1600" dirty="0">
+                <a:solidFill>
+                  <a:schemeClr val="bg1"/>
+                </a:solidFill>
+              </a:rPr>
+              <a:t>Our parent submission scored 0.940 and ABG 0.922; ABG did not beat its parent, a clear negative result we can now investigate.</a:t>
+            </a:r>
+            <a:endParaRPr lang="en-US" sz="1600" dirty="0"/>
+          </a:p>
+          <a:p>
+            <a:pPr marL="203200" indent="-203200">
+              <a:spcAft>
+                <a:spcPts val="1200"/>
+              </a:spcAft>
+              <a:buSzPct val="100000"/>
+              <a:buChar char="•"/>
+            </a:pPr>
+            <a:r>
+              <a:rPr lang="en-US" sz="1600" dirty="0">
+                <a:solidFill>
+                  <a:schemeClr val="bg1"/>
+                </a:solidFill>
+              </a:rPr>
+              <a:t>A synthetic study suggests such additions move the score by thousandths, so the 0.018 gap needs a closer look.</a:t>
+            </a:r>
+            <a:endParaRPr lang="en-US" sz="1600" dirty="0"/>
+          </a:p>
+          <a:p>
+            <a:pPr marL="203200" indent="-203200">
+              <a:spcAft>
+                <a:spcPts val="1200"/>
+              </a:spcAft>
+              <a:buSzPct val="100000"/>
+              <a:buChar char="•"/>
+            </a:pPr>
+            <a:r>
+              <a:rPr lang="en-US" sz="1600" dirty="0">
+                <a:solidFill>
+                  <a:schemeClr val="bg1"/>
+                </a:solidFill>
+              </a:rPr>
+              <a:t>A pre-specified protocol and hard gates kept three weak ideas out of the submission.</a:t>
+            </a:r>
+            <a:endParaRPr lang="en-US" sz="1600" dirty="0"/>
+          </a:p>
+        </p:txBody>
+      </p:sp>
+      <p:sp>
+        <p:nvSpPr>
+          <p:cNvPr id="7" name="card-397"/>
+          <p:cNvSpPr/>
+          <p:nvPr/>
+        </p:nvSpPr>
+        <p:spPr>
+          <a:xfrm>
+            <a:off x="6199632" y="1554480"/>
+            <a:ext cx="5440680" cy="4526280"/>
+          </a:xfrm>
+          <a:prstGeom prst="roundRect">
+            <a:avLst>
+              <a:gd name="adj" fmla="val 2424"/>
+            </a:avLst>
+          </a:prstGeom>
+          <a:solidFill>
+            <a:schemeClr val="bg1">
+              <a:alpha val="8000"/>
+            </a:schemeClr>
+          </a:solidFill>
+          <a:ln/>
+        </p:spPr>
+      </p:sp>
+      <p:sp>
+        <p:nvSpPr>
+          <p:cNvPr id="8" name="text-398"/>
+          <p:cNvSpPr txBox="1"/>
+          <p:nvPr/>
+        </p:nvSpPr>
+        <p:spPr>
+          <a:xfrm>
+            <a:off x="6519672" y="1783080"/>
+            <a:ext cx="4754880" cy="256032"/>
+          </a:xfrm>
+          <a:prstGeom prst="rect">
+            <a:avLst/>
+          </a:prstGeom>
+          <a:noFill/>
+          <a:ln/>
+        </p:spPr>
+        <p:txBody>
+          <a:bodyPr wrap="square" lIns="0" tIns="0" rIns="0" bIns="0" rtlCol="0" anchor="t"/>
+          <a:lstStyle/>
+          <a:p>
+            <a:pPr indent="0" marL="0">
+              <a:buNone/>
+            </a:pPr>
+            <a:r>
+              <a:rPr lang="en-US" sz="1100" b="1" spc="200" kern="0" dirty="0">
+                <a:solidFill>
+                  <a:schemeClr val="accent6"/>
+                </a:solidFill>
+              </a:rPr>
+              <a:t>NEXT STEPS</a:t>
+            </a:r>
+            <a:endParaRPr lang="en-US" sz="1100" dirty="0"/>
+          </a:p>
+        </p:txBody>
+      </p:sp>
+      <p:sp>
+        <p:nvSpPr>
+          <p:cNvPr id="9" name="letter-399"/>
+          <p:cNvSpPr/>
+          <p:nvPr/>
+        </p:nvSpPr>
+        <p:spPr>
+          <a:xfrm>
+            <a:off x="6519672" y="2194560"/>
+            <a:ext cx="365760" cy="365760"/>
+          </a:xfrm>
+          <a:prstGeom prst="ellipse">
+            <a:avLst/>
+          </a:prstGeom>
+          <a:solidFill>
+            <a:schemeClr val="accent1"/>
+          </a:solidFill>
+          <a:ln/>
+        </p:spPr>
+        <p:txBody>
+          <a:bodyPr wrap="square" lIns="0" tIns="0" rIns="0" bIns="0" rtlCol="0" anchor="ctr"/>
+          <a:lstStyle/>
+          <a:p>
+            <a:pPr algn="ctr" indent="0" marL="0">
+              <a:buNone/>
+            </a:pPr>
+            <a:r>
+              <a:rPr lang="en-US" sz="1200" b="1" dirty="0">
+                <a:solidFill>
+                  <a:schemeClr val="bg1"/>
+                </a:solidFill>
+              </a:rPr>
+              <a:t>1</a:t>
+            </a:r>
+            <a:endParaRPr lang="en-US" sz="1200" dirty="0"/>
+          </a:p>
+        </p:txBody>
+      </p:sp>
+      <p:sp>
+        <p:nvSpPr>
+          <p:cNvPr id="10" name="text-400"/>
+          <p:cNvSpPr txBox="1"/>
+          <p:nvPr/>
+        </p:nvSpPr>
+        <p:spPr>
+          <a:xfrm>
+            <a:off x="7040880" y="2176272"/>
+            <a:ext cx="4389120" cy="914400"/>
+          </a:xfrm>
+          <a:prstGeom prst="rect">
+            <a:avLst/>
+          </a:prstGeom>
+          <a:noFill/>
+          <a:ln/>
+        </p:spPr>
+        <p:txBody>
+          <a:bodyPr wrap="square" lIns="0" tIns="0" rIns="0" bIns="0" rtlCol="0" anchor="t"/>
+          <a:lstStyle/>
+          <a:p>
+            <a:pPr indent="0" marL="0">
+              <a:buNone/>
+            </a:pPr>
+            <a:r>
+              <a:rPr lang="en-US" sz="1500" dirty="0">
+                <a:solidFill>
+                  <a:schemeClr val="bg1"/>
+                </a:solidFill>
+              </a:rPr>
+              <a:t>Run A, B, G and AB separately on the real test set to attribute the gap to the parent</a:t>
+            </a:r>
+            <a:endParaRPr lang="en-US" sz="1500" dirty="0"/>
+          </a:p>
+        </p:txBody>
+      </p:sp>
+      <p:sp>
+        <p:nvSpPr>
+          <p:cNvPr id="11" name="letter-401"/>
+          <p:cNvSpPr/>
+          <p:nvPr/>
+        </p:nvSpPr>
+        <p:spPr>
+          <a:xfrm>
+            <a:off x="6519672" y="3172968"/>
+            <a:ext cx="365760" cy="365760"/>
+          </a:xfrm>
+          <a:prstGeom prst="ellipse">
+            <a:avLst/>
+          </a:prstGeom>
+          <a:solidFill>
+            <a:schemeClr val="accent1"/>
+          </a:solidFill>
+          <a:ln/>
+        </p:spPr>
+        <p:txBody>
+          <a:bodyPr wrap="square" lIns="0" tIns="0" rIns="0" bIns="0" rtlCol="0" anchor="ctr"/>
+          <a:lstStyle/>
+          <a:p>
+            <a:pPr algn="ctr" indent="0" marL="0">
+              <a:buNone/>
+            </a:pPr>
+            <a:r>
+              <a:rPr lang="en-US" sz="1200" b="1" dirty="0">
+                <a:solidFill>
+                  <a:schemeClr val="bg1"/>
+                </a:solidFill>
+              </a:rPr>
+              <a:t>2</a:t>
+            </a:r>
+            <a:endParaRPr lang="en-US" sz="1200" dirty="0"/>
+          </a:p>
+        </p:txBody>
+      </p:sp>
+      <p:sp>
+        <p:nvSpPr>
+          <p:cNvPr id="12" name="text-402"/>
+          <p:cNvSpPr txBox="1"/>
+          <p:nvPr/>
+        </p:nvSpPr>
+        <p:spPr>
+          <a:xfrm>
+            <a:off x="7040880" y="3154680"/>
+            <a:ext cx="4389120" cy="914400"/>
+          </a:xfrm>
+          <a:prstGeom prst="rect">
+            <a:avLst/>
+          </a:prstGeom>
+          <a:noFill/>
+          <a:ln/>
+        </p:spPr>
+        <p:txBody>
+          <a:bodyPr wrap="square" lIns="0" tIns="0" rIns="0" bIns="0" rtlCol="0" anchor="t"/>
+          <a:lstStyle/>
+          <a:p>
+            <a:pPr indent="0" marL="0">
+              <a:buNone/>
+            </a:pPr>
+            <a:r>
+              <a:rPr lang="en-US" sz="1500" dirty="0">
+                <a:solidFill>
+                  <a:schemeClr val="bg1"/>
+                </a:solidFill>
+              </a:rPr>
+              <a:t>Record each graded score against earlier submissions</a:t>
+            </a:r>
+            <a:endParaRPr lang="en-US" sz="1500" dirty="0"/>
+          </a:p>
+        </p:txBody>
+      </p:sp>
+      <p:sp>
+        <p:nvSpPr>
+          <p:cNvPr id="13" name="letter-403"/>
+          <p:cNvSpPr/>
+          <p:nvPr/>
+        </p:nvSpPr>
+        <p:spPr>
+          <a:xfrm>
+            <a:off x="6519672" y="4151376"/>
+            <a:ext cx="365760" cy="365760"/>
+          </a:xfrm>
+          <a:prstGeom prst="ellipse">
+            <a:avLst/>
+          </a:prstGeom>
+          <a:solidFill>
+            <a:schemeClr val="accent1"/>
+          </a:solidFill>
+          <a:ln/>
+        </p:spPr>
+        <p:txBody>
+          <a:bodyPr wrap="square" lIns="0" tIns="0" rIns="0" bIns="0" rtlCol="0" anchor="ctr"/>
+          <a:lstStyle/>
+          <a:p>
+            <a:pPr algn="ctr" indent="0" marL="0">
+              <a:buNone/>
+            </a:pPr>
+            <a:r>
+              <a:rPr lang="en-US" sz="1200" b="1" dirty="0">
+                <a:solidFill>
+                  <a:schemeClr val="bg1"/>
+                </a:solidFill>
+              </a:rPr>
+              <a:t>3</a:t>
+            </a:r>
+            <a:endParaRPr lang="en-US" sz="1200" dirty="0"/>
+          </a:p>
+        </p:txBody>
+      </p:sp>
+      <p:sp>
+        <p:nvSpPr>
+          <p:cNvPr id="14" name="text-404"/>
+          <p:cNvSpPr txBox="1"/>
+          <p:nvPr/>
+        </p:nvSpPr>
+        <p:spPr>
+          <a:xfrm>
+            <a:off x="7040880" y="4133088"/>
+            <a:ext cx="4389120" cy="914400"/>
+          </a:xfrm>
+          <a:prstGeom prst="rect">
+            <a:avLst/>
+          </a:prstGeom>
+          <a:noFill/>
+          <a:ln/>
+        </p:spPr>
+        <p:txBody>
+          <a:bodyPr wrap="square" lIns="0" tIns="0" rIns="0" bIns="0" rtlCol="0" anchor="t"/>
+          <a:lstStyle/>
+          <a:p>
+            <a:pPr indent="0" marL="0">
+              <a:buNone/>
+            </a:pPr>
+            <a:r>
+              <a:rPr lang="en-US" sz="1500" dirty="0">
+                <a:solidFill>
+                  <a:schemeClr val="bg1"/>
+                </a:solidFill>
+              </a:rPr>
+              <a:t>Evaluate prospectively: patient-level splits, acceptance criteria set before opening held-out results</a:t>
+            </a:r>
+            <a:endParaRPr lang="en-US" sz="1500" dirty="0"/>
+          </a:p>
+        </p:txBody>
+      </p:sp>
+      <p:sp>
+        <p:nvSpPr>
+          <p:cNvPr id="15" name="letter-405"/>
+          <p:cNvSpPr/>
+          <p:nvPr/>
+        </p:nvSpPr>
+        <p:spPr>
+          <a:xfrm>
+            <a:off x="6519672" y="5129784"/>
+            <a:ext cx="365760" cy="365760"/>
+          </a:xfrm>
+          <a:prstGeom prst="ellipse">
+            <a:avLst/>
+          </a:prstGeom>
+          <a:solidFill>
+            <a:schemeClr val="accent1"/>
+          </a:solidFill>
+          <a:ln/>
+        </p:spPr>
+        <p:txBody>
+          <a:bodyPr wrap="square" lIns="0" tIns="0" rIns="0" bIns="0" rtlCol="0" anchor="ctr"/>
+          <a:lstStyle/>
+          <a:p>
+            <a:pPr algn="ctr" indent="0" marL="0">
+              <a:buNone/>
+            </a:pPr>
+            <a:r>
+              <a:rPr lang="en-US" sz="1200" b="1" dirty="0">
+                <a:solidFill>
+                  <a:schemeClr val="bg1"/>
+                </a:solidFill>
+              </a:rPr>
+              <a:t>4</a:t>
+            </a:r>
+            <a:endParaRPr lang="en-US" sz="1200" dirty="0"/>
+          </a:p>
+        </p:txBody>
+      </p:sp>
+      <p:sp>
+        <p:nvSpPr>
+          <p:cNvPr id="16" name="text-406"/>
+          <p:cNvSpPr txBox="1"/>
+          <p:nvPr/>
+        </p:nvSpPr>
+        <p:spPr>
+          <a:xfrm>
+            <a:off x="7040880" y="5111496"/>
+            <a:ext cx="4389120" cy="914400"/>
+          </a:xfrm>
+          <a:prstGeom prst="rect">
+            <a:avLst/>
+          </a:prstGeom>
+          <a:noFill/>
+          <a:ln/>
+        </p:spPr>
+        <p:txBody>
+          <a:bodyPr wrap="square" lIns="0" tIns="0" rIns="0" bIns="0" rtlCol="0" anchor="t"/>
+          <a:lstStyle/>
+          <a:p>
+            <a:pPr indent="0" marL="0">
+              <a:buNone/>
+            </a:pPr>
+            <a:r>
+              <a:rPr lang="en-US" sz="1500" dirty="0">
+                <a:solidFill>
+                  <a:schemeClr val="bg1"/>
+                </a:solidFill>
+              </a:rPr>
+              <a:t>Finalise report and presentation before the competition closes on 22 Oct</a:t>
+            </a:r>
+            <a:endParaRPr lang="en-US" sz="1500" dirty="0"/>
+          </a:p>
+        </p:txBody>
+      </p:sp>
+      <p:sp>
+        <p:nvSpPr>
+          <p:cNvPr id="25" name="Slide Number Placeholder 0"/>
+          <p:cNvSpPr>
+            <a:spLocks noGrp="1"/>
+          </p:cNvSpPr>
+          <p:nvPr>
+            <p:ph type="sldNum" sz="quarter" idx="4294967295"/>
+          </p:nvPr>
+        </p:nvSpPr>
+        <p:spPr>
+          <a:xfrm>
+            <a:off x="10972800" y="6419088"/>
+            <a:ext cx="667512" cy="274320"/>
+          </a:xfrm>
+          <a:prstGeom prst="rect">
+            <a:avLst/>
+          </a:prstGeom>
+          <a:extLst>
+            <a:ext uri="{C572A759-6A51-4108-AA02-DFA0A04FC94B}">
+              <ma14:wrappingTextBoxFlag xmlns:ma14="http://schemas.microsoft.com/office/mac/drawingml/2011/main" val="0"/>
+            </a:ext>
+          </a:extLst>
+        </p:spPr>
+        <p:txBody>
+          <a:bodyPr/>
+          <a:lstStyle>
+            <a:lvl1pPr>
+              <a:defRPr sz="1000">
+                <a:solidFill>
+                  <a:srgbClr val="9FB0BE"/>
+                </a:solidFill>
+              </a:defRPr>
+            </a:lvl1pPr>
+          </a:lstStyle>
+          <a:p>
+            <a:pPr algn="r"/>
+            <a:fld id="{F7021451-1387-4CA6-816F-3879F97B5CBC}" type="slidenum">
+              <a:rPr b="0" lang="en-US"/>
+              <a:t>23</a:t>
+            </a:fld>
+            <a:endParaRPr lang="en-US"/>
+          </a:p>
+        </p:txBody>
+      </p:sp>
+    </p:spTree>
+  </p:cSld>
+  <p:clrMapOvr>
+    <a:masterClrMapping/>
+  </p:clrMapOvr>
+</p:sld>
+</file>
+
+<file path=ppt/slides/slide24.xml><?xml version="1.0" encoding="utf-8"?>
+<p:sld xmlns:a="http://schemas.openxmlformats.org/drawingml/2006/main" xmlns:r="http://schemas.openxmlformats.org/officeDocument/2006/relationships" xmlns:p="http://schemas.openxmlformats.org/presentationml/2006/main">
+  <p:cSld name="Slide 24">
+    <p:spTree>
+      <p:nvGrpSpPr>
+        <p:cNvPr id="1" name=""/>
+        <p:cNvGrpSpPr/>
+        <p:nvPr/>
+      </p:nvGrpSpPr>
+      <p:grpSpPr>
+        <a:xfrm>
+          <a:off x="0" y="0"/>
+          <a:ext cx="0" cy="0"/>
+          <a:chOff x="0" y="0"/>
+          <a:chExt cx="0" cy="0"/>
+        </a:xfrm>
+      </p:grpSpPr>
+      <p:sp>
+        <p:nvSpPr>
+          <p:cNvPr id="2" name="Text 0"/>
+          <p:cNvSpPr/>
+          <p:nvPr>
+            <p:ph idx="100" type="body" hasCustomPrompt="1"/>
+          </p:nvPr>
+        </p:nvSpPr>
+        <p:spPr>
+          <a:xfrm>
+            <a:off x="548640" y="310896"/>
+            <a:ext cx="8229600" cy="274320"/>
+          </a:xfrm>
+          <a:prstGeom prst="rect">
+            <a:avLst/>
+          </a:prstGeom>
+          <a:noFill/>
+          <a:ln/>
+        </p:spPr>
+        <p:txBody>
+          <a:bodyPr wrap="square" lIns="0" tIns="0" rIns="0" bIns="0" rtlCol="0" anchor="t"/>
+          <a:lstStyle/>
+          <a:p>
+            <a:pPr algn="l" indent="0" marL="0">
+              <a:buNone/>
+            </a:pPr>
+            <a:r>
+              <a:rPr lang="en-US" sz="1200" b="1" spc="300" kern="0" dirty="0">
+                <a:solidFill>
+                  <a:schemeClr val="accent1"/>
+                </a:solidFill>
+              </a:rPr>
+              <a:t>CONCLUSION</a:t>
+            </a:r>
+            <a:endParaRPr lang="en-US" sz="1200" dirty="0"/>
+          </a:p>
+        </p:txBody>
+      </p:sp>
+      <p:sp>
+        <p:nvSpPr>
+          <p:cNvPr id="3" name="Text 0"/>
+          <p:cNvSpPr/>
+          <p:nvPr>
+            <p:ph idx="101" type="title" hasCustomPrompt="1"/>
+          </p:nvPr>
+        </p:nvSpPr>
+        <p:spPr>
+          <a:xfrm>
+            <a:off x="548640" y="566928"/>
+            <a:ext cx="11094415" cy="713232"/>
+          </a:xfrm>
+          <a:prstGeom prst="rect">
+            <a:avLst/>
+          </a:prstGeom>
+          <a:noFill/>
+          <a:ln/>
+        </p:spPr>
+        <p:txBody>
+          <a:bodyPr wrap="square" lIns="0" tIns="0" rIns="0" bIns="0" rtlCol="0" anchor="t"/>
+          <a:lstStyle/>
+          <a:p>
+            <a:pPr algn="l" indent="0" marL="0">
+              <a:buNone/>
+            </a:pPr>
+            <a:r>
+              <a:rPr lang="en-US" sz="3400" b="1" dirty="0">
+                <a:solidFill>
+                  <a:schemeClr val="tx1"/>
+                </a:solidFill>
+              </a:rPr>
+              <a:t>References and acknowledgements</a:t>
+            </a:r>
+            <a:endParaRPr lang="en-US" sz="3400" dirty="0"/>
+          </a:p>
+        </p:txBody>
+      </p:sp>
+      <p:sp>
+        <p:nvSpPr>
+          <p:cNvPr id="4" name="Text 2"/>
+          <p:cNvSpPr txBox="1"/>
+          <p:nvPr/>
+        </p:nvSpPr>
+        <p:spPr>
+          <a:xfrm>
+            <a:off x="548640" y="1508760"/>
+            <a:ext cx="5486400" cy="4754880"/>
+          </a:xfrm>
+          <a:prstGeom prst="rect">
+            <a:avLst/>
+          </a:prstGeom>
+          <a:noFill/>
+          <a:ln/>
+        </p:spPr>
+        <p:txBody>
+          <a:bodyPr wrap="square" lIns="0" tIns="0" rIns="0" bIns="0" rtlCol="0" anchor="t"/>
+          <a:lstStyle/>
+          <a:p>
+            <a:pPr indent="0" marL="0">
+              <a:spcBef>
+                <a:spcPts val="600"/>
+              </a:spcBef>
+              <a:spcAft>
+                <a:spcPts val="300"/>
+              </a:spcAft>
+              <a:buNone/>
+            </a:pPr>
+            <a:r>
+              <a:rPr lang="en-US" sz="1400" b="1" dirty="0">
+                <a:solidFill>
+                  <a:schemeClr val="tx2"/>
+                </a:solidFill>
+              </a:rPr>
+              <a:t>Challenge and data</a:t>
+            </a:r>
+            <a:endParaRPr lang="en-US" sz="1400" dirty="0"/>
+          </a:p>
+          <a:p>
+            <a:pPr indent="0" marL="0">
+              <a:spcAft>
+                <a:spcPts val="500"/>
+              </a:spcAft>
+              <a:buNone/>
+            </a:pPr>
+            <a:r>
+              <a:rPr lang="en-US" sz="1400" dirty="0">
+                <a:solidFill>
+                  <a:schemeClr val="tx2"/>
+                </a:solidFill>
+              </a:rPr>
+              <a:t>RSNA Knee Abnormality Detection AI Challenge (2026). rsna.org/artificial-intelligence/ai-image-challenge/knee-mri-ai-challenge</a:t>
+            </a:r>
+            <a:endParaRPr lang="en-US" sz="1400" dirty="0"/>
+          </a:p>
+          <a:p>
+            <a:pPr indent="0" marL="0">
+              <a:spcAft>
+                <a:spcPts val="500"/>
+              </a:spcAft>
+              <a:buNone/>
+            </a:pPr>
+            <a:r>
+              <a:rPr lang="en-US" sz="1400" dirty="0">
+                <a:solidFill>
+                  <a:schemeClr val="tx2"/>
+                </a:solidFill>
+              </a:rPr>
+              <a:t>Kaggle competition: kaggle.com/competitions/rsna-knee-abnormality-detection</a:t>
+            </a:r>
+            <a:endParaRPr lang="en-US" sz="1400" dirty="0"/>
+          </a:p>
+          <a:p>
+            <a:pPr indent="0" marL="0">
+              <a:spcAft>
+                <a:spcPts val="500"/>
+              </a:spcAft>
+              <a:buNone/>
+            </a:pPr>
+            <a:r>
+              <a:rPr lang="en-US" sz="1400" dirty="0">
+                <a:solidFill>
+                  <a:schemeClr val="tx2"/>
+                </a:solidFill>
+              </a:rPr>
+              <a:t>RSNA News, “RSNA Launches Knee Abnormality Detection AI Challenge”, 5 Aug 2026</a:t>
+            </a:r>
+            <a:pPr indent="0" marL="0">
+              <a:buNone/>
+            </a:pPr>
+            <a:endParaRPr lang="en-US" sz="1400" dirty="0"/>
+          </a:p>
+          <a:p>
+            <a:pPr indent="0" marL="0">
+              <a:spcBef>
+                <a:spcPts val="600"/>
+              </a:spcBef>
+              <a:spcAft>
+                <a:spcPts val="300"/>
+              </a:spcAft>
+              <a:buNone/>
+            </a:pPr>
+            <a:r>
+              <a:rPr lang="en-US" sz="1400" b="1" dirty="0">
+                <a:solidFill>
+                  <a:schemeClr val="tx2"/>
+                </a:solidFill>
+              </a:rPr>
+              <a:t>Models and methods</a:t>
+            </a:r>
+            <a:endParaRPr lang="en-US" sz="1400" dirty="0"/>
+          </a:p>
+          <a:p>
+            <a:pPr indent="0" marL="0">
+              <a:spcAft>
+                <a:spcPts val="500"/>
+              </a:spcAft>
+              <a:buNone/>
+            </a:pPr>
+            <a:r>
+              <a:rPr lang="en-US" sz="1400" dirty="0">
+                <a:solidFill>
+                  <a:schemeClr val="tx2"/>
+                </a:solidFill>
+              </a:rPr>
+              <a:t>Siméoni et al., DINOv3, Meta AI, 2025 (arXiv:2508.10104)</a:t>
+            </a:r>
+            <a:endParaRPr lang="en-US" sz="1400" dirty="0"/>
+          </a:p>
+          <a:p>
+            <a:pPr indent="0" marL="0">
+              <a:spcAft>
+                <a:spcPts val="500"/>
+              </a:spcAft>
+              <a:buNone/>
+            </a:pPr>
+            <a:r>
+              <a:rPr lang="en-US" sz="1400" dirty="0">
+                <a:solidFill>
+                  <a:schemeClr val="tx2"/>
+                </a:solidFill>
+              </a:rPr>
+              <a:t>Oquab et al., DINOv2, 2023 (arXiv:2304.07193)</a:t>
+            </a:r>
+            <a:endParaRPr lang="en-US" sz="1400" dirty="0"/>
+          </a:p>
+          <a:p>
+            <a:pPr indent="0" marL="0">
+              <a:spcAft>
+                <a:spcPts val="500"/>
+              </a:spcAft>
+              <a:buNone/>
+            </a:pPr>
+            <a:r>
+              <a:rPr lang="en-US" sz="1400" dirty="0">
+                <a:solidFill>
+                  <a:schemeClr val="tx2"/>
+                </a:solidFill>
+              </a:rPr>
+              <a:t>Dosovitskiy et al., An Image is Worth 16×16 Words (ViT), ICLR 2021</a:t>
+            </a:r>
+            <a:endParaRPr lang="en-US" sz="1400" dirty="0"/>
+          </a:p>
+          <a:p>
+            <a:pPr indent="0" marL="0">
+              <a:spcAft>
+                <a:spcPts val="500"/>
+              </a:spcAft>
+              <a:buNone/>
+            </a:pPr>
+            <a:r>
+              <a:rPr lang="en-US" sz="1400" dirty="0">
+                <a:solidFill>
+                  <a:schemeClr val="tx2"/>
+                </a:solidFill>
+              </a:rPr>
+              <a:t>Dai et al., CoAtNet, NeurIPS 2021</a:t>
+            </a:r>
+            <a:endParaRPr lang="en-US" sz="1400" dirty="0"/>
+          </a:p>
+          <a:p>
+            <a:pPr indent="0" marL="0">
+              <a:spcAft>
+                <a:spcPts val="500"/>
+              </a:spcAft>
+              <a:buNone/>
+            </a:pPr>
+            <a:r>
+              <a:rPr lang="en-US" sz="1400" dirty="0">
+                <a:solidFill>
+                  <a:schemeClr val="tx2"/>
+                </a:solidFill>
+              </a:rPr>
+              <a:t>Mei et al., RadImageNet, Radiology: Artificial Intelligence, 2022</a:t>
+            </a:r>
+            <a:endParaRPr lang="en-US" sz="1400" dirty="0"/>
+          </a:p>
+          <a:p>
+            <a:pPr indent="0" marL="0">
+              <a:spcAft>
+                <a:spcPts val="500"/>
+              </a:spcAft>
+              <a:buNone/>
+            </a:pPr>
+            <a:r>
+              <a:rPr lang="en-US" sz="1400" dirty="0">
+                <a:solidFill>
+                  <a:schemeClr val="tx2"/>
+                </a:solidFill>
+              </a:rPr>
+              <a:t>He et al., Deep Residual Learning for Image Recognition, CVPR 2016</a:t>
+            </a:r>
+            <a:endParaRPr lang="en-US" sz="1400" dirty="0"/>
+          </a:p>
+        </p:txBody>
+      </p:sp>
+      <p:sp>
+        <p:nvSpPr>
+          <p:cNvPr id="5" name="Text 3"/>
+          <p:cNvSpPr txBox="1"/>
+          <p:nvPr/>
+        </p:nvSpPr>
+        <p:spPr>
+          <a:xfrm>
+            <a:off x="6309360" y="1508760"/>
+            <a:ext cx="5330952" cy="4754880"/>
+          </a:xfrm>
+          <a:prstGeom prst="rect">
+            <a:avLst/>
+          </a:prstGeom>
+          <a:noFill/>
+          <a:ln/>
+        </p:spPr>
+        <p:txBody>
+          <a:bodyPr wrap="square" lIns="0" tIns="0" rIns="0" bIns="0" rtlCol="0" anchor="t"/>
+          <a:lstStyle/>
+          <a:p>
+            <a:pPr indent="0" marL="0">
+              <a:spcBef>
+                <a:spcPts val="600"/>
+              </a:spcBef>
+              <a:spcAft>
+                <a:spcPts val="300"/>
+              </a:spcAft>
+              <a:buNone/>
+            </a:pPr>
+            <a:r>
+              <a:rPr lang="en-US" sz="1400" b="1" dirty="0">
+                <a:solidFill>
+                  <a:schemeClr val="tx2"/>
+                </a:solidFill>
+              </a:rPr>
+              <a:t>Released components used (Kaggle)</a:t>
+            </a:r>
+            <a:endParaRPr lang="en-US" sz="1400" dirty="0"/>
+          </a:p>
+          <a:p>
+            <a:pPr indent="0" marL="0">
+              <a:spcAft>
+                <a:spcPts val="500"/>
+              </a:spcAft>
+              <a:buNone/>
+            </a:pPr>
+            <a:r>
+              <a:rPr lang="en-US" sz="1400" dirty="0">
+                <a:solidFill>
+                  <a:schemeClr val="tx2"/>
+                </a:solidFill>
+              </a:rPr>
+              <a:t>Mattia Angeli: V27 notebook, A5 fold weights, residual CoAtNet</a:t>
+            </a:r>
+            <a:endParaRPr lang="en-US" sz="1400" dirty="0"/>
+          </a:p>
+          <a:p>
+            <a:pPr indent="0" marL="0">
+              <a:spcAft>
+                <a:spcPts val="500"/>
+              </a:spcAft>
+              <a:buNone/>
+            </a:pPr>
+            <a:r>
+              <a:rPr lang="en-US" sz="1400" dirty="0">
+                <a:solidFill>
+                  <a:schemeClr val="tx2"/>
+                </a:solidFill>
+              </a:rPr>
+              <a:t>pilkwang: DINO MRI ensemble weights</a:t>
+            </a:r>
+            <a:endParaRPr lang="en-US" sz="1400" dirty="0"/>
+          </a:p>
+          <a:p>
+            <a:pPr indent="0" marL="0">
+              <a:spcAft>
+                <a:spcPts val="500"/>
+              </a:spcAft>
+              <a:buNone/>
+            </a:pPr>
+            <a:r>
+              <a:rPr lang="en-US" sz="1400" dirty="0">
+                <a:solidFill>
+                  <a:schemeClr val="tx2"/>
+                </a:solidFill>
+              </a:rPr>
+              <a:t>Johnathan Wagner / DreadDevelopment: Raptor CoAtNet</a:t>
+            </a:r>
+            <a:endParaRPr lang="en-US" sz="1400" dirty="0"/>
+          </a:p>
+          <a:p>
+            <a:pPr indent="0" marL="0">
+              <a:spcAft>
+                <a:spcPts val="500"/>
+              </a:spcAft>
+              <a:buNone/>
+            </a:pPr>
+            <a:r>
+              <a:rPr lang="en-US" sz="1400" dirty="0">
+                <a:solidFill>
+                  <a:schemeClr val="tx2"/>
+                </a:solidFill>
+              </a:rPr>
+              <a:t>Antoine (antoinegg1): reference Rad heads, E11 v20 heads</a:t>
+            </a:r>
+            <a:endParaRPr lang="en-US" sz="1400" dirty="0"/>
+          </a:p>
+          <a:p>
+            <a:pPr indent="0" marL="0">
+              <a:spcAft>
+                <a:spcPts val="500"/>
+              </a:spcAft>
+              <a:buNone/>
+            </a:pPr>
+            <a:r>
+              <a:rPr lang="en-US" sz="1400" dirty="0">
+                <a:solidFill>
+                  <a:schemeClr val="tx2"/>
+                </a:solidFill>
+              </a:rPr>
+              <a:t>Sofia Anjenje: E11 / E13 implementations</a:t>
+            </a:r>
+            <a:endParaRPr lang="en-US" sz="1400" dirty="0"/>
+          </a:p>
+          <a:p>
+            <a:pPr indent="0" marL="0">
+              <a:spcAft>
+                <a:spcPts val="500"/>
+              </a:spcAft>
+              <a:buNone/>
+            </a:pPr>
+            <a:r>
+              <a:rPr lang="en-US" sz="1400" dirty="0">
+                <a:solidFill>
+                  <a:schemeClr val="tx2"/>
+                </a:solidFill>
+              </a:rPr>
+              <a:t>Marwan: RadImageNet ResNet-50 mirror</a:t>
+            </a:r>
+            <a:endParaRPr lang="en-US" sz="1400" dirty="0"/>
+          </a:p>
+          <a:p>
+            <a:pPr indent="0" marL="0">
+              <a:spcAft>
+                <a:spcPts val="500"/>
+              </a:spcAft>
+              <a:buNone/>
+            </a:pPr>
+            <a:r>
+              <a:rPr lang="en-US" sz="1400" dirty="0">
+                <a:solidFill>
+                  <a:schemeClr val="tx2"/>
+                </a:solidFill>
+              </a:rPr>
+              <a:t>Bee V17 notebook lineage: parent submission, public score 0.940</a:t>
+            </a:r>
+            <a:endParaRPr lang="en-US" sz="1400" dirty="0"/>
+          </a:p>
+          <a:p>
+            <a:pPr indent="0" marL="0">
+              <a:spcAft>
+                <a:spcPts val="500"/>
+              </a:spcAft>
+              <a:buNone/>
+            </a:pPr>
+            <a:r>
+              <a:rPr lang="en-US" sz="1400" dirty="0">
+                <a:solidFill>
+                  <a:schemeClr val="tx2"/>
+                </a:solidFill>
+              </a:rPr>
+              <a:t>Mechanism study: simulation/fusion_simulation.py in the project repository</a:t>
+            </a:r>
+            <a:pPr indent="0" marL="0">
+              <a:buNone/>
+            </a:pPr>
+            <a:endParaRPr lang="en-US" sz="1400" dirty="0"/>
+          </a:p>
+          <a:p>
+            <a:pPr indent="0" marL="0">
+              <a:spcBef>
+                <a:spcPts val="600"/>
+              </a:spcBef>
+              <a:spcAft>
+                <a:spcPts val="300"/>
+              </a:spcAft>
+              <a:buNone/>
+            </a:pPr>
+            <a:r>
+              <a:rPr lang="en-US" sz="1400" b="1" dirty="0">
+                <a:solidFill>
+                  <a:schemeClr val="tx2"/>
+                </a:solidFill>
+              </a:rPr>
+              <a:t>Licences</a:t>
+            </a:r>
+            <a:endParaRPr lang="en-US" sz="1400" dirty="0"/>
+          </a:p>
+          <a:p>
+            <a:pPr indent="0" marL="0">
+              <a:spcAft>
+                <a:spcPts val="500"/>
+              </a:spcAft>
+              <a:buNone/>
+            </a:pPr>
+            <a:r>
+              <a:rPr lang="en-US" sz="1400" dirty="0">
+                <a:solidFill>
+                  <a:schemeClr val="tx2"/>
+                </a:solidFill>
+              </a:rPr>
+              <a:t>Apache 2.0 notebook code; CC0 datasets; RadImageNet-based heads CC-BY-NC-SA 4.0; DINOv3 License (Meta)</a:t>
+            </a:r>
+            <a:endParaRPr lang="en-US" sz="1400" dirty="0"/>
+          </a:p>
+        </p:txBody>
+      </p:sp>
+      <p:sp>
+        <p:nvSpPr>
+          <p:cNvPr id="25" name="Slide Number Placeholder 0"/>
+          <p:cNvSpPr>
+            <a:spLocks noGrp="1"/>
+          </p:cNvSpPr>
+          <p:nvPr>
+            <p:ph type="sldNum" sz="quarter" idx="4294967295"/>
+          </p:nvPr>
+        </p:nvSpPr>
+        <p:spPr>
+          <a:xfrm>
+            <a:off x="10972800" y="6419088"/>
+            <a:ext cx="667512" cy="274320"/>
+          </a:xfrm>
+          <a:prstGeom prst="rect">
+            <a:avLst/>
+          </a:prstGeom>
+          <a:extLst>
+            <a:ext uri="{C572A759-6A51-4108-AA02-DFA0A04FC94B}">
+              <ma14:wrappingTextBoxFlag xmlns:ma14="http://schemas.microsoft.com/office/mac/drawingml/2011/main" val="0"/>
+            </a:ext>
+          </a:extLst>
+        </p:spPr>
+        <p:txBody>
+          <a:bodyPr/>
+          <a:lstStyle>
+            <a:lvl1pPr>
+              <a:defRPr sz="1000">
+                <a:solidFill>
+                  <a:srgbClr val="5B6B7A"/>
+                </a:solidFill>
+              </a:defRPr>
+            </a:lvl1pPr>
+          </a:lstStyle>
+          <a:p>
+            <a:pPr algn="r"/>
+            <a:fld id="{F7021451-1387-4CA6-816F-3879F97B5CBC}" type="slidenum">
+              <a:rPr b="0" lang="en-US"/>
+              <a:t>24</a:t>
+            </a:fld>
+            <a:endParaRPr lang="en-US"/>
+          </a:p>
+        </p:txBody>
+      </p:sp>
+    </p:spTree>
+  </p:cSld>
+  <p:clrMapOvr>
+    <a:masterClrMapping/>
+  </p:clrMapOvr>
+</p:sld>
+</file>
+
+<file path=ppt/slides/slide25.xml><?xml version="1.0" encoding="utf-8"?>
+<p:sld xmlns:a="http://schemas.openxmlformats.org/drawingml/2006/main" xmlns:r="http://schemas.openxmlformats.org/officeDocument/2006/relationships" xmlns:p="http://schemas.openxmlformats.org/presentationml/2006/main">
+  <p:cSld name="Slide 25">
+    <p:spTree>
+      <p:nvGrpSpPr>
+        <p:cNvPr id="1" name=""/>
+        <p:cNvGrpSpPr/>
+        <p:nvPr/>
+      </p:nvGrpSpPr>
+      <p:grpSpPr>
+        <a:xfrm>
+          <a:off x="0" y="0"/>
+          <a:ext cx="0" cy="0"/>
+          <a:chOff x="0" y="0"/>
+          <a:chExt cx="0" cy="0"/>
+        </a:xfrm>
+      </p:grpSpPr>
+      <p:sp>
+        <p:nvSpPr>
+          <p:cNvPr id="2" name="Text 0"/>
+          <p:cNvSpPr/>
+          <p:nvPr>
+            <p:ph idx="100" type="body" hasCustomPrompt="1"/>
+          </p:nvPr>
+        </p:nvSpPr>
+        <p:spPr>
+          <a:xfrm>
             <a:off x="731520" y="1417320"/>
             <a:ext cx="6858000" cy="320040"/>
           </a:xfrm>
@@ -19593,7 +21921,7 @@
                   <a:schemeClr val="tx1"/>
                 </a:solidFill>
               </a:rPr>
-              <a:t>Knee MRI is the gold standard for diagnosing internal derangement of the knee, yet interpretation varies between readers. The RSNA 2026 challenge asks for models that score 12 abnormalities per exam, ranked by mean AUC. We assembled a five-stage ensemble inference pipeline from pretrained DINOv3 transformers, a RadImageNet ResNet-50 and CoAtNet hybrids, fused by percentile-rank blending under Kaggle's offline, two-T4, eight-hour limits. On top we designed ABG, a pre-specified experiment layer with three post-calibration additions, and a verification harness that binds every submission to a hashed receipt. The ABG submission scored 0.922 on the public leaderboard. We also report three retired ideas, each stopped by gates set in advance, and what the evidence does and does not support.</a:t>
+              <a:t>Knee MRI is the gold standard for diagnosing internal derangement of the knee, yet interpretation varies between readers. The RSNA 2026 challenge asks for models that score 12 abnormalities per exam, ranked by mean AUC. We assembled a five-stage ensemble inference pipeline from pretrained DINOv3 transformers, a RadImageNet ResNet-50 and CoAtNet hybrids, fused by percentile-rank blending under Kaggle's offline, two-T4, eight-hour limits. On top we designed ABG, a pre-specified experiment layer with three post-calibration additions, and a verification harness that binds every submission to a hashed receipt. Our two graded submissions, the parent recipe and ABG, scored 0.940 and 0.922 on the public leaderboard. A synthetic simulation of the fusion mechanics suggests such additions should move the score by thousandths, so the observed 0.018 gap needs investigating; three retired ideas show gates set in advance at work.</a:t>
             </a:r>
             <a:endParaRPr lang="en-US" sz="1800" dirty="0"/>
           </a:p>
@@ -19743,7 +22071,7 @@
               <a:buNone/>
             </a:pPr>
             <a:r>
-              <a:rPr lang="en-US" sz="4400" b="1" dirty="0">
+              <a:rPr lang="en-US" sz="3800" b="1" dirty="0">
                 <a:solidFill>
                   <a:schemeClr val="accent4"/>
                 </a:solidFill>
@@ -19751,9 +22079,9 @@
                 <a:ea typeface="Cambria" pitchFamily="34" charset="-122"/>
                 <a:cs typeface="Cambria" pitchFamily="34" charset="-120"/>
               </a:rPr>
-              <a:t>0.922</a:t>
-            </a:r>
-            <a:endParaRPr lang="en-US" sz="4400" dirty="0"/>
+              <a:t>0.940 · 0.922</a:t>
+            </a:r>
+            <a:endParaRPr lang="en-US" sz="3800" dirty="0"/>
           </a:p>
         </p:txBody>
       </p:sp>
@@ -19787,7 +22115,7 @@
                   <a:schemeClr val="accent5"/>
                 </a:solidFill>
               </a:rPr>
-              <a:t>public leaderboard, mean AUC</a:t>
+              <a:t>public score: parent · ABG</a:t>
             </a:r>
             <a:endParaRPr lang="en-US" sz="1400" dirty="0"/>
           </a:p>
@@ -23577,7 +25905,7 @@
                   <a:schemeClr val="tx2"/>
                 </a:solidFill>
               </a:rPr>
-              <a:t>A parent recipe (Bee V17, a reproduction of M. Angeli's V27 graph) with a public score of 0.940</a:t>
+              <a:t>M. Angeli's V27 prediction graph, which our parent submission (V17, public 0.940) reproduces</a:t>
             </a:r>
             <a:endParaRPr lang="en-US" sz="1500" dirty="0"/>
           </a:p>
